--- a/cibcmellon/cibcmellon_parking_analytics.pptx
+++ b/cibcmellon/cibcmellon_parking_analytics.pptx
@@ -2499,8 +2499,8 @@
         </p:nvSpPr>
         <p:spPr>
           <a:xfrm>
-            <a:off x="918527" y="1600200"/>
-            <a:ext cx="8915400" cy="1628651"/>
+            <a:off x="2117659" y="1738136"/>
+            <a:ext cx="8915400" cy="961802"/>
           </a:xfrm>
           <a:prstGeom prst="rect">
             <a:avLst/>
@@ -2512,15 +2512,13 @@
           </a:bodyPr>
           <a:lstStyle/>
           <a:p>
-            <a:pPr marL="299085" indent="-286385">
+            <a:pPr marL="12700">
               <a:lnSpc>
                 <a:spcPct val="100000"/>
               </a:lnSpc>
               <a:spcBef>
                 <a:spcPts val="200"/>
               </a:spcBef>
-              <a:buFont typeface="Arial" panose="020B0604020202020204" pitchFamily="34" charset="0"/>
-              <a:buChar char="•"/>
               <a:tabLst>
                 <a:tab pos="299085" algn="l"/>
               </a:tabLst>
@@ -2530,7 +2528,7 @@
                 <a:latin typeface="Helvetica" pitchFamily="2" charset="0"/>
                 <a:cs typeface="Arial"/>
               </a:rPr>
-              <a:t>Integrating postal code information from Statistics Canada to improve geographical insights.  </a:t>
+              <a:t>Integrating postal code  and location information from Statistics Canada to improve geographical insights.  </a:t>
             </a:r>
           </a:p>
           <a:p>
@@ -2552,16 +2550,42 @@
               <a:cs typeface="Arial"/>
             </a:endParaRPr>
           </a:p>
+        </p:txBody>
+      </p:sp>
+      <p:sp>
+        <p:nvSpPr>
+          <p:cNvPr id="7" name="object 3">
+            <a:extLst>
+              <a:ext uri="{FF2B5EF4-FFF2-40B4-BE49-F238E27FC236}">
+                <a16:creationId xmlns:a16="http://schemas.microsoft.com/office/drawing/2014/main" id="{6A161CB6-A1F1-85C6-C2BB-55278A932917}"/>
+              </a:ext>
+            </a:extLst>
+          </p:cNvPr>
+          <p:cNvSpPr txBox="1"/>
+          <p:nvPr/>
+        </p:nvSpPr>
+        <p:spPr>
+          <a:xfrm>
+            <a:off x="2117659" y="3344151"/>
+            <a:ext cx="8915400" cy="654025"/>
+          </a:xfrm>
+          <a:prstGeom prst="rect">
+            <a:avLst/>
+          </a:prstGeom>
+        </p:spPr>
+        <p:txBody>
+          <a:bodyPr vert="horz" wrap="square" lIns="0" tIns="12700" rIns="0" bIns="0" rtlCol="0">
+            <a:spAutoFit/>
+          </a:bodyPr>
+          <a:lstStyle/>
           <a:p>
-            <a:pPr marL="299085" indent="-286385">
+            <a:pPr marL="12700">
               <a:lnSpc>
                 <a:spcPct val="100000"/>
               </a:lnSpc>
               <a:spcBef>
                 <a:spcPts val="200"/>
               </a:spcBef>
-              <a:buFont typeface="Arial" panose="020B0604020202020204" pitchFamily="34" charset="0"/>
-              <a:buChar char="•"/>
               <a:tabLst>
                 <a:tab pos="299085" algn="l"/>
               </a:tabLst>
@@ -2595,6 +2619,2080 @@
           </a:p>
         </p:txBody>
       </p:sp>
+      <p:grpSp>
+        <p:nvGrpSpPr>
+          <p:cNvPr id="8" name="Group 7">
+            <a:extLst>
+              <a:ext uri="{FF2B5EF4-FFF2-40B4-BE49-F238E27FC236}">
+                <a16:creationId xmlns:a16="http://schemas.microsoft.com/office/drawing/2014/main" id="{2E0C057F-5323-68FC-8CE4-DF24E81F72D1}"/>
+              </a:ext>
+            </a:extLst>
+          </p:cNvPr>
+          <p:cNvGrpSpPr>
+            <a:grpSpLocks noChangeAspect="1"/>
+          </p:cNvGrpSpPr>
+          <p:nvPr/>
+        </p:nvGrpSpPr>
+        <p:grpSpPr>
+          <a:xfrm>
+            <a:off x="914017" y="3344151"/>
+            <a:ext cx="951848" cy="951848"/>
+            <a:chOff x="633600" y="1674000"/>
+            <a:chExt cx="951848" cy="951848"/>
+          </a:xfrm>
+        </p:grpSpPr>
+        <p:sp>
+          <p:nvSpPr>
+            <p:cNvPr id="9" name="Rectangle 8">
+              <a:extLst>
+                <a:ext uri="{FF2B5EF4-FFF2-40B4-BE49-F238E27FC236}">
+                  <a16:creationId xmlns:a16="http://schemas.microsoft.com/office/drawing/2014/main" id="{637C3366-0C4F-833E-AB89-32423084B5CB}"/>
+                </a:ext>
+              </a:extLst>
+            </p:cNvPr>
+            <p:cNvSpPr>
+              <a:spLocks noChangeAspect="1"/>
+            </p:cNvSpPr>
+            <p:nvPr/>
+          </p:nvSpPr>
+          <p:spPr>
+            <a:xfrm>
+              <a:off x="633600" y="1674000"/>
+              <a:ext cx="951848" cy="951848"/>
+            </a:xfrm>
+            <a:prstGeom prst="rect">
+              <a:avLst/>
+            </a:prstGeom>
+            <a:ln>
+              <a:noFill/>
+            </a:ln>
+          </p:spPr>
+          <p:style>
+            <a:lnRef idx="2">
+              <a:schemeClr val="accent1">
+                <a:shade val="15000"/>
+              </a:schemeClr>
+            </a:lnRef>
+            <a:fillRef idx="1">
+              <a:schemeClr val="accent1"/>
+            </a:fillRef>
+            <a:effectRef idx="0">
+              <a:schemeClr val="accent1"/>
+            </a:effectRef>
+            <a:fontRef idx="minor">
+              <a:schemeClr val="lt1"/>
+            </a:fontRef>
+          </p:style>
+          <p:txBody>
+            <a:bodyPr rtlCol="0" anchor="ctr"/>
+            <a:lstStyle/>
+            <a:p>
+              <a:pPr algn="ctr"/>
+              <a:endParaRPr lang="en-US" dirty="0">
+                <a:solidFill>
+                  <a:schemeClr val="tx2"/>
+                </a:solidFill>
+              </a:endParaRPr>
+            </a:p>
+          </p:txBody>
+        </p:sp>
+        <p:sp>
+          <p:nvSpPr>
+            <p:cNvPr id="10" name="Freeform 49">
+              <a:extLst>
+                <a:ext uri="{FF2B5EF4-FFF2-40B4-BE49-F238E27FC236}">
+                  <a16:creationId xmlns:a16="http://schemas.microsoft.com/office/drawing/2014/main" id="{FC5EB701-28DA-3EDF-247E-ADB705452176}"/>
+                </a:ext>
+              </a:extLst>
+            </p:cNvPr>
+            <p:cNvSpPr>
+              <a:spLocks noChangeAspect="1" noEditPoints="1"/>
+            </p:cNvSpPr>
+            <p:nvPr/>
+          </p:nvSpPr>
+          <p:spPr bwMode="auto">
+            <a:xfrm>
+              <a:off x="806054" y="1877298"/>
+              <a:ext cx="606941" cy="545252"/>
+            </a:xfrm>
+            <a:custGeom>
+              <a:avLst/>
+              <a:gdLst>
+                <a:gd name="T0" fmla="*/ 6 w 384"/>
+                <a:gd name="T1" fmla="*/ 0 h 345"/>
+                <a:gd name="T2" fmla="*/ 0 w 384"/>
+                <a:gd name="T3" fmla="*/ 288 h 345"/>
+                <a:gd name="T4" fmla="*/ 147 w 384"/>
+                <a:gd name="T5" fmla="*/ 294 h 345"/>
+                <a:gd name="T6" fmla="*/ 107 w 384"/>
+                <a:gd name="T7" fmla="*/ 333 h 345"/>
+                <a:gd name="T8" fmla="*/ 107 w 384"/>
+                <a:gd name="T9" fmla="*/ 345 h 345"/>
+                <a:gd name="T10" fmla="*/ 241 w 384"/>
+                <a:gd name="T11" fmla="*/ 345 h 345"/>
+                <a:gd name="T12" fmla="*/ 294 w 384"/>
+                <a:gd name="T13" fmla="*/ 339 h 345"/>
+                <a:gd name="T14" fmla="*/ 247 w 384"/>
+                <a:gd name="T15" fmla="*/ 333 h 345"/>
+                <a:gd name="T16" fmla="*/ 378 w 384"/>
+                <a:gd name="T17" fmla="*/ 294 h 345"/>
+                <a:gd name="T18" fmla="*/ 384 w 384"/>
+                <a:gd name="T19" fmla="*/ 6 h 345"/>
+                <a:gd name="T20" fmla="*/ 235 w 384"/>
+                <a:gd name="T21" fmla="*/ 333 h 345"/>
+                <a:gd name="T22" fmla="*/ 159 w 384"/>
+                <a:gd name="T23" fmla="*/ 294 h 345"/>
+                <a:gd name="T24" fmla="*/ 235 w 384"/>
+                <a:gd name="T25" fmla="*/ 333 h 345"/>
+                <a:gd name="T26" fmla="*/ 12 w 384"/>
+                <a:gd name="T27" fmla="*/ 282 h 345"/>
+                <a:gd name="T28" fmla="*/ 372 w 384"/>
+                <a:gd name="T29" fmla="*/ 12 h 345"/>
+                <a:gd name="T30" fmla="*/ 31 w 384"/>
+                <a:gd name="T31" fmla="*/ 239 h 345"/>
+                <a:gd name="T32" fmla="*/ 359 w 384"/>
+                <a:gd name="T33" fmla="*/ 233 h 345"/>
+                <a:gd name="T34" fmla="*/ 353 w 384"/>
+                <a:gd name="T35" fmla="*/ 25 h 345"/>
+                <a:gd name="T36" fmla="*/ 25 w 384"/>
+                <a:gd name="T37" fmla="*/ 31 h 345"/>
+                <a:gd name="T38" fmla="*/ 31 w 384"/>
+                <a:gd name="T39" fmla="*/ 239 h 345"/>
+                <a:gd name="T40" fmla="*/ 347 w 384"/>
+                <a:gd name="T41" fmla="*/ 36 h 345"/>
+                <a:gd name="T42" fmla="*/ 37 w 384"/>
+                <a:gd name="T43" fmla="*/ 227 h 345"/>
+                <a:gd name="T44" fmla="*/ 330 w 384"/>
+                <a:gd name="T45" fmla="*/ 61 h 345"/>
+                <a:gd name="T46" fmla="*/ 282 w 384"/>
+                <a:gd name="T47" fmla="*/ 71 h 345"/>
+                <a:gd name="T48" fmla="*/ 285 w 384"/>
+                <a:gd name="T49" fmla="*/ 82 h 345"/>
+                <a:gd name="T50" fmla="*/ 261 w 384"/>
+                <a:gd name="T51" fmla="*/ 140 h 345"/>
+                <a:gd name="T52" fmla="*/ 228 w 384"/>
+                <a:gd name="T53" fmla="*/ 108 h 345"/>
+                <a:gd name="T54" fmla="*/ 224 w 384"/>
+                <a:gd name="T55" fmla="*/ 110 h 345"/>
+                <a:gd name="T56" fmla="*/ 122 w 384"/>
+                <a:gd name="T57" fmla="*/ 134 h 345"/>
+                <a:gd name="T58" fmla="*/ 118 w 384"/>
+                <a:gd name="T59" fmla="*/ 132 h 345"/>
+                <a:gd name="T60" fmla="*/ 60 w 384"/>
+                <a:gd name="T61" fmla="*/ 189 h 345"/>
+                <a:gd name="T62" fmla="*/ 64 w 384"/>
+                <a:gd name="T63" fmla="*/ 199 h 345"/>
+                <a:gd name="T64" fmla="*/ 118 w 384"/>
+                <a:gd name="T65" fmla="*/ 146 h 345"/>
+                <a:gd name="T66" fmla="*/ 163 w 384"/>
+                <a:gd name="T67" fmla="*/ 189 h 345"/>
+                <a:gd name="T68" fmla="*/ 228 w 384"/>
+                <a:gd name="T69" fmla="*/ 122 h 345"/>
+                <a:gd name="T70" fmla="*/ 262 w 384"/>
+                <a:gd name="T71" fmla="*/ 155 h 345"/>
+                <a:gd name="T72" fmla="*/ 322 w 384"/>
+                <a:gd name="T73" fmla="*/ 82 h 345"/>
+                <a:gd name="T74" fmla="*/ 329 w 384"/>
+                <a:gd name="T75" fmla="*/ 113 h 345"/>
+                <a:gd name="T76" fmla="*/ 335 w 384"/>
+                <a:gd name="T77" fmla="*/ 107 h 345"/>
+                <a:gd name="T78" fmla="*/ 330 w 384"/>
+                <a:gd name="T79" fmla="*/ 61 h 345"/>
+              </a:gdLst>
+              <a:ahLst/>
+              <a:cxnLst>
+                <a:cxn ang="0">
+                  <a:pos x="T0" y="T1"/>
+                </a:cxn>
+                <a:cxn ang="0">
+                  <a:pos x="T2" y="T3"/>
+                </a:cxn>
+                <a:cxn ang="0">
+                  <a:pos x="T4" y="T5"/>
+                </a:cxn>
+                <a:cxn ang="0">
+                  <a:pos x="T6" y="T7"/>
+                </a:cxn>
+                <a:cxn ang="0">
+                  <a:pos x="T8" y="T9"/>
+                </a:cxn>
+                <a:cxn ang="0">
+                  <a:pos x="T10" y="T11"/>
+                </a:cxn>
+                <a:cxn ang="0">
+                  <a:pos x="T12" y="T13"/>
+                </a:cxn>
+                <a:cxn ang="0">
+                  <a:pos x="T14" y="T15"/>
+                </a:cxn>
+                <a:cxn ang="0">
+                  <a:pos x="T16" y="T17"/>
+                </a:cxn>
+                <a:cxn ang="0">
+                  <a:pos x="T18" y="T19"/>
+                </a:cxn>
+                <a:cxn ang="0">
+                  <a:pos x="T20" y="T21"/>
+                </a:cxn>
+                <a:cxn ang="0">
+                  <a:pos x="T22" y="T23"/>
+                </a:cxn>
+                <a:cxn ang="0">
+                  <a:pos x="T24" y="T25"/>
+                </a:cxn>
+                <a:cxn ang="0">
+                  <a:pos x="T26" y="T27"/>
+                </a:cxn>
+                <a:cxn ang="0">
+                  <a:pos x="T28" y="T29"/>
+                </a:cxn>
+                <a:cxn ang="0">
+                  <a:pos x="T30" y="T31"/>
+                </a:cxn>
+                <a:cxn ang="0">
+                  <a:pos x="T32" y="T33"/>
+                </a:cxn>
+                <a:cxn ang="0">
+                  <a:pos x="T34" y="T35"/>
+                </a:cxn>
+                <a:cxn ang="0">
+                  <a:pos x="T36" y="T37"/>
+                </a:cxn>
+                <a:cxn ang="0">
+                  <a:pos x="T38" y="T39"/>
+                </a:cxn>
+                <a:cxn ang="0">
+                  <a:pos x="T40" y="T41"/>
+                </a:cxn>
+                <a:cxn ang="0">
+                  <a:pos x="T42" y="T43"/>
+                </a:cxn>
+                <a:cxn ang="0">
+                  <a:pos x="T44" y="T45"/>
+                </a:cxn>
+                <a:cxn ang="0">
+                  <a:pos x="T46" y="T47"/>
+                </a:cxn>
+                <a:cxn ang="0">
+                  <a:pos x="T48" y="T49"/>
+                </a:cxn>
+                <a:cxn ang="0">
+                  <a:pos x="T50" y="T51"/>
+                </a:cxn>
+                <a:cxn ang="0">
+                  <a:pos x="T52" y="T53"/>
+                </a:cxn>
+                <a:cxn ang="0">
+                  <a:pos x="T54" y="T55"/>
+                </a:cxn>
+                <a:cxn ang="0">
+                  <a:pos x="T56" y="T57"/>
+                </a:cxn>
+                <a:cxn ang="0">
+                  <a:pos x="T58" y="T59"/>
+                </a:cxn>
+                <a:cxn ang="0">
+                  <a:pos x="T60" y="T61"/>
+                </a:cxn>
+                <a:cxn ang="0">
+                  <a:pos x="T62" y="T63"/>
+                </a:cxn>
+                <a:cxn ang="0">
+                  <a:pos x="T64" y="T65"/>
+                </a:cxn>
+                <a:cxn ang="0">
+                  <a:pos x="T66" y="T67"/>
+                </a:cxn>
+                <a:cxn ang="0">
+                  <a:pos x="T68" y="T69"/>
+                </a:cxn>
+                <a:cxn ang="0">
+                  <a:pos x="T70" y="T71"/>
+                </a:cxn>
+                <a:cxn ang="0">
+                  <a:pos x="T72" y="T73"/>
+                </a:cxn>
+                <a:cxn ang="0">
+                  <a:pos x="T74" y="T75"/>
+                </a:cxn>
+                <a:cxn ang="0">
+                  <a:pos x="T76" y="T77"/>
+                </a:cxn>
+                <a:cxn ang="0">
+                  <a:pos x="T78" y="T79"/>
+                </a:cxn>
+              </a:cxnLst>
+              <a:rect l="0" t="0" r="r" b="b"/>
+              <a:pathLst>
+                <a:path w="384" h="345">
+                  <a:moveTo>
+                    <a:pt x="378" y="0"/>
+                  </a:moveTo>
+                  <a:cubicBezTo>
+                    <a:pt x="6" y="0"/>
+                    <a:pt x="6" y="0"/>
+                    <a:pt x="6" y="0"/>
+                  </a:cubicBezTo>
+                  <a:cubicBezTo>
+                    <a:pt x="2" y="0"/>
+                    <a:pt x="0" y="3"/>
+                    <a:pt x="0" y="6"/>
+                  </a:cubicBezTo>
+                  <a:cubicBezTo>
+                    <a:pt x="0" y="288"/>
+                    <a:pt x="0" y="288"/>
+                    <a:pt x="0" y="288"/>
+                  </a:cubicBezTo>
+                  <a:cubicBezTo>
+                    <a:pt x="0" y="291"/>
+                    <a:pt x="2" y="294"/>
+                    <a:pt x="6" y="294"/>
+                  </a:cubicBezTo>
+                  <a:cubicBezTo>
+                    <a:pt x="147" y="294"/>
+                    <a:pt x="147" y="294"/>
+                    <a:pt x="147" y="294"/>
+                  </a:cubicBezTo>
+                  <a:cubicBezTo>
+                    <a:pt x="147" y="333"/>
+                    <a:pt x="147" y="333"/>
+                    <a:pt x="147" y="333"/>
+                  </a:cubicBezTo>
+                  <a:cubicBezTo>
+                    <a:pt x="107" y="333"/>
+                    <a:pt x="107" y="333"/>
+                    <a:pt x="107" y="333"/>
+                  </a:cubicBezTo>
+                  <a:cubicBezTo>
+                    <a:pt x="103" y="333"/>
+                    <a:pt x="101" y="336"/>
+                    <a:pt x="101" y="339"/>
+                  </a:cubicBezTo>
+                  <a:cubicBezTo>
+                    <a:pt x="101" y="342"/>
+                    <a:pt x="103" y="345"/>
+                    <a:pt x="107" y="345"/>
+                  </a:cubicBezTo>
+                  <a:cubicBezTo>
+                    <a:pt x="153" y="345"/>
+                    <a:pt x="153" y="345"/>
+                    <a:pt x="153" y="345"/>
+                  </a:cubicBezTo>
+                  <a:cubicBezTo>
+                    <a:pt x="241" y="345"/>
+                    <a:pt x="241" y="345"/>
+                    <a:pt x="241" y="345"/>
+                  </a:cubicBezTo>
+                  <a:cubicBezTo>
+                    <a:pt x="288" y="345"/>
+                    <a:pt x="288" y="345"/>
+                    <a:pt x="288" y="345"/>
+                  </a:cubicBezTo>
+                  <a:cubicBezTo>
+                    <a:pt x="291" y="345"/>
+                    <a:pt x="294" y="342"/>
+                    <a:pt x="294" y="339"/>
+                  </a:cubicBezTo>
+                  <a:cubicBezTo>
+                    <a:pt x="294" y="336"/>
+                    <a:pt x="291" y="333"/>
+                    <a:pt x="288" y="333"/>
+                  </a:cubicBezTo>
+                  <a:cubicBezTo>
+                    <a:pt x="247" y="333"/>
+                    <a:pt x="247" y="333"/>
+                    <a:pt x="247" y="333"/>
+                  </a:cubicBezTo>
+                  <a:cubicBezTo>
+                    <a:pt x="247" y="294"/>
+                    <a:pt x="247" y="294"/>
+                    <a:pt x="247" y="294"/>
+                  </a:cubicBezTo>
+                  <a:cubicBezTo>
+                    <a:pt x="378" y="294"/>
+                    <a:pt x="378" y="294"/>
+                    <a:pt x="378" y="294"/>
+                  </a:cubicBezTo>
+                  <a:cubicBezTo>
+                    <a:pt x="381" y="294"/>
+                    <a:pt x="384" y="291"/>
+                    <a:pt x="384" y="288"/>
+                  </a:cubicBezTo>
+                  <a:cubicBezTo>
+                    <a:pt x="384" y="6"/>
+                    <a:pt x="384" y="6"/>
+                    <a:pt x="384" y="6"/>
+                  </a:cubicBezTo>
+                  <a:cubicBezTo>
+                    <a:pt x="384" y="3"/>
+                    <a:pt x="381" y="0"/>
+                    <a:pt x="378" y="0"/>
+                  </a:cubicBezTo>
+                  <a:close/>
+                  <a:moveTo>
+                    <a:pt x="235" y="333"/>
+                  </a:moveTo>
+                  <a:cubicBezTo>
+                    <a:pt x="159" y="333"/>
+                    <a:pt x="159" y="333"/>
+                    <a:pt x="159" y="333"/>
+                  </a:cubicBezTo>
+                  <a:cubicBezTo>
+                    <a:pt x="159" y="294"/>
+                    <a:pt x="159" y="294"/>
+                    <a:pt x="159" y="294"/>
+                  </a:cubicBezTo>
+                  <a:cubicBezTo>
+                    <a:pt x="235" y="294"/>
+                    <a:pt x="235" y="294"/>
+                    <a:pt x="235" y="294"/>
+                  </a:cubicBezTo>
+                  <a:lnTo>
+                    <a:pt x="235" y="333"/>
+                  </a:lnTo>
+                  <a:close/>
+                  <a:moveTo>
+                    <a:pt x="372" y="282"/>
+                  </a:moveTo>
+                  <a:cubicBezTo>
+                    <a:pt x="12" y="282"/>
+                    <a:pt x="12" y="282"/>
+                    <a:pt x="12" y="282"/>
+                  </a:cubicBezTo>
+                  <a:cubicBezTo>
+                    <a:pt x="12" y="12"/>
+                    <a:pt x="12" y="12"/>
+                    <a:pt x="12" y="12"/>
+                  </a:cubicBezTo>
+                  <a:cubicBezTo>
+                    <a:pt x="372" y="12"/>
+                    <a:pt x="372" y="12"/>
+                    <a:pt x="372" y="12"/>
+                  </a:cubicBezTo>
+                  <a:lnTo>
+                    <a:pt x="372" y="282"/>
+                  </a:lnTo>
+                  <a:close/>
+                  <a:moveTo>
+                    <a:pt x="31" y="239"/>
+                  </a:moveTo>
+                  <a:cubicBezTo>
+                    <a:pt x="353" y="239"/>
+                    <a:pt x="353" y="239"/>
+                    <a:pt x="353" y="239"/>
+                  </a:cubicBezTo>
+                  <a:cubicBezTo>
+                    <a:pt x="356" y="239"/>
+                    <a:pt x="359" y="236"/>
+                    <a:pt x="359" y="233"/>
+                  </a:cubicBezTo>
+                  <a:cubicBezTo>
+                    <a:pt x="359" y="31"/>
+                    <a:pt x="359" y="31"/>
+                    <a:pt x="359" y="31"/>
+                  </a:cubicBezTo>
+                  <a:cubicBezTo>
+                    <a:pt x="359" y="27"/>
+                    <a:pt x="356" y="25"/>
+                    <a:pt x="353" y="25"/>
+                  </a:cubicBezTo>
+                  <a:cubicBezTo>
+                    <a:pt x="31" y="25"/>
+                    <a:pt x="31" y="25"/>
+                    <a:pt x="31" y="25"/>
+                  </a:cubicBezTo>
+                  <a:cubicBezTo>
+                    <a:pt x="28" y="25"/>
+                    <a:pt x="25" y="27"/>
+                    <a:pt x="25" y="31"/>
+                  </a:cubicBezTo>
+                  <a:cubicBezTo>
+                    <a:pt x="25" y="233"/>
+                    <a:pt x="25" y="233"/>
+                    <a:pt x="25" y="233"/>
+                  </a:cubicBezTo>
+                  <a:cubicBezTo>
+                    <a:pt x="25" y="236"/>
+                    <a:pt x="28" y="239"/>
+                    <a:pt x="31" y="239"/>
+                  </a:cubicBezTo>
+                  <a:close/>
+                  <a:moveTo>
+                    <a:pt x="37" y="36"/>
+                  </a:moveTo>
+                  <a:cubicBezTo>
+                    <a:pt x="347" y="36"/>
+                    <a:pt x="347" y="36"/>
+                    <a:pt x="347" y="36"/>
+                  </a:cubicBezTo>
+                  <a:cubicBezTo>
+                    <a:pt x="347" y="227"/>
+                    <a:pt x="347" y="227"/>
+                    <a:pt x="347" y="227"/>
+                  </a:cubicBezTo>
+                  <a:cubicBezTo>
+                    <a:pt x="37" y="227"/>
+                    <a:pt x="37" y="227"/>
+                    <a:pt x="37" y="227"/>
+                  </a:cubicBezTo>
+                  <a:lnTo>
+                    <a:pt x="37" y="36"/>
+                  </a:lnTo>
+                  <a:close/>
+                  <a:moveTo>
+                    <a:pt x="330" y="61"/>
+                  </a:moveTo>
+                  <a:cubicBezTo>
+                    <a:pt x="329" y="60"/>
+                    <a:pt x="327" y="59"/>
+                    <a:pt x="325" y="60"/>
+                  </a:cubicBezTo>
+                  <a:cubicBezTo>
+                    <a:pt x="282" y="71"/>
+                    <a:pt x="282" y="71"/>
+                    <a:pt x="282" y="71"/>
+                  </a:cubicBezTo>
+                  <a:cubicBezTo>
+                    <a:pt x="279" y="72"/>
+                    <a:pt x="277" y="75"/>
+                    <a:pt x="278" y="78"/>
+                  </a:cubicBezTo>
+                  <a:cubicBezTo>
+                    <a:pt x="279" y="81"/>
+                    <a:pt x="282" y="83"/>
+                    <a:pt x="285" y="82"/>
+                  </a:cubicBezTo>
+                  <a:cubicBezTo>
+                    <a:pt x="312" y="75"/>
+                    <a:pt x="312" y="75"/>
+                    <a:pt x="312" y="75"/>
+                  </a:cubicBezTo>
+                  <a:cubicBezTo>
+                    <a:pt x="261" y="140"/>
+                    <a:pt x="261" y="140"/>
+                    <a:pt x="261" y="140"/>
+                  </a:cubicBezTo>
+                  <a:cubicBezTo>
+                    <a:pt x="232" y="110"/>
+                    <a:pt x="232" y="110"/>
+                    <a:pt x="232" y="110"/>
+                  </a:cubicBezTo>
+                  <a:cubicBezTo>
+                    <a:pt x="231" y="109"/>
+                    <a:pt x="230" y="108"/>
+                    <a:pt x="228" y="108"/>
+                  </a:cubicBezTo>
+                  <a:cubicBezTo>
+                    <a:pt x="228" y="108"/>
+                    <a:pt x="228" y="108"/>
+                    <a:pt x="228" y="108"/>
+                  </a:cubicBezTo>
+                  <a:cubicBezTo>
+                    <a:pt x="227" y="108"/>
+                    <a:pt x="225" y="109"/>
+                    <a:pt x="224" y="110"/>
+                  </a:cubicBezTo>
+                  <a:cubicBezTo>
+                    <a:pt x="163" y="175"/>
+                    <a:pt x="163" y="175"/>
+                    <a:pt x="163" y="175"/>
+                  </a:cubicBezTo>
+                  <a:cubicBezTo>
+                    <a:pt x="122" y="134"/>
+                    <a:pt x="122" y="134"/>
+                    <a:pt x="122" y="134"/>
+                  </a:cubicBezTo>
+                  <a:cubicBezTo>
+                    <a:pt x="121" y="133"/>
+                    <a:pt x="120" y="132"/>
+                    <a:pt x="118" y="132"/>
+                  </a:cubicBezTo>
+                  <a:cubicBezTo>
+                    <a:pt x="118" y="132"/>
+                    <a:pt x="118" y="132"/>
+                    <a:pt x="118" y="132"/>
+                  </a:cubicBezTo>
+                  <a:cubicBezTo>
+                    <a:pt x="117" y="132"/>
+                    <a:pt x="115" y="133"/>
+                    <a:pt x="114" y="134"/>
+                  </a:cubicBezTo>
+                  <a:cubicBezTo>
+                    <a:pt x="60" y="189"/>
+                    <a:pt x="60" y="189"/>
+                    <a:pt x="60" y="189"/>
+                  </a:cubicBezTo>
+                  <a:cubicBezTo>
+                    <a:pt x="57" y="192"/>
+                    <a:pt x="57" y="195"/>
+                    <a:pt x="60" y="197"/>
+                  </a:cubicBezTo>
+                  <a:cubicBezTo>
+                    <a:pt x="61" y="199"/>
+                    <a:pt x="62" y="199"/>
+                    <a:pt x="64" y="199"/>
+                  </a:cubicBezTo>
+                  <a:cubicBezTo>
+                    <a:pt x="65" y="199"/>
+                    <a:pt x="67" y="199"/>
+                    <a:pt x="68" y="197"/>
+                  </a:cubicBezTo>
+                  <a:cubicBezTo>
+                    <a:pt x="118" y="146"/>
+                    <a:pt x="118" y="146"/>
+                    <a:pt x="118" y="146"/>
+                  </a:cubicBezTo>
+                  <a:cubicBezTo>
+                    <a:pt x="159" y="187"/>
+                    <a:pt x="159" y="187"/>
+                    <a:pt x="159" y="187"/>
+                  </a:cubicBezTo>
+                  <a:cubicBezTo>
+                    <a:pt x="160" y="188"/>
+                    <a:pt x="162" y="189"/>
+                    <a:pt x="163" y="189"/>
+                  </a:cubicBezTo>
+                  <a:cubicBezTo>
+                    <a:pt x="165" y="189"/>
+                    <a:pt x="167" y="188"/>
+                    <a:pt x="168" y="187"/>
+                  </a:cubicBezTo>
+                  <a:cubicBezTo>
+                    <a:pt x="228" y="122"/>
+                    <a:pt x="228" y="122"/>
+                    <a:pt x="228" y="122"/>
+                  </a:cubicBezTo>
+                  <a:cubicBezTo>
+                    <a:pt x="258" y="153"/>
+                    <a:pt x="258" y="153"/>
+                    <a:pt x="258" y="153"/>
+                  </a:cubicBezTo>
+                  <a:cubicBezTo>
+                    <a:pt x="259" y="154"/>
+                    <a:pt x="260" y="155"/>
+                    <a:pt x="262" y="155"/>
+                  </a:cubicBezTo>
+                  <a:cubicBezTo>
+                    <a:pt x="264" y="155"/>
+                    <a:pt x="265" y="154"/>
+                    <a:pt x="266" y="153"/>
+                  </a:cubicBezTo>
+                  <a:cubicBezTo>
+                    <a:pt x="322" y="82"/>
+                    <a:pt x="322" y="82"/>
+                    <a:pt x="322" y="82"/>
+                  </a:cubicBezTo>
+                  <a:cubicBezTo>
+                    <a:pt x="324" y="108"/>
+                    <a:pt x="324" y="108"/>
+                    <a:pt x="324" y="108"/>
+                  </a:cubicBezTo>
+                  <a:cubicBezTo>
+                    <a:pt x="324" y="111"/>
+                    <a:pt x="326" y="113"/>
+                    <a:pt x="329" y="113"/>
+                  </a:cubicBezTo>
+                  <a:cubicBezTo>
+                    <a:pt x="329" y="113"/>
+                    <a:pt x="330" y="113"/>
+                    <a:pt x="330" y="113"/>
+                  </a:cubicBezTo>
+                  <a:cubicBezTo>
+                    <a:pt x="333" y="113"/>
+                    <a:pt x="335" y="110"/>
+                    <a:pt x="335" y="107"/>
+                  </a:cubicBezTo>
+                  <a:cubicBezTo>
+                    <a:pt x="332" y="65"/>
+                    <a:pt x="332" y="65"/>
+                    <a:pt x="332" y="65"/>
+                  </a:cubicBezTo>
+                  <a:cubicBezTo>
+                    <a:pt x="332" y="63"/>
+                    <a:pt x="331" y="62"/>
+                    <a:pt x="330" y="61"/>
+                  </a:cubicBezTo>
+                  <a:close/>
+                </a:path>
+              </a:pathLst>
+            </a:custGeom>
+            <a:solidFill>
+              <a:srgbClr val="FFFFFF"/>
+            </a:solidFill>
+            <a:ln>
+              <a:noFill/>
+            </a:ln>
+            <a:extLst>
+              <a:ext uri="{91240B29-F687-4F45-9708-019B960494DF}">
+                <a14:hiddenLine xmlns:a14="http://schemas.microsoft.com/office/drawing/2010/main" w="9525">
+                  <a:solidFill>
+                    <a:srgbClr val="000000"/>
+                  </a:solidFill>
+                  <a:round/>
+                  <a:headEnd/>
+                  <a:tailEnd/>
+                </a14:hiddenLine>
+              </a:ext>
+            </a:extLst>
+          </p:spPr>
+          <p:txBody>
+            <a:bodyPr vert="horz" wrap="square" lIns="91440" tIns="45720" rIns="91440" bIns="45720" numCol="1" anchor="t" anchorCtr="0" compatLnSpc="1">
+              <a:prstTxWarp prst="textNoShape">
+                <a:avLst/>
+              </a:prstTxWarp>
+            </a:bodyPr>
+            <a:lstStyle/>
+            <a:p>
+              <a:endParaRPr lang="en-US"/>
+            </a:p>
+          </p:txBody>
+        </p:sp>
+      </p:grpSp>
+      <p:grpSp>
+        <p:nvGrpSpPr>
+          <p:cNvPr id="11" name="Group 10">
+            <a:extLst>
+              <a:ext uri="{FF2B5EF4-FFF2-40B4-BE49-F238E27FC236}">
+                <a16:creationId xmlns:a16="http://schemas.microsoft.com/office/drawing/2014/main" id="{BDC37EFB-BD64-EFDC-6D0C-6EC016A1486C}"/>
+              </a:ext>
+            </a:extLst>
+          </p:cNvPr>
+          <p:cNvGrpSpPr>
+            <a:grpSpLocks noChangeAspect="1"/>
+          </p:cNvGrpSpPr>
+          <p:nvPr/>
+        </p:nvGrpSpPr>
+        <p:grpSpPr>
+          <a:xfrm>
+            <a:off x="918527" y="1752600"/>
+            <a:ext cx="947338" cy="947338"/>
+            <a:chOff x="4172868" y="1408094"/>
+            <a:chExt cx="947338" cy="947338"/>
+          </a:xfrm>
+        </p:grpSpPr>
+        <p:sp>
+          <p:nvSpPr>
+            <p:cNvPr id="12" name="Rectangle 11">
+              <a:extLst>
+                <a:ext uri="{FF2B5EF4-FFF2-40B4-BE49-F238E27FC236}">
+                  <a16:creationId xmlns:a16="http://schemas.microsoft.com/office/drawing/2014/main" id="{DAE5DB02-7DB9-583F-ECAD-971E8A26E237}"/>
+                </a:ext>
+              </a:extLst>
+            </p:cNvPr>
+            <p:cNvSpPr>
+              <a:spLocks noChangeAspect="1"/>
+            </p:cNvSpPr>
+            <p:nvPr/>
+          </p:nvSpPr>
+          <p:spPr>
+            <a:xfrm>
+              <a:off x="4172868" y="1408094"/>
+              <a:ext cx="947338" cy="947338"/>
+            </a:xfrm>
+            <a:prstGeom prst="rect">
+              <a:avLst/>
+            </a:prstGeom>
+            <a:ln>
+              <a:noFill/>
+            </a:ln>
+          </p:spPr>
+          <p:style>
+            <a:lnRef idx="2">
+              <a:schemeClr val="accent1">
+                <a:shade val="50000"/>
+              </a:schemeClr>
+            </a:lnRef>
+            <a:fillRef idx="1">
+              <a:schemeClr val="accent1"/>
+            </a:fillRef>
+            <a:effectRef idx="0">
+              <a:schemeClr val="accent1"/>
+            </a:effectRef>
+            <a:fontRef idx="minor">
+              <a:schemeClr val="lt1"/>
+            </a:fontRef>
+          </p:style>
+          <p:txBody>
+            <a:bodyPr rtlCol="0" anchor="ctr"/>
+            <a:lstStyle/>
+            <a:p>
+              <a:pPr algn="ctr"/>
+              <a:endParaRPr lang="en-US" dirty="0"/>
+            </a:p>
+          </p:txBody>
+        </p:sp>
+        <p:sp>
+          <p:nvSpPr>
+            <p:cNvPr id="13" name="Freeform 77">
+              <a:extLst>
+                <a:ext uri="{FF2B5EF4-FFF2-40B4-BE49-F238E27FC236}">
+                  <a16:creationId xmlns:a16="http://schemas.microsoft.com/office/drawing/2014/main" id="{2004D219-485D-7F67-F5D8-980368FC489E}"/>
+                </a:ext>
+              </a:extLst>
+            </p:cNvPr>
+            <p:cNvSpPr>
+              <a:spLocks noChangeAspect="1" noEditPoints="1"/>
+            </p:cNvSpPr>
+            <p:nvPr/>
+          </p:nvSpPr>
+          <p:spPr bwMode="auto">
+            <a:xfrm>
+              <a:off x="4255149" y="1585298"/>
+              <a:ext cx="782776" cy="592931"/>
+            </a:xfrm>
+            <a:custGeom>
+              <a:avLst/>
+              <a:gdLst>
+                <a:gd name="T0" fmla="*/ 398 w 493"/>
+                <a:gd name="T1" fmla="*/ 19 h 373"/>
+                <a:gd name="T2" fmla="*/ 346 w 493"/>
+                <a:gd name="T3" fmla="*/ 36 h 373"/>
+                <a:gd name="T4" fmla="*/ 249 w 493"/>
+                <a:gd name="T5" fmla="*/ 74 h 373"/>
+                <a:gd name="T6" fmla="*/ 135 w 493"/>
+                <a:gd name="T7" fmla="*/ 48 h 373"/>
+                <a:gd name="T8" fmla="*/ 121 w 493"/>
+                <a:gd name="T9" fmla="*/ 2 h 373"/>
+                <a:gd name="T10" fmla="*/ 27 w 493"/>
+                <a:gd name="T11" fmla="*/ 147 h 373"/>
+                <a:gd name="T12" fmla="*/ 122 w 493"/>
+                <a:gd name="T13" fmla="*/ 209 h 373"/>
+                <a:gd name="T14" fmla="*/ 112 w 493"/>
+                <a:gd name="T15" fmla="*/ 283 h 373"/>
+                <a:gd name="T16" fmla="*/ 142 w 493"/>
+                <a:gd name="T17" fmla="*/ 313 h 373"/>
+                <a:gd name="T18" fmla="*/ 173 w 493"/>
+                <a:gd name="T19" fmla="*/ 344 h 373"/>
+                <a:gd name="T20" fmla="*/ 201 w 493"/>
+                <a:gd name="T21" fmla="*/ 373 h 373"/>
+                <a:gd name="T22" fmla="*/ 286 w 493"/>
+                <a:gd name="T23" fmla="*/ 361 h 373"/>
+                <a:gd name="T24" fmla="*/ 341 w 493"/>
+                <a:gd name="T25" fmla="*/ 305 h 373"/>
+                <a:gd name="T26" fmla="*/ 392 w 493"/>
+                <a:gd name="T27" fmla="*/ 265 h 373"/>
+                <a:gd name="T28" fmla="*/ 457 w 493"/>
+                <a:gd name="T29" fmla="*/ 147 h 373"/>
+                <a:gd name="T30" fmla="*/ 491 w 493"/>
+                <a:gd name="T31" fmla="*/ 113 h 373"/>
+                <a:gd name="T32" fmla="*/ 108 w 493"/>
+                <a:gd name="T33" fmla="*/ 41 h 373"/>
+                <a:gd name="T34" fmla="*/ 108 w 493"/>
+                <a:gd name="T35" fmla="*/ 24 h 373"/>
+                <a:gd name="T36" fmla="*/ 122 w 493"/>
+                <a:gd name="T37" fmla="*/ 44 h 373"/>
+                <a:gd name="T38" fmla="*/ 101 w 493"/>
+                <a:gd name="T39" fmla="*/ 267 h 373"/>
+                <a:gd name="T40" fmla="*/ 163 w 493"/>
+                <a:gd name="T41" fmla="*/ 190 h 373"/>
+                <a:gd name="T42" fmla="*/ 101 w 493"/>
+                <a:gd name="T43" fmla="*/ 267 h 373"/>
+                <a:gd name="T44" fmla="*/ 183 w 493"/>
+                <a:gd name="T45" fmla="*/ 225 h 373"/>
+                <a:gd name="T46" fmla="*/ 204 w 493"/>
+                <a:gd name="T47" fmla="*/ 245 h 373"/>
+                <a:gd name="T48" fmla="*/ 158 w 493"/>
+                <a:gd name="T49" fmla="*/ 318 h 373"/>
+                <a:gd name="T50" fmla="*/ 235 w 493"/>
+                <a:gd name="T51" fmla="*/ 256 h 373"/>
+                <a:gd name="T52" fmla="*/ 183 w 493"/>
+                <a:gd name="T53" fmla="*/ 328 h 373"/>
+                <a:gd name="T54" fmla="*/ 191 w 493"/>
+                <a:gd name="T55" fmla="*/ 357 h 373"/>
+                <a:gd name="T56" fmla="*/ 243 w 493"/>
+                <a:gd name="T57" fmla="*/ 285 h 373"/>
+                <a:gd name="T58" fmla="*/ 263 w 493"/>
+                <a:gd name="T59" fmla="*/ 305 h 373"/>
+                <a:gd name="T60" fmla="*/ 352 w 493"/>
+                <a:gd name="T61" fmla="*/ 246 h 373"/>
+                <a:gd name="T62" fmla="*/ 354 w 493"/>
+                <a:gd name="T63" fmla="*/ 265 h 373"/>
+                <a:gd name="T64" fmla="*/ 315 w 493"/>
+                <a:gd name="T65" fmla="*/ 276 h 373"/>
+                <a:gd name="T66" fmla="*/ 325 w 493"/>
+                <a:gd name="T67" fmla="*/ 315 h 373"/>
+                <a:gd name="T68" fmla="*/ 285 w 493"/>
+                <a:gd name="T69" fmla="*/ 304 h 373"/>
+                <a:gd name="T70" fmla="*/ 296 w 493"/>
+                <a:gd name="T71" fmla="*/ 344 h 373"/>
+                <a:gd name="T72" fmla="*/ 272 w 493"/>
+                <a:gd name="T73" fmla="*/ 276 h 373"/>
+                <a:gd name="T74" fmla="*/ 243 w 493"/>
+                <a:gd name="T75" fmla="*/ 247 h 373"/>
+                <a:gd name="T76" fmla="*/ 190 w 493"/>
+                <a:gd name="T77" fmla="*/ 209 h 373"/>
+                <a:gd name="T78" fmla="*/ 56 w 493"/>
+                <a:gd name="T79" fmla="*/ 127 h 373"/>
+                <a:gd name="T80" fmla="*/ 217 w 493"/>
+                <a:gd name="T81" fmla="*/ 106 h 373"/>
+                <a:gd name="T82" fmla="*/ 274 w 493"/>
+                <a:gd name="T83" fmla="*/ 126 h 373"/>
+                <a:gd name="T84" fmla="*/ 383 w 493"/>
+                <a:gd name="T85" fmla="*/ 257 h 373"/>
+                <a:gd name="T86" fmla="*/ 269 w 493"/>
+                <a:gd name="T87" fmla="*/ 114 h 373"/>
+                <a:gd name="T88" fmla="*/ 274 w 493"/>
+                <a:gd name="T89" fmla="*/ 76 h 373"/>
+                <a:gd name="T90" fmla="*/ 437 w 493"/>
+                <a:gd name="T91" fmla="*/ 128 h 373"/>
+                <a:gd name="T92" fmla="*/ 376 w 493"/>
+                <a:gd name="T93" fmla="*/ 15 h 373"/>
+                <a:gd name="T94" fmla="*/ 381 w 493"/>
+                <a:gd name="T95" fmla="*/ 42 h 373"/>
+                <a:gd name="T96" fmla="*/ 461 w 493"/>
+                <a:gd name="T97" fmla="*/ 134 h 373"/>
+              </a:gdLst>
+              <a:ahLst/>
+              <a:cxnLst>
+                <a:cxn ang="0">
+                  <a:pos x="T0" y="T1"/>
+                </a:cxn>
+                <a:cxn ang="0">
+                  <a:pos x="T2" y="T3"/>
+                </a:cxn>
+                <a:cxn ang="0">
+                  <a:pos x="T4" y="T5"/>
+                </a:cxn>
+                <a:cxn ang="0">
+                  <a:pos x="T6" y="T7"/>
+                </a:cxn>
+                <a:cxn ang="0">
+                  <a:pos x="T8" y="T9"/>
+                </a:cxn>
+                <a:cxn ang="0">
+                  <a:pos x="T10" y="T11"/>
+                </a:cxn>
+                <a:cxn ang="0">
+                  <a:pos x="T12" y="T13"/>
+                </a:cxn>
+                <a:cxn ang="0">
+                  <a:pos x="T14" y="T15"/>
+                </a:cxn>
+                <a:cxn ang="0">
+                  <a:pos x="T16" y="T17"/>
+                </a:cxn>
+                <a:cxn ang="0">
+                  <a:pos x="T18" y="T19"/>
+                </a:cxn>
+                <a:cxn ang="0">
+                  <a:pos x="T20" y="T21"/>
+                </a:cxn>
+                <a:cxn ang="0">
+                  <a:pos x="T22" y="T23"/>
+                </a:cxn>
+                <a:cxn ang="0">
+                  <a:pos x="T24" y="T25"/>
+                </a:cxn>
+                <a:cxn ang="0">
+                  <a:pos x="T26" y="T27"/>
+                </a:cxn>
+                <a:cxn ang="0">
+                  <a:pos x="T28" y="T29"/>
+                </a:cxn>
+                <a:cxn ang="0">
+                  <a:pos x="T30" y="T31"/>
+                </a:cxn>
+                <a:cxn ang="0">
+                  <a:pos x="T32" y="T33"/>
+                </a:cxn>
+                <a:cxn ang="0">
+                  <a:pos x="T34" y="T35"/>
+                </a:cxn>
+                <a:cxn ang="0">
+                  <a:pos x="T36" y="T37"/>
+                </a:cxn>
+                <a:cxn ang="0">
+                  <a:pos x="T38" y="T39"/>
+                </a:cxn>
+                <a:cxn ang="0">
+                  <a:pos x="T40" y="T41"/>
+                </a:cxn>
+                <a:cxn ang="0">
+                  <a:pos x="T42" y="T43"/>
+                </a:cxn>
+                <a:cxn ang="0">
+                  <a:pos x="T44" y="T45"/>
+                </a:cxn>
+                <a:cxn ang="0">
+                  <a:pos x="T46" y="T47"/>
+                </a:cxn>
+                <a:cxn ang="0">
+                  <a:pos x="T48" y="T49"/>
+                </a:cxn>
+                <a:cxn ang="0">
+                  <a:pos x="T50" y="T51"/>
+                </a:cxn>
+                <a:cxn ang="0">
+                  <a:pos x="T52" y="T53"/>
+                </a:cxn>
+                <a:cxn ang="0">
+                  <a:pos x="T54" y="T55"/>
+                </a:cxn>
+                <a:cxn ang="0">
+                  <a:pos x="T56" y="T57"/>
+                </a:cxn>
+                <a:cxn ang="0">
+                  <a:pos x="T58" y="T59"/>
+                </a:cxn>
+                <a:cxn ang="0">
+                  <a:pos x="T60" y="T61"/>
+                </a:cxn>
+                <a:cxn ang="0">
+                  <a:pos x="T62" y="T63"/>
+                </a:cxn>
+                <a:cxn ang="0">
+                  <a:pos x="T64" y="T65"/>
+                </a:cxn>
+                <a:cxn ang="0">
+                  <a:pos x="T66" y="T67"/>
+                </a:cxn>
+                <a:cxn ang="0">
+                  <a:pos x="T68" y="T69"/>
+                </a:cxn>
+                <a:cxn ang="0">
+                  <a:pos x="T70" y="T71"/>
+                </a:cxn>
+                <a:cxn ang="0">
+                  <a:pos x="T72" y="T73"/>
+                </a:cxn>
+                <a:cxn ang="0">
+                  <a:pos x="T74" y="T75"/>
+                </a:cxn>
+                <a:cxn ang="0">
+                  <a:pos x="T76" y="T77"/>
+                </a:cxn>
+                <a:cxn ang="0">
+                  <a:pos x="T78" y="T79"/>
+                </a:cxn>
+                <a:cxn ang="0">
+                  <a:pos x="T80" y="T81"/>
+                </a:cxn>
+                <a:cxn ang="0">
+                  <a:pos x="T82" y="T83"/>
+                </a:cxn>
+                <a:cxn ang="0">
+                  <a:pos x="T84" y="T85"/>
+                </a:cxn>
+                <a:cxn ang="0">
+                  <a:pos x="T86" y="T87"/>
+                </a:cxn>
+                <a:cxn ang="0">
+                  <a:pos x="T88" y="T89"/>
+                </a:cxn>
+                <a:cxn ang="0">
+                  <a:pos x="T90" y="T91"/>
+                </a:cxn>
+                <a:cxn ang="0">
+                  <a:pos x="T92" y="T93"/>
+                </a:cxn>
+                <a:cxn ang="0">
+                  <a:pos x="T94" y="T95"/>
+                </a:cxn>
+                <a:cxn ang="0">
+                  <a:pos x="T96" y="T97"/>
+                </a:cxn>
+              </a:cxnLst>
+              <a:rect l="0" t="0" r="r" b="b"/>
+              <a:pathLst>
+                <a:path w="493" h="373">
+                  <a:moveTo>
+                    <a:pt x="491" y="113"/>
+                  </a:moveTo>
+                  <a:cubicBezTo>
+                    <a:pt x="398" y="20"/>
+                    <a:pt x="398" y="20"/>
+                    <a:pt x="398" y="20"/>
+                  </a:cubicBezTo>
+                  <a:cubicBezTo>
+                    <a:pt x="398" y="20"/>
+                    <a:pt x="398" y="20"/>
+                    <a:pt x="398" y="20"/>
+                  </a:cubicBezTo>
+                  <a:cubicBezTo>
+                    <a:pt x="398" y="20"/>
+                    <a:pt x="398" y="20"/>
+                    <a:pt x="398" y="19"/>
+                  </a:cubicBezTo>
+                  <a:cubicBezTo>
+                    <a:pt x="380" y="2"/>
+                    <a:pt x="380" y="2"/>
+                    <a:pt x="380" y="2"/>
+                  </a:cubicBezTo>
+                  <a:cubicBezTo>
+                    <a:pt x="378" y="0"/>
+                    <a:pt x="374" y="0"/>
+                    <a:pt x="372" y="2"/>
+                  </a:cubicBezTo>
+                  <a:cubicBezTo>
+                    <a:pt x="346" y="28"/>
+                    <a:pt x="346" y="28"/>
+                    <a:pt x="346" y="28"/>
+                  </a:cubicBezTo>
+                  <a:cubicBezTo>
+                    <a:pt x="344" y="30"/>
+                    <a:pt x="344" y="34"/>
+                    <a:pt x="346" y="36"/>
+                  </a:cubicBezTo>
+                  <a:cubicBezTo>
+                    <a:pt x="358" y="48"/>
+                    <a:pt x="358" y="48"/>
+                    <a:pt x="358" y="48"/>
+                  </a:cubicBezTo>
+                  <a:cubicBezTo>
+                    <a:pt x="331" y="74"/>
+                    <a:pt x="331" y="74"/>
+                    <a:pt x="331" y="74"/>
+                  </a:cubicBezTo>
+                  <a:cubicBezTo>
+                    <a:pt x="322" y="83"/>
+                    <a:pt x="307" y="83"/>
+                    <a:pt x="298" y="74"/>
+                  </a:cubicBezTo>
+                  <a:cubicBezTo>
+                    <a:pt x="285" y="61"/>
+                    <a:pt x="262" y="61"/>
+                    <a:pt x="249" y="74"/>
+                  </a:cubicBezTo>
+                  <a:cubicBezTo>
+                    <a:pt x="229" y="94"/>
+                    <a:pt x="229" y="94"/>
+                    <a:pt x="229" y="94"/>
+                  </a:cubicBezTo>
+                  <a:cubicBezTo>
+                    <a:pt x="203" y="94"/>
+                    <a:pt x="203" y="94"/>
+                    <a:pt x="203" y="94"/>
+                  </a:cubicBezTo>
+                  <a:cubicBezTo>
+                    <a:pt x="189" y="94"/>
+                    <a:pt x="175" y="88"/>
+                    <a:pt x="164" y="77"/>
+                  </a:cubicBezTo>
+                  <a:cubicBezTo>
+                    <a:pt x="135" y="48"/>
+                    <a:pt x="135" y="48"/>
+                    <a:pt x="135" y="48"/>
+                  </a:cubicBezTo>
+                  <a:cubicBezTo>
+                    <a:pt x="147" y="36"/>
+                    <a:pt x="147" y="36"/>
+                    <a:pt x="147" y="36"/>
+                  </a:cubicBezTo>
+                  <a:cubicBezTo>
+                    <a:pt x="148" y="35"/>
+                    <a:pt x="149" y="33"/>
+                    <a:pt x="149" y="32"/>
+                  </a:cubicBezTo>
+                  <a:cubicBezTo>
+                    <a:pt x="149" y="30"/>
+                    <a:pt x="148" y="29"/>
+                    <a:pt x="147" y="28"/>
+                  </a:cubicBezTo>
+                  <a:cubicBezTo>
+                    <a:pt x="121" y="2"/>
+                    <a:pt x="121" y="2"/>
+                    <a:pt x="121" y="2"/>
+                  </a:cubicBezTo>
+                  <a:cubicBezTo>
+                    <a:pt x="119" y="0"/>
+                    <a:pt x="115" y="0"/>
+                    <a:pt x="113" y="2"/>
+                  </a:cubicBezTo>
+                  <a:cubicBezTo>
+                    <a:pt x="2" y="113"/>
+                    <a:pt x="2" y="113"/>
+                    <a:pt x="2" y="113"/>
+                  </a:cubicBezTo>
+                  <a:cubicBezTo>
+                    <a:pt x="0" y="115"/>
+                    <a:pt x="0" y="119"/>
+                    <a:pt x="2" y="122"/>
+                  </a:cubicBezTo>
+                  <a:cubicBezTo>
+                    <a:pt x="27" y="147"/>
+                    <a:pt x="27" y="147"/>
+                    <a:pt x="27" y="147"/>
+                  </a:cubicBezTo>
+                  <a:cubicBezTo>
+                    <a:pt x="29" y="148"/>
+                    <a:pt x="30" y="149"/>
+                    <a:pt x="32" y="149"/>
+                  </a:cubicBezTo>
+                  <a:cubicBezTo>
+                    <a:pt x="33" y="149"/>
+                    <a:pt x="35" y="148"/>
+                    <a:pt x="36" y="147"/>
+                  </a:cubicBezTo>
+                  <a:cubicBezTo>
+                    <a:pt x="48" y="135"/>
+                    <a:pt x="48" y="135"/>
+                    <a:pt x="48" y="135"/>
+                  </a:cubicBezTo>
+                  <a:cubicBezTo>
+                    <a:pt x="122" y="209"/>
+                    <a:pt x="122" y="209"/>
+                    <a:pt x="122" y="209"/>
+                  </a:cubicBezTo>
+                  <a:cubicBezTo>
+                    <a:pt x="93" y="238"/>
+                    <a:pt x="93" y="238"/>
+                    <a:pt x="93" y="238"/>
+                  </a:cubicBezTo>
+                  <a:cubicBezTo>
+                    <a:pt x="88" y="243"/>
+                    <a:pt x="85" y="250"/>
+                    <a:pt x="85" y="257"/>
+                  </a:cubicBezTo>
+                  <a:cubicBezTo>
+                    <a:pt x="85" y="264"/>
+                    <a:pt x="88" y="270"/>
+                    <a:pt x="93" y="275"/>
+                  </a:cubicBezTo>
+                  <a:cubicBezTo>
+                    <a:pt x="98" y="281"/>
+                    <a:pt x="105" y="283"/>
+                    <a:pt x="112" y="283"/>
+                  </a:cubicBezTo>
+                  <a:cubicBezTo>
+                    <a:pt x="113" y="283"/>
+                    <a:pt x="114" y="283"/>
+                    <a:pt x="116" y="283"/>
+                  </a:cubicBezTo>
+                  <a:cubicBezTo>
+                    <a:pt x="115" y="284"/>
+                    <a:pt x="115" y="285"/>
+                    <a:pt x="115" y="287"/>
+                  </a:cubicBezTo>
+                  <a:cubicBezTo>
+                    <a:pt x="115" y="294"/>
+                    <a:pt x="118" y="300"/>
+                    <a:pt x="123" y="306"/>
+                  </a:cubicBezTo>
+                  <a:cubicBezTo>
+                    <a:pt x="128" y="311"/>
+                    <a:pt x="135" y="313"/>
+                    <a:pt x="142" y="313"/>
+                  </a:cubicBezTo>
+                  <a:cubicBezTo>
+                    <a:pt x="143" y="313"/>
+                    <a:pt x="145" y="313"/>
+                    <a:pt x="147" y="313"/>
+                  </a:cubicBezTo>
+                  <a:cubicBezTo>
+                    <a:pt x="146" y="314"/>
+                    <a:pt x="146" y="316"/>
+                    <a:pt x="146" y="318"/>
+                  </a:cubicBezTo>
+                  <a:cubicBezTo>
+                    <a:pt x="146" y="325"/>
+                    <a:pt x="149" y="331"/>
+                    <a:pt x="154" y="336"/>
+                  </a:cubicBezTo>
+                  <a:cubicBezTo>
+                    <a:pt x="159" y="341"/>
+                    <a:pt x="166" y="344"/>
+                    <a:pt x="173" y="344"/>
+                  </a:cubicBezTo>
+                  <a:cubicBezTo>
+                    <a:pt x="173" y="344"/>
+                    <a:pt x="174" y="344"/>
+                    <a:pt x="175" y="344"/>
+                  </a:cubicBezTo>
+                  <a:cubicBezTo>
+                    <a:pt x="175" y="345"/>
+                    <a:pt x="175" y="346"/>
+                    <a:pt x="175" y="346"/>
+                  </a:cubicBezTo>
+                  <a:cubicBezTo>
+                    <a:pt x="175" y="353"/>
+                    <a:pt x="178" y="360"/>
+                    <a:pt x="183" y="365"/>
+                  </a:cubicBezTo>
+                  <a:cubicBezTo>
+                    <a:pt x="188" y="370"/>
+                    <a:pt x="194" y="373"/>
+                    <a:pt x="201" y="373"/>
+                  </a:cubicBezTo>
+                  <a:cubicBezTo>
+                    <a:pt x="209" y="373"/>
+                    <a:pt x="215" y="370"/>
+                    <a:pt x="220" y="365"/>
+                  </a:cubicBezTo>
+                  <a:cubicBezTo>
+                    <a:pt x="250" y="336"/>
+                    <a:pt x="250" y="336"/>
+                    <a:pt x="250" y="336"/>
+                  </a:cubicBezTo>
+                  <a:cubicBezTo>
+                    <a:pt x="267" y="353"/>
+                    <a:pt x="267" y="353"/>
+                    <a:pt x="267" y="353"/>
+                  </a:cubicBezTo>
+                  <a:cubicBezTo>
+                    <a:pt x="272" y="358"/>
+                    <a:pt x="279" y="361"/>
+                    <a:pt x="286" y="361"/>
+                  </a:cubicBezTo>
+                  <a:cubicBezTo>
+                    <a:pt x="292" y="361"/>
+                    <a:pt x="299" y="358"/>
+                    <a:pt x="304" y="353"/>
+                  </a:cubicBezTo>
+                  <a:cubicBezTo>
+                    <a:pt x="310" y="347"/>
+                    <a:pt x="313" y="339"/>
+                    <a:pt x="312" y="331"/>
+                  </a:cubicBezTo>
+                  <a:cubicBezTo>
+                    <a:pt x="320" y="332"/>
+                    <a:pt x="328" y="330"/>
+                    <a:pt x="334" y="324"/>
+                  </a:cubicBezTo>
+                  <a:cubicBezTo>
+                    <a:pt x="339" y="319"/>
+                    <a:pt x="341" y="312"/>
+                    <a:pt x="341" y="305"/>
+                  </a:cubicBezTo>
+                  <a:cubicBezTo>
+                    <a:pt x="341" y="304"/>
+                    <a:pt x="341" y="303"/>
+                    <a:pt x="341" y="302"/>
+                  </a:cubicBezTo>
+                  <a:cubicBezTo>
+                    <a:pt x="349" y="303"/>
+                    <a:pt x="357" y="300"/>
+                    <a:pt x="363" y="295"/>
+                  </a:cubicBezTo>
+                  <a:cubicBezTo>
+                    <a:pt x="369" y="289"/>
+                    <a:pt x="371" y="281"/>
+                    <a:pt x="370" y="273"/>
+                  </a:cubicBezTo>
+                  <a:cubicBezTo>
+                    <a:pt x="378" y="274"/>
+                    <a:pt x="386" y="271"/>
+                    <a:pt x="392" y="265"/>
+                  </a:cubicBezTo>
+                  <a:cubicBezTo>
+                    <a:pt x="402" y="255"/>
+                    <a:pt x="402" y="238"/>
+                    <a:pt x="392" y="228"/>
+                  </a:cubicBezTo>
+                  <a:cubicBezTo>
+                    <a:pt x="373" y="209"/>
+                    <a:pt x="373" y="209"/>
+                    <a:pt x="373" y="209"/>
+                  </a:cubicBezTo>
+                  <a:cubicBezTo>
+                    <a:pt x="446" y="136"/>
+                    <a:pt x="446" y="136"/>
+                    <a:pt x="446" y="136"/>
+                  </a:cubicBezTo>
+                  <a:cubicBezTo>
+                    <a:pt x="457" y="147"/>
+                    <a:pt x="457" y="147"/>
+                    <a:pt x="457" y="147"/>
+                  </a:cubicBezTo>
+                  <a:cubicBezTo>
+                    <a:pt x="458" y="148"/>
+                    <a:pt x="460" y="149"/>
+                    <a:pt x="461" y="149"/>
+                  </a:cubicBezTo>
+                  <a:cubicBezTo>
+                    <a:pt x="463" y="149"/>
+                    <a:pt x="464" y="148"/>
+                    <a:pt x="466" y="147"/>
+                  </a:cubicBezTo>
+                  <a:cubicBezTo>
+                    <a:pt x="491" y="122"/>
+                    <a:pt x="491" y="122"/>
+                    <a:pt x="491" y="122"/>
+                  </a:cubicBezTo>
+                  <a:cubicBezTo>
+                    <a:pt x="493" y="119"/>
+                    <a:pt x="493" y="115"/>
+                    <a:pt x="491" y="113"/>
+                  </a:cubicBezTo>
+                  <a:close/>
+                  <a:moveTo>
+                    <a:pt x="32" y="134"/>
+                  </a:moveTo>
+                  <a:cubicBezTo>
+                    <a:pt x="15" y="117"/>
+                    <a:pt x="15" y="117"/>
+                    <a:pt x="15" y="117"/>
+                  </a:cubicBezTo>
+                  <a:cubicBezTo>
+                    <a:pt x="100" y="32"/>
+                    <a:pt x="100" y="32"/>
+                    <a:pt x="100" y="32"/>
+                  </a:cubicBezTo>
+                  <a:cubicBezTo>
+                    <a:pt x="108" y="41"/>
+                    <a:pt x="108" y="41"/>
+                    <a:pt x="108" y="41"/>
+                  </a:cubicBezTo>
+                  <a:cubicBezTo>
+                    <a:pt x="109" y="42"/>
+                    <a:pt x="111" y="42"/>
+                    <a:pt x="112" y="42"/>
+                  </a:cubicBezTo>
+                  <a:cubicBezTo>
+                    <a:pt x="114" y="42"/>
+                    <a:pt x="115" y="42"/>
+                    <a:pt x="116" y="41"/>
+                  </a:cubicBezTo>
+                  <a:cubicBezTo>
+                    <a:pt x="119" y="38"/>
+                    <a:pt x="119" y="35"/>
+                    <a:pt x="116" y="32"/>
+                  </a:cubicBezTo>
+                  <a:cubicBezTo>
+                    <a:pt x="108" y="24"/>
+                    <a:pt x="108" y="24"/>
+                    <a:pt x="108" y="24"/>
+                  </a:cubicBezTo>
+                  <a:cubicBezTo>
+                    <a:pt x="117" y="15"/>
+                    <a:pt x="117" y="15"/>
+                    <a:pt x="117" y="15"/>
+                  </a:cubicBezTo>
+                  <a:cubicBezTo>
+                    <a:pt x="134" y="32"/>
+                    <a:pt x="134" y="32"/>
+                    <a:pt x="134" y="32"/>
+                  </a:cubicBezTo>
+                  <a:cubicBezTo>
+                    <a:pt x="123" y="43"/>
+                    <a:pt x="123" y="43"/>
+                    <a:pt x="123" y="43"/>
+                  </a:cubicBezTo>
+                  <a:cubicBezTo>
+                    <a:pt x="123" y="43"/>
+                    <a:pt x="122" y="43"/>
+                    <a:pt x="122" y="44"/>
+                  </a:cubicBezTo>
+                  <a:cubicBezTo>
+                    <a:pt x="44" y="122"/>
+                    <a:pt x="44" y="122"/>
+                    <a:pt x="44" y="122"/>
+                  </a:cubicBezTo>
+                  <a:cubicBezTo>
+                    <a:pt x="43" y="122"/>
+                    <a:pt x="43" y="123"/>
+                    <a:pt x="43" y="123"/>
+                  </a:cubicBezTo>
+                  <a:lnTo>
+                    <a:pt x="32" y="134"/>
+                  </a:lnTo>
+                  <a:close/>
+                  <a:moveTo>
+                    <a:pt x="101" y="267"/>
+                  </a:moveTo>
+                  <a:cubicBezTo>
+                    <a:pt x="99" y="264"/>
+                    <a:pt x="97" y="261"/>
+                    <a:pt x="97" y="257"/>
+                  </a:cubicBezTo>
+                  <a:cubicBezTo>
+                    <a:pt x="97" y="253"/>
+                    <a:pt x="99" y="249"/>
+                    <a:pt x="101" y="246"/>
+                  </a:cubicBezTo>
+                  <a:cubicBezTo>
+                    <a:pt x="153" y="195"/>
+                    <a:pt x="153" y="195"/>
+                    <a:pt x="153" y="195"/>
+                  </a:cubicBezTo>
+                  <a:cubicBezTo>
+                    <a:pt x="156" y="192"/>
+                    <a:pt x="160" y="190"/>
+                    <a:pt x="163" y="190"/>
+                  </a:cubicBezTo>
+                  <a:cubicBezTo>
+                    <a:pt x="167" y="190"/>
+                    <a:pt x="171" y="192"/>
+                    <a:pt x="174" y="195"/>
+                  </a:cubicBezTo>
+                  <a:cubicBezTo>
+                    <a:pt x="179" y="200"/>
+                    <a:pt x="179" y="210"/>
+                    <a:pt x="174" y="215"/>
+                  </a:cubicBezTo>
+                  <a:cubicBezTo>
+                    <a:pt x="122" y="267"/>
+                    <a:pt x="122" y="267"/>
+                    <a:pt x="122" y="267"/>
+                  </a:cubicBezTo>
+                  <a:cubicBezTo>
+                    <a:pt x="116" y="273"/>
+                    <a:pt x="107" y="273"/>
+                    <a:pt x="101" y="267"/>
+                  </a:cubicBezTo>
+                  <a:close/>
+                  <a:moveTo>
+                    <a:pt x="132" y="297"/>
+                  </a:moveTo>
+                  <a:cubicBezTo>
+                    <a:pt x="129" y="294"/>
+                    <a:pt x="127" y="291"/>
+                    <a:pt x="127" y="287"/>
+                  </a:cubicBezTo>
+                  <a:cubicBezTo>
+                    <a:pt x="127" y="283"/>
+                    <a:pt x="129" y="279"/>
+                    <a:pt x="132" y="276"/>
+                  </a:cubicBezTo>
+                  <a:cubicBezTo>
+                    <a:pt x="183" y="225"/>
+                    <a:pt x="183" y="225"/>
+                    <a:pt x="183" y="225"/>
+                  </a:cubicBezTo>
+                  <a:cubicBezTo>
+                    <a:pt x="186" y="222"/>
+                    <a:pt x="190" y="221"/>
+                    <a:pt x="194" y="221"/>
+                  </a:cubicBezTo>
+                  <a:cubicBezTo>
+                    <a:pt x="197" y="221"/>
+                    <a:pt x="201" y="222"/>
+                    <a:pt x="204" y="225"/>
+                  </a:cubicBezTo>
+                  <a:cubicBezTo>
+                    <a:pt x="207" y="228"/>
+                    <a:pt x="208" y="231"/>
+                    <a:pt x="208" y="235"/>
+                  </a:cubicBezTo>
+                  <a:cubicBezTo>
+                    <a:pt x="208" y="239"/>
+                    <a:pt x="207" y="243"/>
+                    <a:pt x="204" y="245"/>
+                  </a:cubicBezTo>
+                  <a:cubicBezTo>
+                    <a:pt x="152" y="297"/>
+                    <a:pt x="152" y="297"/>
+                    <a:pt x="152" y="297"/>
+                  </a:cubicBezTo>
+                  <a:cubicBezTo>
+                    <a:pt x="147" y="303"/>
+                    <a:pt x="137" y="303"/>
+                    <a:pt x="132" y="297"/>
+                  </a:cubicBezTo>
+                  <a:close/>
+                  <a:moveTo>
+                    <a:pt x="162" y="328"/>
+                  </a:moveTo>
+                  <a:cubicBezTo>
+                    <a:pt x="160" y="325"/>
+                    <a:pt x="158" y="321"/>
+                    <a:pt x="158" y="318"/>
+                  </a:cubicBezTo>
+                  <a:cubicBezTo>
+                    <a:pt x="158" y="314"/>
+                    <a:pt x="160" y="310"/>
+                    <a:pt x="162" y="307"/>
+                  </a:cubicBezTo>
+                  <a:cubicBezTo>
+                    <a:pt x="214" y="256"/>
+                    <a:pt x="214" y="256"/>
+                    <a:pt x="214" y="256"/>
+                  </a:cubicBezTo>
+                  <a:cubicBezTo>
+                    <a:pt x="217" y="253"/>
+                    <a:pt x="221" y="251"/>
+                    <a:pt x="224" y="251"/>
+                  </a:cubicBezTo>
+                  <a:cubicBezTo>
+                    <a:pt x="228" y="251"/>
+                    <a:pt x="232" y="253"/>
+                    <a:pt x="235" y="256"/>
+                  </a:cubicBezTo>
+                  <a:cubicBezTo>
+                    <a:pt x="237" y="258"/>
+                    <a:pt x="239" y="262"/>
+                    <a:pt x="239" y="266"/>
+                  </a:cubicBezTo>
+                  <a:cubicBezTo>
+                    <a:pt x="239" y="269"/>
+                    <a:pt x="238" y="272"/>
+                    <a:pt x="237" y="274"/>
+                  </a:cubicBezTo>
+                  <a:cubicBezTo>
+                    <a:pt x="236" y="275"/>
+                    <a:pt x="235" y="275"/>
+                    <a:pt x="234" y="276"/>
+                  </a:cubicBezTo>
+                  <a:cubicBezTo>
+                    <a:pt x="183" y="328"/>
+                    <a:pt x="183" y="328"/>
+                    <a:pt x="183" y="328"/>
+                  </a:cubicBezTo>
+                  <a:cubicBezTo>
+                    <a:pt x="182" y="328"/>
+                    <a:pt x="181" y="329"/>
+                    <a:pt x="181" y="330"/>
+                  </a:cubicBezTo>
+                  <a:cubicBezTo>
+                    <a:pt x="175" y="333"/>
+                    <a:pt x="167" y="333"/>
+                    <a:pt x="162" y="328"/>
+                  </a:cubicBezTo>
+                  <a:close/>
+                  <a:moveTo>
+                    <a:pt x="212" y="357"/>
+                  </a:moveTo>
+                  <a:cubicBezTo>
+                    <a:pt x="206" y="362"/>
+                    <a:pt x="197" y="362"/>
+                    <a:pt x="191" y="357"/>
+                  </a:cubicBezTo>
+                  <a:cubicBezTo>
+                    <a:pt x="188" y="354"/>
+                    <a:pt x="187" y="350"/>
+                    <a:pt x="187" y="346"/>
+                  </a:cubicBezTo>
+                  <a:cubicBezTo>
+                    <a:pt x="187" y="343"/>
+                    <a:pt x="188" y="341"/>
+                    <a:pt x="189" y="338"/>
+                  </a:cubicBezTo>
+                  <a:cubicBezTo>
+                    <a:pt x="190" y="338"/>
+                    <a:pt x="191" y="337"/>
+                    <a:pt x="192" y="336"/>
+                  </a:cubicBezTo>
+                  <a:cubicBezTo>
+                    <a:pt x="243" y="285"/>
+                    <a:pt x="243" y="285"/>
+                    <a:pt x="243" y="285"/>
+                  </a:cubicBezTo>
+                  <a:cubicBezTo>
+                    <a:pt x="244" y="284"/>
+                    <a:pt x="245" y="283"/>
+                    <a:pt x="245" y="282"/>
+                  </a:cubicBezTo>
+                  <a:cubicBezTo>
+                    <a:pt x="248" y="281"/>
+                    <a:pt x="250" y="280"/>
+                    <a:pt x="253" y="280"/>
+                  </a:cubicBezTo>
+                  <a:cubicBezTo>
+                    <a:pt x="257" y="280"/>
+                    <a:pt x="261" y="282"/>
+                    <a:pt x="263" y="284"/>
+                  </a:cubicBezTo>
+                  <a:cubicBezTo>
+                    <a:pt x="269" y="290"/>
+                    <a:pt x="269" y="299"/>
+                    <a:pt x="263" y="305"/>
+                  </a:cubicBezTo>
+                  <a:lnTo>
+                    <a:pt x="212" y="357"/>
+                  </a:lnTo>
+                  <a:close/>
+                  <a:moveTo>
+                    <a:pt x="383" y="257"/>
+                  </a:moveTo>
+                  <a:cubicBezTo>
+                    <a:pt x="378" y="262"/>
+                    <a:pt x="368" y="262"/>
+                    <a:pt x="363" y="257"/>
+                  </a:cubicBezTo>
+                  <a:cubicBezTo>
+                    <a:pt x="352" y="246"/>
+                    <a:pt x="352" y="246"/>
+                    <a:pt x="352" y="246"/>
+                  </a:cubicBezTo>
+                  <a:cubicBezTo>
+                    <a:pt x="350" y="244"/>
+                    <a:pt x="346" y="244"/>
+                    <a:pt x="344" y="247"/>
+                  </a:cubicBezTo>
+                  <a:cubicBezTo>
+                    <a:pt x="343" y="248"/>
+                    <a:pt x="342" y="249"/>
+                    <a:pt x="342" y="251"/>
+                  </a:cubicBezTo>
+                  <a:cubicBezTo>
+                    <a:pt x="342" y="252"/>
+                    <a:pt x="343" y="254"/>
+                    <a:pt x="344" y="255"/>
+                  </a:cubicBezTo>
+                  <a:cubicBezTo>
+                    <a:pt x="354" y="265"/>
+                    <a:pt x="354" y="265"/>
+                    <a:pt x="354" y="265"/>
+                  </a:cubicBezTo>
+                  <a:cubicBezTo>
+                    <a:pt x="360" y="271"/>
+                    <a:pt x="360" y="280"/>
+                    <a:pt x="354" y="286"/>
+                  </a:cubicBezTo>
+                  <a:cubicBezTo>
+                    <a:pt x="349" y="292"/>
+                    <a:pt x="339" y="292"/>
+                    <a:pt x="334" y="286"/>
+                  </a:cubicBezTo>
+                  <a:cubicBezTo>
+                    <a:pt x="323" y="276"/>
+                    <a:pt x="323" y="276"/>
+                    <a:pt x="323" y="276"/>
+                  </a:cubicBezTo>
+                  <a:cubicBezTo>
+                    <a:pt x="321" y="273"/>
+                    <a:pt x="317" y="273"/>
+                    <a:pt x="315" y="276"/>
+                  </a:cubicBezTo>
+                  <a:cubicBezTo>
+                    <a:pt x="312" y="278"/>
+                    <a:pt x="312" y="282"/>
+                    <a:pt x="315" y="284"/>
+                  </a:cubicBezTo>
+                  <a:cubicBezTo>
+                    <a:pt x="325" y="295"/>
+                    <a:pt x="325" y="295"/>
+                    <a:pt x="325" y="295"/>
+                  </a:cubicBezTo>
+                  <a:cubicBezTo>
+                    <a:pt x="328" y="297"/>
+                    <a:pt x="329" y="301"/>
+                    <a:pt x="329" y="305"/>
+                  </a:cubicBezTo>
+                  <a:cubicBezTo>
+                    <a:pt x="329" y="309"/>
+                    <a:pt x="328" y="312"/>
+                    <a:pt x="325" y="315"/>
+                  </a:cubicBezTo>
+                  <a:cubicBezTo>
+                    <a:pt x="320" y="321"/>
+                    <a:pt x="311" y="321"/>
+                    <a:pt x="305" y="316"/>
+                  </a:cubicBezTo>
+                  <a:cubicBezTo>
+                    <a:pt x="305" y="315"/>
+                    <a:pt x="305" y="315"/>
+                    <a:pt x="305" y="315"/>
+                  </a:cubicBezTo>
+                  <a:cubicBezTo>
+                    <a:pt x="294" y="304"/>
+                    <a:pt x="294" y="304"/>
+                    <a:pt x="294" y="304"/>
+                  </a:cubicBezTo>
+                  <a:cubicBezTo>
+                    <a:pt x="291" y="302"/>
+                    <a:pt x="288" y="302"/>
+                    <a:pt x="285" y="304"/>
+                  </a:cubicBezTo>
+                  <a:cubicBezTo>
+                    <a:pt x="283" y="307"/>
+                    <a:pt x="283" y="310"/>
+                    <a:pt x="285" y="313"/>
+                  </a:cubicBezTo>
+                  <a:cubicBezTo>
+                    <a:pt x="296" y="323"/>
+                    <a:pt x="296" y="323"/>
+                    <a:pt x="296" y="323"/>
+                  </a:cubicBezTo>
+                  <a:cubicBezTo>
+                    <a:pt x="296" y="323"/>
+                    <a:pt x="296" y="324"/>
+                    <a:pt x="296" y="324"/>
+                  </a:cubicBezTo>
+                  <a:cubicBezTo>
+                    <a:pt x="302" y="329"/>
+                    <a:pt x="302" y="339"/>
+                    <a:pt x="296" y="344"/>
+                  </a:cubicBezTo>
+                  <a:cubicBezTo>
+                    <a:pt x="290" y="350"/>
+                    <a:pt x="281" y="350"/>
+                    <a:pt x="275" y="344"/>
+                  </a:cubicBezTo>
+                  <a:cubicBezTo>
+                    <a:pt x="258" y="327"/>
+                    <a:pt x="258" y="327"/>
+                    <a:pt x="258" y="327"/>
+                  </a:cubicBezTo>
+                  <a:cubicBezTo>
+                    <a:pt x="272" y="313"/>
+                    <a:pt x="272" y="313"/>
+                    <a:pt x="272" y="313"/>
+                  </a:cubicBezTo>
+                  <a:cubicBezTo>
+                    <a:pt x="282" y="303"/>
+                    <a:pt x="282" y="286"/>
+                    <a:pt x="272" y="276"/>
+                  </a:cubicBezTo>
+                  <a:cubicBezTo>
+                    <a:pt x="267" y="271"/>
+                    <a:pt x="260" y="268"/>
+                    <a:pt x="253" y="268"/>
+                  </a:cubicBezTo>
+                  <a:cubicBezTo>
+                    <a:pt x="252" y="268"/>
+                    <a:pt x="252" y="268"/>
+                    <a:pt x="251" y="268"/>
+                  </a:cubicBezTo>
+                  <a:cubicBezTo>
+                    <a:pt x="251" y="267"/>
+                    <a:pt x="251" y="267"/>
+                    <a:pt x="251" y="266"/>
+                  </a:cubicBezTo>
+                  <a:cubicBezTo>
+                    <a:pt x="251" y="259"/>
+                    <a:pt x="248" y="252"/>
+                    <a:pt x="243" y="247"/>
+                  </a:cubicBezTo>
+                  <a:cubicBezTo>
+                    <a:pt x="237" y="241"/>
+                    <a:pt x="228" y="238"/>
+                    <a:pt x="220" y="240"/>
+                  </a:cubicBezTo>
+                  <a:cubicBezTo>
+                    <a:pt x="220" y="238"/>
+                    <a:pt x="220" y="237"/>
+                    <a:pt x="220" y="235"/>
+                  </a:cubicBezTo>
+                  <a:cubicBezTo>
+                    <a:pt x="220" y="228"/>
+                    <a:pt x="217" y="221"/>
+                    <a:pt x="212" y="216"/>
+                  </a:cubicBezTo>
+                  <a:cubicBezTo>
+                    <a:pt x="206" y="210"/>
+                    <a:pt x="198" y="208"/>
+                    <a:pt x="190" y="209"/>
+                  </a:cubicBezTo>
+                  <a:cubicBezTo>
+                    <a:pt x="191" y="201"/>
+                    <a:pt x="188" y="192"/>
+                    <a:pt x="182" y="186"/>
+                  </a:cubicBezTo>
+                  <a:cubicBezTo>
+                    <a:pt x="172" y="176"/>
+                    <a:pt x="155" y="176"/>
+                    <a:pt x="145" y="186"/>
+                  </a:cubicBezTo>
+                  <a:cubicBezTo>
+                    <a:pt x="130" y="200"/>
+                    <a:pt x="130" y="200"/>
+                    <a:pt x="130" y="200"/>
+                  </a:cubicBezTo>
+                  <a:cubicBezTo>
+                    <a:pt x="56" y="127"/>
+                    <a:pt x="56" y="127"/>
+                    <a:pt x="56" y="127"/>
+                  </a:cubicBezTo>
+                  <a:cubicBezTo>
+                    <a:pt x="126" y="57"/>
+                    <a:pt x="126" y="57"/>
+                    <a:pt x="126" y="57"/>
+                  </a:cubicBezTo>
+                  <a:cubicBezTo>
+                    <a:pt x="156" y="86"/>
+                    <a:pt x="156" y="86"/>
+                    <a:pt x="156" y="86"/>
+                  </a:cubicBezTo>
+                  <a:cubicBezTo>
+                    <a:pt x="168" y="99"/>
+                    <a:pt x="185" y="106"/>
+                    <a:pt x="203" y="106"/>
+                  </a:cubicBezTo>
+                  <a:cubicBezTo>
+                    <a:pt x="217" y="106"/>
+                    <a:pt x="217" y="106"/>
+                    <a:pt x="217" y="106"/>
+                  </a:cubicBezTo>
+                  <a:cubicBezTo>
+                    <a:pt x="176" y="147"/>
+                    <a:pt x="176" y="147"/>
+                    <a:pt x="176" y="147"/>
+                  </a:cubicBezTo>
+                  <a:cubicBezTo>
+                    <a:pt x="174" y="150"/>
+                    <a:pt x="174" y="153"/>
+                    <a:pt x="176" y="156"/>
+                  </a:cubicBezTo>
+                  <a:cubicBezTo>
+                    <a:pt x="195" y="175"/>
+                    <a:pt x="225" y="175"/>
+                    <a:pt x="244" y="156"/>
+                  </a:cubicBezTo>
+                  <a:cubicBezTo>
+                    <a:pt x="274" y="126"/>
+                    <a:pt x="274" y="126"/>
+                    <a:pt x="274" y="126"/>
+                  </a:cubicBezTo>
+                  <a:cubicBezTo>
+                    <a:pt x="360" y="213"/>
+                    <a:pt x="360" y="213"/>
+                    <a:pt x="360" y="213"/>
+                  </a:cubicBezTo>
+                  <a:cubicBezTo>
+                    <a:pt x="360" y="213"/>
+                    <a:pt x="360" y="213"/>
+                    <a:pt x="360" y="213"/>
+                  </a:cubicBezTo>
+                  <a:cubicBezTo>
+                    <a:pt x="383" y="236"/>
+                    <a:pt x="383" y="236"/>
+                    <a:pt x="383" y="236"/>
+                  </a:cubicBezTo>
+                  <a:cubicBezTo>
+                    <a:pt x="389" y="242"/>
+                    <a:pt x="389" y="251"/>
+                    <a:pt x="383" y="257"/>
+                  </a:cubicBezTo>
+                  <a:close/>
+                  <a:moveTo>
+                    <a:pt x="365" y="200"/>
+                  </a:moveTo>
+                  <a:cubicBezTo>
+                    <a:pt x="278" y="114"/>
+                    <a:pt x="278" y="114"/>
+                    <a:pt x="278" y="114"/>
+                  </a:cubicBezTo>
+                  <a:cubicBezTo>
+                    <a:pt x="277" y="112"/>
+                    <a:pt x="275" y="112"/>
+                    <a:pt x="274" y="112"/>
+                  </a:cubicBezTo>
+                  <a:cubicBezTo>
+                    <a:pt x="272" y="112"/>
+                    <a:pt x="271" y="112"/>
+                    <a:pt x="269" y="114"/>
+                  </a:cubicBezTo>
+                  <a:cubicBezTo>
+                    <a:pt x="236" y="147"/>
+                    <a:pt x="236" y="147"/>
+                    <a:pt x="236" y="147"/>
+                  </a:cubicBezTo>
+                  <a:cubicBezTo>
+                    <a:pt x="223" y="160"/>
+                    <a:pt x="203" y="161"/>
+                    <a:pt x="189" y="151"/>
+                  </a:cubicBezTo>
+                  <a:cubicBezTo>
+                    <a:pt x="257" y="83"/>
+                    <a:pt x="257" y="83"/>
+                    <a:pt x="257" y="83"/>
+                  </a:cubicBezTo>
+                  <a:cubicBezTo>
+                    <a:pt x="262" y="79"/>
+                    <a:pt x="267" y="76"/>
+                    <a:pt x="274" y="76"/>
+                  </a:cubicBezTo>
+                  <a:cubicBezTo>
+                    <a:pt x="280" y="76"/>
+                    <a:pt x="286" y="79"/>
+                    <a:pt x="290" y="83"/>
+                  </a:cubicBezTo>
+                  <a:cubicBezTo>
+                    <a:pt x="303" y="96"/>
+                    <a:pt x="326" y="97"/>
+                    <a:pt x="339" y="83"/>
+                  </a:cubicBezTo>
+                  <a:cubicBezTo>
+                    <a:pt x="366" y="57"/>
+                    <a:pt x="366" y="57"/>
+                    <a:pt x="366" y="57"/>
+                  </a:cubicBezTo>
+                  <a:cubicBezTo>
+                    <a:pt x="437" y="128"/>
+                    <a:pt x="437" y="128"/>
+                    <a:pt x="437" y="128"/>
+                  </a:cubicBezTo>
+                  <a:lnTo>
+                    <a:pt x="365" y="200"/>
+                  </a:lnTo>
+                  <a:close/>
+                  <a:moveTo>
+                    <a:pt x="461" y="134"/>
+                  </a:moveTo>
+                  <a:cubicBezTo>
+                    <a:pt x="359" y="32"/>
+                    <a:pt x="359" y="32"/>
+                    <a:pt x="359" y="32"/>
+                  </a:cubicBezTo>
+                  <a:cubicBezTo>
+                    <a:pt x="376" y="15"/>
+                    <a:pt x="376" y="15"/>
+                    <a:pt x="376" y="15"/>
+                  </a:cubicBezTo>
+                  <a:cubicBezTo>
+                    <a:pt x="385" y="24"/>
+                    <a:pt x="385" y="24"/>
+                    <a:pt x="385" y="24"/>
+                  </a:cubicBezTo>
+                  <a:cubicBezTo>
+                    <a:pt x="377" y="32"/>
+                    <a:pt x="377" y="32"/>
+                    <a:pt x="377" y="32"/>
+                  </a:cubicBezTo>
+                  <a:cubicBezTo>
+                    <a:pt x="375" y="35"/>
+                    <a:pt x="375" y="38"/>
+                    <a:pt x="377" y="41"/>
+                  </a:cubicBezTo>
+                  <a:cubicBezTo>
+                    <a:pt x="378" y="42"/>
+                    <a:pt x="380" y="42"/>
+                    <a:pt x="381" y="42"/>
+                  </a:cubicBezTo>
+                  <a:cubicBezTo>
+                    <a:pt x="383" y="42"/>
+                    <a:pt x="384" y="42"/>
+                    <a:pt x="385" y="41"/>
+                  </a:cubicBezTo>
+                  <a:cubicBezTo>
+                    <a:pt x="394" y="33"/>
+                    <a:pt x="394" y="33"/>
+                    <a:pt x="394" y="33"/>
+                  </a:cubicBezTo>
+                  <a:cubicBezTo>
+                    <a:pt x="478" y="117"/>
+                    <a:pt x="478" y="117"/>
+                    <a:pt x="478" y="117"/>
+                  </a:cubicBezTo>
+                  <a:lnTo>
+                    <a:pt x="461" y="134"/>
+                  </a:lnTo>
+                  <a:close/>
+                </a:path>
+              </a:pathLst>
+            </a:custGeom>
+            <a:solidFill>
+              <a:srgbClr val="FFFFFF"/>
+            </a:solidFill>
+            <a:ln>
+              <a:noFill/>
+            </a:ln>
+            <a:extLst>
+              <a:ext uri="{91240B29-F687-4F45-9708-019B960494DF}">
+                <a14:hiddenLine xmlns:a14="http://schemas.microsoft.com/office/drawing/2010/main" w="9525">
+                  <a:solidFill>
+                    <a:srgbClr val="000000"/>
+                  </a:solidFill>
+                  <a:round/>
+                  <a:headEnd/>
+                  <a:tailEnd/>
+                </a14:hiddenLine>
+              </a:ext>
+            </a:extLst>
+          </p:spPr>
+          <p:txBody>
+            <a:bodyPr vert="horz" wrap="square" lIns="91440" tIns="45720" rIns="91440" bIns="45720" numCol="1" anchor="t" anchorCtr="0" compatLnSpc="1">
+              <a:prstTxWarp prst="textNoShape">
+                <a:avLst/>
+              </a:prstTxWarp>
+            </a:bodyPr>
+            <a:lstStyle/>
+            <a:p>
+              <a:endParaRPr lang="en-US"/>
+            </a:p>
+          </p:txBody>
+        </p:sp>
+      </p:grpSp>
     </p:spTree>
     <p:extLst>
       <p:ext uri="{BB962C8B-B14F-4D97-AF65-F5344CB8AC3E}">
@@ -2672,93 +4770,6 @@
           </a:p>
         </p:txBody>
       </p:sp>
-      <p:grpSp>
-        <p:nvGrpSpPr>
-          <p:cNvPr id="3" name="object 3"/>
-          <p:cNvGrpSpPr/>
-          <p:nvPr/>
-        </p:nvGrpSpPr>
-        <p:grpSpPr>
-          <a:xfrm>
-            <a:off x="762001" y="1725548"/>
-            <a:ext cx="10587736" cy="4404995"/>
-            <a:chOff x="1539621" y="1725548"/>
-            <a:chExt cx="8829675" cy="4404995"/>
-          </a:xfrm>
-        </p:grpSpPr>
-        <p:sp>
-          <p:nvSpPr>
-            <p:cNvPr id="4" name="object 4"/>
-            <p:cNvSpPr/>
-            <p:nvPr/>
-          </p:nvSpPr>
-          <p:spPr>
-            <a:xfrm>
-              <a:off x="1549146" y="1735073"/>
-              <a:ext cx="8810625" cy="2139950"/>
-            </a:xfrm>
-            <a:custGeom>
-              <a:avLst/>
-              <a:gdLst/>
-              <a:ahLst/>
-              <a:cxnLst/>
-              <a:rect l="l" t="t" r="r" b="b"/>
-              <a:pathLst>
-                <a:path w="8810625" h="2139950">
-                  <a:moveTo>
-                    <a:pt x="0" y="0"/>
-                  </a:moveTo>
-                  <a:lnTo>
-                    <a:pt x="8810244" y="0"/>
-                  </a:lnTo>
-                  <a:lnTo>
-                    <a:pt x="8810244" y="2139696"/>
-                  </a:lnTo>
-                  <a:lnTo>
-                    <a:pt x="0" y="2139696"/>
-                  </a:lnTo>
-                  <a:lnTo>
-                    <a:pt x="0" y="0"/>
-                  </a:lnTo>
-                  <a:close/>
-                </a:path>
-              </a:pathLst>
-            </a:custGeom>
-            <a:ln w="19050">
-              <a:noFill/>
-            </a:ln>
-          </p:spPr>
-          <p:txBody>
-            <a:bodyPr wrap="square" lIns="0" tIns="0" rIns="0" bIns="0" rtlCol="0"/>
-            <a:lstStyle/>
-            <a:p>
-              <a:endParaRPr/>
-            </a:p>
-          </p:txBody>
-        </p:sp>
-        <p:pic>
-          <p:nvPicPr>
-            <p:cNvPr id="5" name="object 5" descr="Graphical representation of the City of Toronto skyline with a cyclist and a TTC street car visible in the foreground."/>
-            <p:cNvPicPr/>
-            <p:nvPr/>
-          </p:nvPicPr>
-          <p:blipFill>
-            <a:blip r:embed="rId2" cstate="print"/>
-            <a:stretch>
-              <a:fillRect/>
-            </a:stretch>
-          </p:blipFill>
-          <p:spPr>
-            <a:xfrm>
-              <a:off x="1677924" y="3549395"/>
-              <a:ext cx="8675605" cy="2580894"/>
-            </a:xfrm>
-            <a:prstGeom prst="rect">
-              <a:avLst/>
-            </a:prstGeom>
-          </p:spPr>
-        </p:pic>
-      </p:grpSp>
       <p:sp>
         <p:nvSpPr>
           <p:cNvPr id="6" name="object 6"/>
@@ -2768,7 +4779,7 @@
         <p:spPr>
           <a:xfrm>
             <a:off x="983053" y="1471690"/>
-            <a:ext cx="5406073" cy="2403222"/>
+            <a:ext cx="3284147" cy="3788217"/>
           </a:xfrm>
           <a:prstGeom prst="rect">
             <a:avLst/>
@@ -2901,8 +4912,8 @@
         </p:nvSpPr>
         <p:spPr>
           <a:xfrm>
-            <a:off x="6444338" y="1483349"/>
-            <a:ext cx="5519062" cy="2082621"/>
+            <a:off x="4648200" y="1492952"/>
+            <a:ext cx="3276602" cy="3467616"/>
           </a:xfrm>
           <a:prstGeom prst="rect">
             <a:avLst/>
@@ -2983,7 +4994,7 @@
                 </a:solidFill>
                 <a:effectLst/>
                 <a:latin typeface="Helvetica" pitchFamily="2" charset="0"/>
-                <a:hlinkClick r:id="rId3"/>
+                <a:hlinkClick r:id="rId2"/>
               </a:rPr>
               <a:t>2017 to 2020 parking data </a:t>
             </a:r>
@@ -3019,6 +5030,182 @@
               </a:rPr>
               <a:t>Provide fact-based recommendations to improve enforcement, compliance or increase revenue</a:t>
             </a:r>
+          </a:p>
+        </p:txBody>
+      </p:sp>
+      <p:sp>
+        <p:nvSpPr>
+          <p:cNvPr id="7" name="object 6">
+            <a:extLst>
+              <a:ext uri="{FF2B5EF4-FFF2-40B4-BE49-F238E27FC236}">
+                <a16:creationId xmlns:a16="http://schemas.microsoft.com/office/drawing/2014/main" id="{9DFAD002-E54F-9902-0E89-80586C506985}"/>
+              </a:ext>
+            </a:extLst>
+          </p:cNvPr>
+          <p:cNvSpPr txBox="1"/>
+          <p:nvPr/>
+        </p:nvSpPr>
+        <p:spPr>
+          <a:xfrm>
+            <a:off x="8339622" y="1498690"/>
+            <a:ext cx="3547577" cy="4614084"/>
+          </a:xfrm>
+          <a:prstGeom prst="rect">
+            <a:avLst/>
+          </a:prstGeom>
+          <a:ln>
+            <a:noFill/>
+          </a:ln>
+        </p:spPr>
+        <p:txBody>
+          <a:bodyPr vert="horz" wrap="square" lIns="0" tIns="12700" rIns="0" bIns="0" rtlCol="0">
+            <a:spAutoFit/>
+          </a:bodyPr>
+          <a:lstStyle/>
+          <a:p>
+            <a:pPr marL="12700" marR="5080" algn="ctr">
+              <a:lnSpc>
+                <a:spcPct val="100000"/>
+              </a:lnSpc>
+              <a:spcBef>
+                <a:spcPts val="100"/>
+              </a:spcBef>
+            </a:pPr>
+            <a:r>
+              <a:rPr lang="en-CA" sz="2400" b="1" i="0" u="none" strike="noStrike" dirty="0">
+                <a:solidFill>
+                  <a:schemeClr val="tx2"/>
+                </a:solidFill>
+                <a:effectLst/>
+                <a:latin typeface="Helvetica" pitchFamily="2" charset="0"/>
+              </a:rPr>
+              <a:t>Key Findings</a:t>
+            </a:r>
+          </a:p>
+          <a:p>
+            <a:pPr marL="355600" marR="5080" indent="-342900">
+              <a:lnSpc>
+                <a:spcPct val="100000"/>
+              </a:lnSpc>
+              <a:spcBef>
+                <a:spcPts val="100"/>
+              </a:spcBef>
+              <a:buFont typeface="Arial" panose="020B0604020202020204" pitchFamily="34" charset="0"/>
+              <a:buChar char="•"/>
+            </a:pPr>
+            <a:endParaRPr lang="en-CA" b="0" i="0" u="none" strike="noStrike" dirty="0">
+              <a:solidFill>
+                <a:srgbClr val="212529"/>
+              </a:solidFill>
+              <a:effectLst/>
+              <a:latin typeface="Helvetica" pitchFamily="2" charset="0"/>
+            </a:endParaRPr>
+          </a:p>
+          <a:p>
+            <a:pPr marL="355600" marR="5080" indent="-342900">
+              <a:lnSpc>
+                <a:spcPct val="100000"/>
+              </a:lnSpc>
+              <a:spcBef>
+                <a:spcPts val="100"/>
+              </a:spcBef>
+              <a:buFont typeface="Arial" panose="020B0604020202020204" pitchFamily="34" charset="0"/>
+              <a:buChar char="•"/>
+            </a:pPr>
+            <a:r>
+              <a:rPr lang="en-CA" b="0" i="0" u="none" strike="noStrike" dirty="0">
+                <a:solidFill>
+                  <a:srgbClr val="212529"/>
+                </a:solidFill>
+                <a:effectLst/>
+                <a:latin typeface="Helvetica" pitchFamily="2" charset="0"/>
+              </a:rPr>
+              <a:t>Parking tickets and amount were consistent prior to the COVID-19 pandemic</a:t>
+            </a:r>
+          </a:p>
+          <a:p>
+            <a:pPr marL="355600" marR="5080" indent="-342900">
+              <a:lnSpc>
+                <a:spcPct val="100000"/>
+              </a:lnSpc>
+              <a:spcBef>
+                <a:spcPts val="100"/>
+              </a:spcBef>
+              <a:buFont typeface="Arial" panose="020B0604020202020204" pitchFamily="34" charset="0"/>
+              <a:buChar char="•"/>
+            </a:pPr>
+            <a:r>
+              <a:rPr lang="en-CA" b="0" i="0" u="none" strike="noStrike" dirty="0">
+                <a:solidFill>
+                  <a:srgbClr val="212529"/>
+                </a:solidFill>
+                <a:effectLst/>
+                <a:latin typeface="Helvetica" pitchFamily="2" charset="0"/>
+              </a:rPr>
+              <a:t>Ticket count and amount peaked during weekday business hours and during the warmer months (May – October)</a:t>
+            </a:r>
+          </a:p>
+          <a:p>
+            <a:pPr marL="355600" marR="5080" indent="-342900">
+              <a:lnSpc>
+                <a:spcPct val="100000"/>
+              </a:lnSpc>
+              <a:spcBef>
+                <a:spcPts val="100"/>
+              </a:spcBef>
+              <a:buFont typeface="Arial" panose="020B0604020202020204" pitchFamily="34" charset="0"/>
+              <a:buChar char="•"/>
+            </a:pPr>
+            <a:r>
+              <a:rPr lang="en-CA" dirty="0">
+                <a:solidFill>
+                  <a:srgbClr val="212529"/>
+                </a:solidFill>
+                <a:latin typeface="Helvetica" pitchFamily="2" charset="0"/>
+              </a:rPr>
+              <a:t>Ontario plated vehicles drove the highest ticket amount</a:t>
+            </a:r>
+          </a:p>
+          <a:p>
+            <a:pPr marL="355600" marR="5080" indent="-342900">
+              <a:lnSpc>
+                <a:spcPct val="100000"/>
+              </a:lnSpc>
+              <a:spcBef>
+                <a:spcPts val="100"/>
+              </a:spcBef>
+              <a:buFont typeface="Arial" panose="020B0604020202020204" pitchFamily="34" charset="0"/>
+              <a:buChar char="•"/>
+            </a:pPr>
+            <a:r>
+              <a:rPr lang="en-CA" b="0" i="0" u="none" strike="noStrike" dirty="0">
+                <a:solidFill>
+                  <a:srgbClr val="212529"/>
+                </a:solidFill>
+                <a:effectLst/>
+                <a:latin typeface="Helvetica" pitchFamily="2" charset="0"/>
+              </a:rPr>
+              <a:t>There is an opportunity to target geographical hotspots with better signage</a:t>
+            </a:r>
+          </a:p>
+          <a:p>
+            <a:pPr marL="355600" marR="5080" indent="-342900">
+              <a:lnSpc>
+                <a:spcPct val="100000"/>
+              </a:lnSpc>
+              <a:spcBef>
+                <a:spcPts val="100"/>
+              </a:spcBef>
+              <a:buFont typeface="Arial" panose="020B0604020202020204" pitchFamily="34" charset="0"/>
+              <a:buChar char="•"/>
+            </a:pPr>
+            <a:endParaRPr lang="en-CA" b="0" i="0" u="none" strike="noStrike" dirty="0">
+              <a:solidFill>
+                <a:srgbClr val="212529"/>
+              </a:solidFill>
+              <a:effectLst/>
+              <a:latin typeface="Helvetica" pitchFamily="2" charset="0"/>
+            </a:endParaRPr>
           </a:p>
         </p:txBody>
       </p:sp>
@@ -3086,7 +5273,7 @@
                 </a:solidFill>
                 <a:latin typeface="Helvetica" pitchFamily="2" charset="0"/>
               </a:rPr>
-              <a:t>Time and Seasonality</a:t>
+              <a:t>Ticket Trends</a:t>
             </a:r>
             <a:endParaRPr spc="-10" dirty="0">
               <a:solidFill>
@@ -3113,8 +5300,8 @@
         </p:nvSpPr>
         <p:spPr>
           <a:xfrm>
-            <a:off x="762000" y="4931616"/>
-            <a:ext cx="4972684" cy="1295226"/>
+            <a:off x="861378" y="4623839"/>
+            <a:ext cx="4972684" cy="1046440"/>
           </a:xfrm>
           <a:prstGeom prst="rect">
             <a:avLst/>
@@ -3196,584 +5383,12 @@
               </a:spcBef>
             </a:pPr>
             <a:r>
-              <a:rPr lang="en-CA" sz="1400" dirty="0">
-                <a:latin typeface="Helvetica" pitchFamily="2" charset="0"/>
-              </a:rPr>
-              <a:t>New</a:t>
-            </a:r>
-            <a:r>
-              <a:rPr lang="en-CA" sz="1400" spc="-35" dirty="0">
-                <a:latin typeface="Helvetica" pitchFamily="2" charset="0"/>
-              </a:rPr>
-              <a:t> </a:t>
-            </a:r>
-            <a:r>
-              <a:rPr lang="en-CA" sz="1400" spc="-20" dirty="0">
-                <a:latin typeface="Helvetica" pitchFamily="2" charset="0"/>
-              </a:rPr>
-              <a:t>T</a:t>
-            </a:r>
-          </a:p>
-          <a:p>
-            <a:pPr marL="12700">
-              <a:spcBef>
-                <a:spcPts val="1680"/>
-              </a:spcBef>
-            </a:pPr>
-            <a:r>
-              <a:rPr lang="en-CA" sz="1400" spc="-120" dirty="0">
-                <a:solidFill>
-                  <a:srgbClr val="000000"/>
-                </a:solidFill>
+              <a:rPr lang="en-CA" dirty="0">
                 <a:latin typeface="Helvetica" pitchFamily="2" charset="0"/>
                 <a:cs typeface="Calibri"/>
               </a:rPr>
-              <a:t>Toronto</a:t>
+              <a:t>Prior to 2020 ticket count and amount showed a consistent pattern.  2020 was impacted by the COVID-19 pandemic</a:t>
             </a:r>
-            <a:r>
-              <a:rPr lang="en-CA" sz="1400" spc="-95" dirty="0">
-                <a:solidFill>
-                  <a:srgbClr val="000000"/>
-                </a:solidFill>
-                <a:latin typeface="Helvetica" pitchFamily="2" charset="0"/>
-                <a:cs typeface="Calibri"/>
-              </a:rPr>
-              <a:t> </a:t>
-            </a:r>
-            <a:r>
-              <a:rPr lang="en-CA" sz="1400" spc="-75" dirty="0">
-                <a:solidFill>
-                  <a:srgbClr val="000000"/>
-                </a:solidFill>
-                <a:latin typeface="Helvetica" pitchFamily="2" charset="0"/>
-                <a:cs typeface="Calibri"/>
-              </a:rPr>
-              <a:t>surpassed</a:t>
-            </a:r>
-            <a:r>
-              <a:rPr lang="en-CA" sz="1400" spc="-110" dirty="0">
-                <a:solidFill>
-                  <a:srgbClr val="000000"/>
-                </a:solidFill>
-                <a:latin typeface="Helvetica" pitchFamily="2" charset="0"/>
-                <a:cs typeface="Calibri"/>
-              </a:rPr>
-              <a:t> </a:t>
-            </a:r>
-            <a:r>
-              <a:rPr lang="en-CA" sz="1400" spc="-65" dirty="0">
-                <a:solidFill>
-                  <a:srgbClr val="000000"/>
-                </a:solidFill>
-                <a:latin typeface="Helvetica" pitchFamily="2" charset="0"/>
-                <a:cs typeface="Calibri"/>
-              </a:rPr>
-              <a:t>its</a:t>
-            </a:r>
-            <a:r>
-              <a:rPr lang="en-CA" sz="1400" spc="-95" dirty="0">
-                <a:solidFill>
-                  <a:srgbClr val="000000"/>
-                </a:solidFill>
-                <a:latin typeface="Helvetica" pitchFamily="2" charset="0"/>
-                <a:cs typeface="Calibri"/>
-              </a:rPr>
-              <a:t> </a:t>
-            </a:r>
-            <a:r>
-              <a:rPr lang="en-CA" sz="1400" spc="-60" dirty="0">
-                <a:solidFill>
-                  <a:srgbClr val="000000"/>
-                </a:solidFill>
-                <a:latin typeface="Helvetica" pitchFamily="2" charset="0"/>
-                <a:cs typeface="Calibri"/>
-              </a:rPr>
-              <a:t>2020</a:t>
-            </a:r>
-            <a:r>
-              <a:rPr lang="en-CA" sz="1400" spc="-125" dirty="0">
-                <a:solidFill>
-                  <a:srgbClr val="000000"/>
-                </a:solidFill>
-                <a:latin typeface="Helvetica" pitchFamily="2" charset="0"/>
-                <a:cs typeface="Calibri"/>
-              </a:rPr>
-              <a:t> </a:t>
-            </a:r>
-            <a:r>
-              <a:rPr lang="en-CA" sz="1400" spc="-90" dirty="0">
-                <a:solidFill>
-                  <a:srgbClr val="000000"/>
-                </a:solidFill>
-                <a:latin typeface="Helvetica" pitchFamily="2" charset="0"/>
-                <a:cs typeface="Calibri"/>
-              </a:rPr>
-              <a:t>target</a:t>
-            </a:r>
-            <a:r>
-              <a:rPr lang="en-CA" sz="1400" spc="-80" dirty="0">
-                <a:solidFill>
-                  <a:srgbClr val="000000"/>
-                </a:solidFill>
-                <a:latin typeface="Helvetica" pitchFamily="2" charset="0"/>
-                <a:cs typeface="Calibri"/>
-              </a:rPr>
-              <a:t> </a:t>
-            </a:r>
-            <a:r>
-              <a:rPr lang="en-CA" sz="1400" spc="-50" dirty="0">
-                <a:solidFill>
-                  <a:srgbClr val="000000"/>
-                </a:solidFill>
-                <a:latin typeface="Helvetica" pitchFamily="2" charset="0"/>
-                <a:cs typeface="Calibri"/>
-              </a:rPr>
-              <a:t>of</a:t>
-            </a:r>
-            <a:r>
-              <a:rPr lang="en-CA" sz="1400" spc="-85" dirty="0">
-                <a:solidFill>
-                  <a:srgbClr val="000000"/>
-                </a:solidFill>
-                <a:latin typeface="Helvetica" pitchFamily="2" charset="0"/>
-                <a:cs typeface="Calibri"/>
-              </a:rPr>
-              <a:t> </a:t>
-            </a:r>
-            <a:r>
-              <a:rPr lang="en-CA" sz="1400" spc="-20" dirty="0">
-                <a:solidFill>
-                  <a:srgbClr val="000000"/>
-                </a:solidFill>
-                <a:latin typeface="Helvetica" pitchFamily="2" charset="0"/>
-                <a:cs typeface="Calibri"/>
-              </a:rPr>
-              <a:t>a</a:t>
-            </a:r>
-            <a:r>
-              <a:rPr lang="en-CA" sz="1400" spc="-120" dirty="0">
-                <a:solidFill>
-                  <a:srgbClr val="000000"/>
-                </a:solidFill>
-                <a:latin typeface="Helvetica" pitchFamily="2" charset="0"/>
-                <a:cs typeface="Calibri"/>
-              </a:rPr>
-              <a:t> </a:t>
-            </a:r>
-            <a:r>
-              <a:rPr lang="en-CA" sz="1400" spc="-35" dirty="0">
-                <a:solidFill>
-                  <a:srgbClr val="000000"/>
-                </a:solidFill>
-                <a:latin typeface="Helvetica" pitchFamily="2" charset="0"/>
-                <a:cs typeface="Calibri"/>
-              </a:rPr>
-              <a:t>30</a:t>
-            </a:r>
-            <a:r>
-              <a:rPr lang="en-CA" sz="1400" spc="-105" dirty="0">
-                <a:solidFill>
-                  <a:srgbClr val="000000"/>
-                </a:solidFill>
-                <a:latin typeface="Helvetica" pitchFamily="2" charset="0"/>
-                <a:cs typeface="Calibri"/>
-              </a:rPr>
-              <a:t> </a:t>
-            </a:r>
-            <a:r>
-              <a:rPr lang="en-CA" sz="1400" spc="-25" dirty="0">
-                <a:solidFill>
-                  <a:srgbClr val="000000"/>
-                </a:solidFill>
-                <a:latin typeface="Helvetica" pitchFamily="2" charset="0"/>
-                <a:cs typeface="Calibri"/>
-              </a:rPr>
-              <a:t>per </a:t>
-            </a:r>
-            <a:r>
-              <a:rPr lang="en-CA" sz="1400" spc="-75" dirty="0">
-                <a:solidFill>
-                  <a:srgbClr val="000000"/>
-                </a:solidFill>
-                <a:latin typeface="Helvetica" pitchFamily="2" charset="0"/>
-                <a:cs typeface="Calibri"/>
-              </a:rPr>
-              <a:t>cent</a:t>
-            </a:r>
-            <a:r>
-              <a:rPr lang="en-CA" sz="1400" spc="-95" dirty="0">
-                <a:solidFill>
-                  <a:srgbClr val="000000"/>
-                </a:solidFill>
-                <a:latin typeface="Helvetica" pitchFamily="2" charset="0"/>
-                <a:cs typeface="Calibri"/>
-              </a:rPr>
-              <a:t> </a:t>
-            </a:r>
-            <a:r>
-              <a:rPr lang="en-CA" sz="1400" spc="-80" dirty="0">
-                <a:solidFill>
-                  <a:srgbClr val="000000"/>
-                </a:solidFill>
-                <a:latin typeface="Helvetica" pitchFamily="2" charset="0"/>
-                <a:cs typeface="Calibri"/>
-              </a:rPr>
-              <a:t>reduction</a:t>
-            </a:r>
-            <a:r>
-              <a:rPr lang="en-CA" sz="1400" spc="-65" dirty="0">
-                <a:solidFill>
-                  <a:srgbClr val="000000"/>
-                </a:solidFill>
-                <a:latin typeface="Helvetica" pitchFamily="2" charset="0"/>
-                <a:cs typeface="Calibri"/>
-              </a:rPr>
-              <a:t> </a:t>
-            </a:r>
-            <a:r>
-              <a:rPr lang="en-CA" sz="1400" spc="-45" dirty="0">
-                <a:solidFill>
-                  <a:srgbClr val="000000"/>
-                </a:solidFill>
-                <a:latin typeface="Helvetica" pitchFamily="2" charset="0"/>
-                <a:cs typeface="Calibri"/>
-              </a:rPr>
-              <a:t>in</a:t>
-            </a:r>
-            <a:r>
-              <a:rPr lang="en-CA" sz="1400" spc="-110" dirty="0">
-                <a:solidFill>
-                  <a:srgbClr val="000000"/>
-                </a:solidFill>
-                <a:latin typeface="Helvetica" pitchFamily="2" charset="0"/>
-                <a:cs typeface="Calibri"/>
-              </a:rPr>
-              <a:t> </a:t>
-            </a:r>
-            <a:r>
-              <a:rPr lang="en-CA" sz="1400" spc="-70" dirty="0">
-                <a:solidFill>
-                  <a:srgbClr val="000000"/>
-                </a:solidFill>
-                <a:latin typeface="Helvetica" pitchFamily="2" charset="0"/>
-                <a:cs typeface="Calibri"/>
-              </a:rPr>
-              <a:t>GHG</a:t>
-            </a:r>
-            <a:r>
-              <a:rPr lang="en-CA" sz="1400" spc="-110" dirty="0">
-                <a:solidFill>
-                  <a:srgbClr val="000000"/>
-                </a:solidFill>
-                <a:latin typeface="Helvetica" pitchFamily="2" charset="0"/>
-                <a:cs typeface="Calibri"/>
-              </a:rPr>
-              <a:t> </a:t>
-            </a:r>
-            <a:r>
-              <a:rPr lang="en-CA" sz="1400" spc="-80" dirty="0">
-                <a:solidFill>
-                  <a:srgbClr val="000000"/>
-                </a:solidFill>
-                <a:latin typeface="Helvetica" pitchFamily="2" charset="0"/>
-                <a:cs typeface="Calibri"/>
-              </a:rPr>
-              <a:t>emissions</a:t>
-            </a:r>
-            <a:r>
-              <a:rPr lang="en-CA" sz="1400" spc="-85" dirty="0">
-                <a:solidFill>
-                  <a:srgbClr val="000000"/>
-                </a:solidFill>
-                <a:latin typeface="Helvetica" pitchFamily="2" charset="0"/>
-                <a:cs typeface="Calibri"/>
-              </a:rPr>
-              <a:t> </a:t>
-            </a:r>
-            <a:r>
-              <a:rPr lang="en-CA" sz="1400" spc="-80" dirty="0">
-                <a:solidFill>
-                  <a:srgbClr val="000000"/>
-                </a:solidFill>
-                <a:latin typeface="Helvetica" pitchFamily="2" charset="0"/>
-                <a:cs typeface="Calibri"/>
-              </a:rPr>
-              <a:t>from</a:t>
-            </a:r>
-            <a:r>
-              <a:rPr lang="en-CA" sz="1400" spc="-85" dirty="0">
-                <a:solidFill>
-                  <a:srgbClr val="000000"/>
-                </a:solidFill>
-                <a:latin typeface="Helvetica" pitchFamily="2" charset="0"/>
-                <a:cs typeface="Calibri"/>
-              </a:rPr>
-              <a:t> </a:t>
-            </a:r>
-            <a:r>
-              <a:rPr lang="en-CA" sz="1400" spc="-50" dirty="0">
-                <a:solidFill>
-                  <a:srgbClr val="000000"/>
-                </a:solidFill>
-                <a:latin typeface="Helvetica" pitchFamily="2" charset="0"/>
-                <a:cs typeface="Calibri"/>
-              </a:rPr>
-              <a:t>a </a:t>
-            </a:r>
-            <a:r>
-              <a:rPr lang="en-CA" sz="1400" spc="-60" dirty="0">
-                <a:solidFill>
-                  <a:srgbClr val="000000"/>
-                </a:solidFill>
-                <a:latin typeface="Helvetica" pitchFamily="2" charset="0"/>
-                <a:cs typeface="Calibri"/>
-              </a:rPr>
-              <a:t>1990</a:t>
-            </a:r>
-            <a:r>
-              <a:rPr lang="en-CA" sz="1400" spc="-120" dirty="0">
-                <a:solidFill>
-                  <a:srgbClr val="000000"/>
-                </a:solidFill>
-                <a:latin typeface="Helvetica" pitchFamily="2" charset="0"/>
-                <a:cs typeface="Calibri"/>
-              </a:rPr>
-              <a:t> </a:t>
-            </a:r>
-            <a:r>
-              <a:rPr lang="en-CA" sz="1400" spc="-75" dirty="0">
-                <a:solidFill>
-                  <a:srgbClr val="000000"/>
-                </a:solidFill>
-                <a:latin typeface="Helvetica" pitchFamily="2" charset="0"/>
-                <a:cs typeface="Calibri"/>
-              </a:rPr>
-              <a:t>baseline.</a:t>
-            </a:r>
-            <a:r>
-              <a:rPr lang="en-CA" sz="1400" spc="-70" dirty="0">
-                <a:solidFill>
-                  <a:srgbClr val="000000"/>
-                </a:solidFill>
-                <a:latin typeface="Helvetica" pitchFamily="2" charset="0"/>
-                <a:cs typeface="Calibri"/>
-              </a:rPr>
-              <a:t> </a:t>
-            </a:r>
-            <a:r>
-              <a:rPr lang="en-CA" sz="1400" spc="-110" dirty="0">
-                <a:solidFill>
-                  <a:srgbClr val="000000"/>
-                </a:solidFill>
-                <a:latin typeface="Helvetica" pitchFamily="2" charset="0"/>
-                <a:cs typeface="Calibri"/>
-              </a:rPr>
-              <a:t>However,</a:t>
-            </a:r>
-            <a:r>
-              <a:rPr lang="en-CA" sz="1400" spc="-65" dirty="0">
-                <a:solidFill>
-                  <a:srgbClr val="000000"/>
-                </a:solidFill>
-                <a:latin typeface="Helvetica" pitchFamily="2" charset="0"/>
-                <a:cs typeface="Calibri"/>
-              </a:rPr>
-              <a:t> </a:t>
-            </a:r>
-            <a:r>
-              <a:rPr lang="en-CA" sz="1400" spc="-60" dirty="0">
-                <a:solidFill>
-                  <a:srgbClr val="000000"/>
-                </a:solidFill>
-                <a:latin typeface="Helvetica" pitchFamily="2" charset="0"/>
-                <a:cs typeface="Calibri"/>
-              </a:rPr>
-              <a:t>2020</a:t>
-            </a:r>
-            <a:r>
-              <a:rPr lang="en-CA" sz="1400" spc="-120" dirty="0">
-                <a:solidFill>
-                  <a:srgbClr val="000000"/>
-                </a:solidFill>
-                <a:latin typeface="Helvetica" pitchFamily="2" charset="0"/>
-                <a:cs typeface="Calibri"/>
-              </a:rPr>
-              <a:t> </a:t>
-            </a:r>
-            <a:r>
-              <a:rPr lang="en-CA" sz="1400" spc="-75" dirty="0">
-                <a:solidFill>
-                  <a:srgbClr val="000000"/>
-                </a:solidFill>
-                <a:latin typeface="Helvetica" pitchFamily="2" charset="0"/>
-                <a:cs typeface="Calibri"/>
-              </a:rPr>
-              <a:t>was</a:t>
-            </a:r>
-            <a:r>
-              <a:rPr lang="en-CA" sz="1400" spc="-105" dirty="0">
-                <a:solidFill>
-                  <a:srgbClr val="000000"/>
-                </a:solidFill>
-                <a:latin typeface="Helvetica" pitchFamily="2" charset="0"/>
-                <a:cs typeface="Calibri"/>
-              </a:rPr>
-              <a:t> </a:t>
-            </a:r>
-            <a:r>
-              <a:rPr lang="en-CA" sz="1400" spc="-25" dirty="0">
-                <a:solidFill>
-                  <a:srgbClr val="000000"/>
-                </a:solidFill>
-                <a:latin typeface="Helvetica" pitchFamily="2" charset="0"/>
-                <a:cs typeface="Calibri"/>
-              </a:rPr>
-              <a:t>an </a:t>
-            </a:r>
-            <a:r>
-              <a:rPr lang="en-CA" sz="1400" spc="-75" dirty="0">
-                <a:solidFill>
-                  <a:srgbClr val="000000"/>
-                </a:solidFill>
-                <a:latin typeface="Helvetica" pitchFamily="2" charset="0"/>
-                <a:cs typeface="Calibri"/>
-              </a:rPr>
-              <a:t>anomaly</a:t>
-            </a:r>
-            <a:r>
-              <a:rPr lang="en-CA" sz="1400" spc="-100" dirty="0">
-                <a:solidFill>
-                  <a:srgbClr val="000000"/>
-                </a:solidFill>
-                <a:latin typeface="Helvetica" pitchFamily="2" charset="0"/>
-                <a:cs typeface="Calibri"/>
-              </a:rPr>
-              <a:t> </a:t>
-            </a:r>
-            <a:r>
-              <a:rPr lang="en-CA" sz="1400" spc="-75" dirty="0">
-                <a:solidFill>
-                  <a:srgbClr val="000000"/>
-                </a:solidFill>
-                <a:latin typeface="Helvetica" pitchFamily="2" charset="0"/>
-                <a:cs typeface="Calibri"/>
-              </a:rPr>
-              <a:t>year</a:t>
-            </a:r>
-            <a:r>
-              <a:rPr lang="en-CA" sz="1400" spc="-105" dirty="0">
-                <a:solidFill>
-                  <a:srgbClr val="000000"/>
-                </a:solidFill>
-                <a:latin typeface="Helvetica" pitchFamily="2" charset="0"/>
-                <a:cs typeface="Calibri"/>
-              </a:rPr>
-              <a:t> </a:t>
-            </a:r>
-            <a:r>
-              <a:rPr lang="en-CA" sz="1400" spc="-60" dirty="0">
-                <a:solidFill>
-                  <a:srgbClr val="000000"/>
-                </a:solidFill>
-                <a:latin typeface="Helvetica" pitchFamily="2" charset="0"/>
-                <a:cs typeface="Calibri"/>
-              </a:rPr>
-              <a:t>due</a:t>
-            </a:r>
-            <a:r>
-              <a:rPr lang="en-CA" sz="1400" spc="-100" dirty="0">
-                <a:solidFill>
-                  <a:srgbClr val="000000"/>
-                </a:solidFill>
-                <a:latin typeface="Helvetica" pitchFamily="2" charset="0"/>
-                <a:cs typeface="Calibri"/>
-              </a:rPr>
-              <a:t> </a:t>
-            </a:r>
-            <a:r>
-              <a:rPr lang="en-CA" sz="1400" spc="-65" dirty="0">
-                <a:solidFill>
-                  <a:srgbClr val="000000"/>
-                </a:solidFill>
-                <a:latin typeface="Helvetica" pitchFamily="2" charset="0"/>
-                <a:cs typeface="Calibri"/>
-              </a:rPr>
-              <a:t>to</a:t>
-            </a:r>
-            <a:r>
-              <a:rPr lang="en-CA" sz="1400" spc="-110" dirty="0">
-                <a:solidFill>
-                  <a:srgbClr val="000000"/>
-                </a:solidFill>
-                <a:latin typeface="Helvetica" pitchFamily="2" charset="0"/>
-                <a:cs typeface="Calibri"/>
-              </a:rPr>
-              <a:t> </a:t>
-            </a:r>
-            <a:r>
-              <a:rPr lang="en-CA" sz="1400" spc="-60" dirty="0">
-                <a:solidFill>
-                  <a:srgbClr val="000000"/>
-                </a:solidFill>
-                <a:latin typeface="Helvetica" pitchFamily="2" charset="0"/>
-                <a:cs typeface="Calibri"/>
-              </a:rPr>
-              <a:t>the</a:t>
-            </a:r>
-            <a:r>
-              <a:rPr lang="en-CA" sz="1400" spc="-85" dirty="0">
-                <a:solidFill>
-                  <a:srgbClr val="000000"/>
-                </a:solidFill>
-                <a:latin typeface="Helvetica" pitchFamily="2" charset="0"/>
-                <a:cs typeface="Calibri"/>
-              </a:rPr>
-              <a:t> </a:t>
-            </a:r>
-            <a:r>
-              <a:rPr lang="en-CA" sz="1400" spc="-95" dirty="0">
-                <a:solidFill>
-                  <a:srgbClr val="000000"/>
-                </a:solidFill>
-                <a:latin typeface="Helvetica" pitchFamily="2" charset="0"/>
-                <a:cs typeface="Calibri"/>
-              </a:rPr>
-              <a:t>COVID-</a:t>
-            </a:r>
-            <a:r>
-              <a:rPr lang="en-CA" sz="1400" spc="-25" dirty="0">
-                <a:solidFill>
-                  <a:srgbClr val="000000"/>
-                </a:solidFill>
-                <a:latin typeface="Helvetica" pitchFamily="2" charset="0"/>
-                <a:cs typeface="Calibri"/>
-              </a:rPr>
-              <a:t>19 </a:t>
-            </a:r>
-            <a:r>
-              <a:rPr lang="en-CA" sz="1400" spc="-10" dirty="0">
-                <a:solidFill>
-                  <a:srgbClr val="000000"/>
-                </a:solidFill>
-                <a:latin typeface="Helvetica" pitchFamily="2" charset="0"/>
-                <a:cs typeface="Calibri"/>
-              </a:rPr>
-              <a:t>pandemic</a:t>
-            </a:r>
-            <a:r>
-              <a:rPr lang="en-CA" sz="1400" spc="-20" dirty="0">
-                <a:solidFill>
-                  <a:srgbClr val="000000"/>
-                </a:solidFill>
-                <a:latin typeface="Helvetica" pitchFamily="2" charset="0"/>
-                <a:cs typeface="Calibri"/>
-              </a:rPr>
-              <a:t>.</a:t>
-            </a:r>
-            <a:endParaRPr lang="en-CA" sz="1400" dirty="0">
-              <a:latin typeface="Helvetica" pitchFamily="2" charset="0"/>
-              <a:cs typeface="Calibri"/>
-            </a:endParaRPr>
           </a:p>
         </p:txBody>
       </p:sp>
@@ -3853,8 +5468,8 @@
         </p:nvSpPr>
         <p:spPr>
           <a:xfrm>
-            <a:off x="6553200" y="4931616"/>
-            <a:ext cx="4972684" cy="1295226"/>
+            <a:off x="6826330" y="4623839"/>
+            <a:ext cx="4972684" cy="1323439"/>
           </a:xfrm>
           <a:prstGeom prst="rect">
             <a:avLst/>
@@ -3936,584 +5551,12 @@
               </a:spcBef>
             </a:pPr>
             <a:r>
-              <a:rPr lang="en-CA" sz="1400" dirty="0">
-                <a:latin typeface="Helvetica" pitchFamily="2" charset="0"/>
-              </a:rPr>
-              <a:t>New</a:t>
-            </a:r>
-            <a:r>
-              <a:rPr lang="en-CA" sz="1400" spc="-35" dirty="0">
-                <a:latin typeface="Helvetica" pitchFamily="2" charset="0"/>
-              </a:rPr>
-              <a:t> </a:t>
-            </a:r>
-            <a:r>
-              <a:rPr lang="en-CA" sz="1400" spc="-20" dirty="0">
-                <a:latin typeface="Helvetica" pitchFamily="2" charset="0"/>
-              </a:rPr>
-              <a:t>T</a:t>
-            </a:r>
-          </a:p>
-          <a:p>
-            <a:pPr marL="12700">
-              <a:spcBef>
-                <a:spcPts val="1680"/>
-              </a:spcBef>
-            </a:pPr>
-            <a:r>
-              <a:rPr lang="en-CA" sz="1400" spc="-120" dirty="0">
-                <a:solidFill>
-                  <a:srgbClr val="000000"/>
-                </a:solidFill>
+              <a:rPr lang="en-CA" dirty="0">
                 <a:latin typeface="Helvetica" pitchFamily="2" charset="0"/>
                 <a:cs typeface="Calibri"/>
               </a:rPr>
-              <a:t>Toronto</a:t>
+              <a:t>Shows monthly seasonality, with higher ticket counts and amounts during warmer months (May-October) and lower activity in winter (December, January, February)</a:t>
             </a:r>
-            <a:r>
-              <a:rPr lang="en-CA" sz="1400" spc="-95" dirty="0">
-                <a:solidFill>
-                  <a:srgbClr val="000000"/>
-                </a:solidFill>
-                <a:latin typeface="Helvetica" pitchFamily="2" charset="0"/>
-                <a:cs typeface="Calibri"/>
-              </a:rPr>
-              <a:t> </a:t>
-            </a:r>
-            <a:r>
-              <a:rPr lang="en-CA" sz="1400" spc="-75" dirty="0">
-                <a:solidFill>
-                  <a:srgbClr val="000000"/>
-                </a:solidFill>
-                <a:latin typeface="Helvetica" pitchFamily="2" charset="0"/>
-                <a:cs typeface="Calibri"/>
-              </a:rPr>
-              <a:t>surpassed</a:t>
-            </a:r>
-            <a:r>
-              <a:rPr lang="en-CA" sz="1400" spc="-110" dirty="0">
-                <a:solidFill>
-                  <a:srgbClr val="000000"/>
-                </a:solidFill>
-                <a:latin typeface="Helvetica" pitchFamily="2" charset="0"/>
-                <a:cs typeface="Calibri"/>
-              </a:rPr>
-              <a:t> </a:t>
-            </a:r>
-            <a:r>
-              <a:rPr lang="en-CA" sz="1400" spc="-65" dirty="0">
-                <a:solidFill>
-                  <a:srgbClr val="000000"/>
-                </a:solidFill>
-                <a:latin typeface="Helvetica" pitchFamily="2" charset="0"/>
-                <a:cs typeface="Calibri"/>
-              </a:rPr>
-              <a:t>its</a:t>
-            </a:r>
-            <a:r>
-              <a:rPr lang="en-CA" sz="1400" spc="-95" dirty="0">
-                <a:solidFill>
-                  <a:srgbClr val="000000"/>
-                </a:solidFill>
-                <a:latin typeface="Helvetica" pitchFamily="2" charset="0"/>
-                <a:cs typeface="Calibri"/>
-              </a:rPr>
-              <a:t> </a:t>
-            </a:r>
-            <a:r>
-              <a:rPr lang="en-CA" sz="1400" spc="-60" dirty="0">
-                <a:solidFill>
-                  <a:srgbClr val="000000"/>
-                </a:solidFill>
-                <a:latin typeface="Helvetica" pitchFamily="2" charset="0"/>
-                <a:cs typeface="Calibri"/>
-              </a:rPr>
-              <a:t>2020</a:t>
-            </a:r>
-            <a:r>
-              <a:rPr lang="en-CA" sz="1400" spc="-125" dirty="0">
-                <a:solidFill>
-                  <a:srgbClr val="000000"/>
-                </a:solidFill>
-                <a:latin typeface="Helvetica" pitchFamily="2" charset="0"/>
-                <a:cs typeface="Calibri"/>
-              </a:rPr>
-              <a:t> </a:t>
-            </a:r>
-            <a:r>
-              <a:rPr lang="en-CA" sz="1400" spc="-90" dirty="0">
-                <a:solidFill>
-                  <a:srgbClr val="000000"/>
-                </a:solidFill>
-                <a:latin typeface="Helvetica" pitchFamily="2" charset="0"/>
-                <a:cs typeface="Calibri"/>
-              </a:rPr>
-              <a:t>target</a:t>
-            </a:r>
-            <a:r>
-              <a:rPr lang="en-CA" sz="1400" spc="-80" dirty="0">
-                <a:solidFill>
-                  <a:srgbClr val="000000"/>
-                </a:solidFill>
-                <a:latin typeface="Helvetica" pitchFamily="2" charset="0"/>
-                <a:cs typeface="Calibri"/>
-              </a:rPr>
-              <a:t> </a:t>
-            </a:r>
-            <a:r>
-              <a:rPr lang="en-CA" sz="1400" spc="-50" dirty="0">
-                <a:solidFill>
-                  <a:srgbClr val="000000"/>
-                </a:solidFill>
-                <a:latin typeface="Helvetica" pitchFamily="2" charset="0"/>
-                <a:cs typeface="Calibri"/>
-              </a:rPr>
-              <a:t>of</a:t>
-            </a:r>
-            <a:r>
-              <a:rPr lang="en-CA" sz="1400" spc="-85" dirty="0">
-                <a:solidFill>
-                  <a:srgbClr val="000000"/>
-                </a:solidFill>
-                <a:latin typeface="Helvetica" pitchFamily="2" charset="0"/>
-                <a:cs typeface="Calibri"/>
-              </a:rPr>
-              <a:t> </a:t>
-            </a:r>
-            <a:r>
-              <a:rPr lang="en-CA" sz="1400" spc="-20" dirty="0">
-                <a:solidFill>
-                  <a:srgbClr val="000000"/>
-                </a:solidFill>
-                <a:latin typeface="Helvetica" pitchFamily="2" charset="0"/>
-                <a:cs typeface="Calibri"/>
-              </a:rPr>
-              <a:t>a</a:t>
-            </a:r>
-            <a:r>
-              <a:rPr lang="en-CA" sz="1400" spc="-120" dirty="0">
-                <a:solidFill>
-                  <a:srgbClr val="000000"/>
-                </a:solidFill>
-                <a:latin typeface="Helvetica" pitchFamily="2" charset="0"/>
-                <a:cs typeface="Calibri"/>
-              </a:rPr>
-              <a:t> </a:t>
-            </a:r>
-            <a:r>
-              <a:rPr lang="en-CA" sz="1400" spc="-35" dirty="0">
-                <a:solidFill>
-                  <a:srgbClr val="000000"/>
-                </a:solidFill>
-                <a:latin typeface="Helvetica" pitchFamily="2" charset="0"/>
-                <a:cs typeface="Calibri"/>
-              </a:rPr>
-              <a:t>30</a:t>
-            </a:r>
-            <a:r>
-              <a:rPr lang="en-CA" sz="1400" spc="-105" dirty="0">
-                <a:solidFill>
-                  <a:srgbClr val="000000"/>
-                </a:solidFill>
-                <a:latin typeface="Helvetica" pitchFamily="2" charset="0"/>
-                <a:cs typeface="Calibri"/>
-              </a:rPr>
-              <a:t> </a:t>
-            </a:r>
-            <a:r>
-              <a:rPr lang="en-CA" sz="1400" spc="-25" dirty="0">
-                <a:solidFill>
-                  <a:srgbClr val="000000"/>
-                </a:solidFill>
-                <a:latin typeface="Helvetica" pitchFamily="2" charset="0"/>
-                <a:cs typeface="Calibri"/>
-              </a:rPr>
-              <a:t>per </a:t>
-            </a:r>
-            <a:r>
-              <a:rPr lang="en-CA" sz="1400" spc="-75" dirty="0">
-                <a:solidFill>
-                  <a:srgbClr val="000000"/>
-                </a:solidFill>
-                <a:latin typeface="Helvetica" pitchFamily="2" charset="0"/>
-                <a:cs typeface="Calibri"/>
-              </a:rPr>
-              <a:t>cent</a:t>
-            </a:r>
-            <a:r>
-              <a:rPr lang="en-CA" sz="1400" spc="-95" dirty="0">
-                <a:solidFill>
-                  <a:srgbClr val="000000"/>
-                </a:solidFill>
-                <a:latin typeface="Helvetica" pitchFamily="2" charset="0"/>
-                <a:cs typeface="Calibri"/>
-              </a:rPr>
-              <a:t> </a:t>
-            </a:r>
-            <a:r>
-              <a:rPr lang="en-CA" sz="1400" spc="-80" dirty="0">
-                <a:solidFill>
-                  <a:srgbClr val="000000"/>
-                </a:solidFill>
-                <a:latin typeface="Helvetica" pitchFamily="2" charset="0"/>
-                <a:cs typeface="Calibri"/>
-              </a:rPr>
-              <a:t>reduction</a:t>
-            </a:r>
-            <a:r>
-              <a:rPr lang="en-CA" sz="1400" spc="-65" dirty="0">
-                <a:solidFill>
-                  <a:srgbClr val="000000"/>
-                </a:solidFill>
-                <a:latin typeface="Helvetica" pitchFamily="2" charset="0"/>
-                <a:cs typeface="Calibri"/>
-              </a:rPr>
-              <a:t> </a:t>
-            </a:r>
-            <a:r>
-              <a:rPr lang="en-CA" sz="1400" spc="-45" dirty="0">
-                <a:solidFill>
-                  <a:srgbClr val="000000"/>
-                </a:solidFill>
-                <a:latin typeface="Helvetica" pitchFamily="2" charset="0"/>
-                <a:cs typeface="Calibri"/>
-              </a:rPr>
-              <a:t>in</a:t>
-            </a:r>
-            <a:r>
-              <a:rPr lang="en-CA" sz="1400" spc="-110" dirty="0">
-                <a:solidFill>
-                  <a:srgbClr val="000000"/>
-                </a:solidFill>
-                <a:latin typeface="Helvetica" pitchFamily="2" charset="0"/>
-                <a:cs typeface="Calibri"/>
-              </a:rPr>
-              <a:t> </a:t>
-            </a:r>
-            <a:r>
-              <a:rPr lang="en-CA" sz="1400" spc="-70" dirty="0">
-                <a:solidFill>
-                  <a:srgbClr val="000000"/>
-                </a:solidFill>
-                <a:latin typeface="Helvetica" pitchFamily="2" charset="0"/>
-                <a:cs typeface="Calibri"/>
-              </a:rPr>
-              <a:t>GHG</a:t>
-            </a:r>
-            <a:r>
-              <a:rPr lang="en-CA" sz="1400" spc="-110" dirty="0">
-                <a:solidFill>
-                  <a:srgbClr val="000000"/>
-                </a:solidFill>
-                <a:latin typeface="Helvetica" pitchFamily="2" charset="0"/>
-                <a:cs typeface="Calibri"/>
-              </a:rPr>
-              <a:t> </a:t>
-            </a:r>
-            <a:r>
-              <a:rPr lang="en-CA" sz="1400" spc="-80" dirty="0">
-                <a:solidFill>
-                  <a:srgbClr val="000000"/>
-                </a:solidFill>
-                <a:latin typeface="Helvetica" pitchFamily="2" charset="0"/>
-                <a:cs typeface="Calibri"/>
-              </a:rPr>
-              <a:t>emissions</a:t>
-            </a:r>
-            <a:r>
-              <a:rPr lang="en-CA" sz="1400" spc="-85" dirty="0">
-                <a:solidFill>
-                  <a:srgbClr val="000000"/>
-                </a:solidFill>
-                <a:latin typeface="Helvetica" pitchFamily="2" charset="0"/>
-                <a:cs typeface="Calibri"/>
-              </a:rPr>
-              <a:t> </a:t>
-            </a:r>
-            <a:r>
-              <a:rPr lang="en-CA" sz="1400" spc="-80" dirty="0">
-                <a:solidFill>
-                  <a:srgbClr val="000000"/>
-                </a:solidFill>
-                <a:latin typeface="Helvetica" pitchFamily="2" charset="0"/>
-                <a:cs typeface="Calibri"/>
-              </a:rPr>
-              <a:t>from</a:t>
-            </a:r>
-            <a:r>
-              <a:rPr lang="en-CA" sz="1400" spc="-85" dirty="0">
-                <a:solidFill>
-                  <a:srgbClr val="000000"/>
-                </a:solidFill>
-                <a:latin typeface="Helvetica" pitchFamily="2" charset="0"/>
-                <a:cs typeface="Calibri"/>
-              </a:rPr>
-              <a:t> </a:t>
-            </a:r>
-            <a:r>
-              <a:rPr lang="en-CA" sz="1400" spc="-50" dirty="0">
-                <a:solidFill>
-                  <a:srgbClr val="000000"/>
-                </a:solidFill>
-                <a:latin typeface="Helvetica" pitchFamily="2" charset="0"/>
-                <a:cs typeface="Calibri"/>
-              </a:rPr>
-              <a:t>a </a:t>
-            </a:r>
-            <a:r>
-              <a:rPr lang="en-CA" sz="1400" spc="-60" dirty="0">
-                <a:solidFill>
-                  <a:srgbClr val="000000"/>
-                </a:solidFill>
-                <a:latin typeface="Helvetica" pitchFamily="2" charset="0"/>
-                <a:cs typeface="Calibri"/>
-              </a:rPr>
-              <a:t>1990</a:t>
-            </a:r>
-            <a:r>
-              <a:rPr lang="en-CA" sz="1400" spc="-120" dirty="0">
-                <a:solidFill>
-                  <a:srgbClr val="000000"/>
-                </a:solidFill>
-                <a:latin typeface="Helvetica" pitchFamily="2" charset="0"/>
-                <a:cs typeface="Calibri"/>
-              </a:rPr>
-              <a:t> </a:t>
-            </a:r>
-            <a:r>
-              <a:rPr lang="en-CA" sz="1400" spc="-75" dirty="0">
-                <a:solidFill>
-                  <a:srgbClr val="000000"/>
-                </a:solidFill>
-                <a:latin typeface="Helvetica" pitchFamily="2" charset="0"/>
-                <a:cs typeface="Calibri"/>
-              </a:rPr>
-              <a:t>baseline.</a:t>
-            </a:r>
-            <a:r>
-              <a:rPr lang="en-CA" sz="1400" spc="-70" dirty="0">
-                <a:solidFill>
-                  <a:srgbClr val="000000"/>
-                </a:solidFill>
-                <a:latin typeface="Helvetica" pitchFamily="2" charset="0"/>
-                <a:cs typeface="Calibri"/>
-              </a:rPr>
-              <a:t> </a:t>
-            </a:r>
-            <a:r>
-              <a:rPr lang="en-CA" sz="1400" spc="-110" dirty="0">
-                <a:solidFill>
-                  <a:srgbClr val="000000"/>
-                </a:solidFill>
-                <a:latin typeface="Helvetica" pitchFamily="2" charset="0"/>
-                <a:cs typeface="Calibri"/>
-              </a:rPr>
-              <a:t>However,</a:t>
-            </a:r>
-            <a:r>
-              <a:rPr lang="en-CA" sz="1400" spc="-65" dirty="0">
-                <a:solidFill>
-                  <a:srgbClr val="000000"/>
-                </a:solidFill>
-                <a:latin typeface="Helvetica" pitchFamily="2" charset="0"/>
-                <a:cs typeface="Calibri"/>
-              </a:rPr>
-              <a:t> </a:t>
-            </a:r>
-            <a:r>
-              <a:rPr lang="en-CA" sz="1400" spc="-60" dirty="0">
-                <a:solidFill>
-                  <a:srgbClr val="000000"/>
-                </a:solidFill>
-                <a:latin typeface="Helvetica" pitchFamily="2" charset="0"/>
-                <a:cs typeface="Calibri"/>
-              </a:rPr>
-              <a:t>2020</a:t>
-            </a:r>
-            <a:r>
-              <a:rPr lang="en-CA" sz="1400" spc="-120" dirty="0">
-                <a:solidFill>
-                  <a:srgbClr val="000000"/>
-                </a:solidFill>
-                <a:latin typeface="Helvetica" pitchFamily="2" charset="0"/>
-                <a:cs typeface="Calibri"/>
-              </a:rPr>
-              <a:t> </a:t>
-            </a:r>
-            <a:r>
-              <a:rPr lang="en-CA" sz="1400" spc="-75" dirty="0">
-                <a:solidFill>
-                  <a:srgbClr val="000000"/>
-                </a:solidFill>
-                <a:latin typeface="Helvetica" pitchFamily="2" charset="0"/>
-                <a:cs typeface="Calibri"/>
-              </a:rPr>
-              <a:t>was</a:t>
-            </a:r>
-            <a:r>
-              <a:rPr lang="en-CA" sz="1400" spc="-105" dirty="0">
-                <a:solidFill>
-                  <a:srgbClr val="000000"/>
-                </a:solidFill>
-                <a:latin typeface="Helvetica" pitchFamily="2" charset="0"/>
-                <a:cs typeface="Calibri"/>
-              </a:rPr>
-              <a:t> </a:t>
-            </a:r>
-            <a:r>
-              <a:rPr lang="en-CA" sz="1400" spc="-25" dirty="0">
-                <a:solidFill>
-                  <a:srgbClr val="000000"/>
-                </a:solidFill>
-                <a:latin typeface="Helvetica" pitchFamily="2" charset="0"/>
-                <a:cs typeface="Calibri"/>
-              </a:rPr>
-              <a:t>an </a:t>
-            </a:r>
-            <a:r>
-              <a:rPr lang="en-CA" sz="1400" spc="-75" dirty="0">
-                <a:solidFill>
-                  <a:srgbClr val="000000"/>
-                </a:solidFill>
-                <a:latin typeface="Helvetica" pitchFamily="2" charset="0"/>
-                <a:cs typeface="Calibri"/>
-              </a:rPr>
-              <a:t>anomaly</a:t>
-            </a:r>
-            <a:r>
-              <a:rPr lang="en-CA" sz="1400" spc="-100" dirty="0">
-                <a:solidFill>
-                  <a:srgbClr val="000000"/>
-                </a:solidFill>
-                <a:latin typeface="Helvetica" pitchFamily="2" charset="0"/>
-                <a:cs typeface="Calibri"/>
-              </a:rPr>
-              <a:t> </a:t>
-            </a:r>
-            <a:r>
-              <a:rPr lang="en-CA" sz="1400" spc="-75" dirty="0">
-                <a:solidFill>
-                  <a:srgbClr val="000000"/>
-                </a:solidFill>
-                <a:latin typeface="Helvetica" pitchFamily="2" charset="0"/>
-                <a:cs typeface="Calibri"/>
-              </a:rPr>
-              <a:t>year</a:t>
-            </a:r>
-            <a:r>
-              <a:rPr lang="en-CA" sz="1400" spc="-105" dirty="0">
-                <a:solidFill>
-                  <a:srgbClr val="000000"/>
-                </a:solidFill>
-                <a:latin typeface="Helvetica" pitchFamily="2" charset="0"/>
-                <a:cs typeface="Calibri"/>
-              </a:rPr>
-              <a:t> </a:t>
-            </a:r>
-            <a:r>
-              <a:rPr lang="en-CA" sz="1400" spc="-60" dirty="0">
-                <a:solidFill>
-                  <a:srgbClr val="000000"/>
-                </a:solidFill>
-                <a:latin typeface="Helvetica" pitchFamily="2" charset="0"/>
-                <a:cs typeface="Calibri"/>
-              </a:rPr>
-              <a:t>due</a:t>
-            </a:r>
-            <a:r>
-              <a:rPr lang="en-CA" sz="1400" spc="-100" dirty="0">
-                <a:solidFill>
-                  <a:srgbClr val="000000"/>
-                </a:solidFill>
-                <a:latin typeface="Helvetica" pitchFamily="2" charset="0"/>
-                <a:cs typeface="Calibri"/>
-              </a:rPr>
-              <a:t> </a:t>
-            </a:r>
-            <a:r>
-              <a:rPr lang="en-CA" sz="1400" spc="-65" dirty="0">
-                <a:solidFill>
-                  <a:srgbClr val="000000"/>
-                </a:solidFill>
-                <a:latin typeface="Helvetica" pitchFamily="2" charset="0"/>
-                <a:cs typeface="Calibri"/>
-              </a:rPr>
-              <a:t>to</a:t>
-            </a:r>
-            <a:r>
-              <a:rPr lang="en-CA" sz="1400" spc="-110" dirty="0">
-                <a:solidFill>
-                  <a:srgbClr val="000000"/>
-                </a:solidFill>
-                <a:latin typeface="Helvetica" pitchFamily="2" charset="0"/>
-                <a:cs typeface="Calibri"/>
-              </a:rPr>
-              <a:t> </a:t>
-            </a:r>
-            <a:r>
-              <a:rPr lang="en-CA" sz="1400" spc="-60" dirty="0">
-                <a:solidFill>
-                  <a:srgbClr val="000000"/>
-                </a:solidFill>
-                <a:latin typeface="Helvetica" pitchFamily="2" charset="0"/>
-                <a:cs typeface="Calibri"/>
-              </a:rPr>
-              <a:t>the</a:t>
-            </a:r>
-            <a:r>
-              <a:rPr lang="en-CA" sz="1400" spc="-85" dirty="0">
-                <a:solidFill>
-                  <a:srgbClr val="000000"/>
-                </a:solidFill>
-                <a:latin typeface="Helvetica" pitchFamily="2" charset="0"/>
-                <a:cs typeface="Calibri"/>
-              </a:rPr>
-              <a:t> </a:t>
-            </a:r>
-            <a:r>
-              <a:rPr lang="en-CA" sz="1400" spc="-95" dirty="0">
-                <a:solidFill>
-                  <a:srgbClr val="000000"/>
-                </a:solidFill>
-                <a:latin typeface="Helvetica" pitchFamily="2" charset="0"/>
-                <a:cs typeface="Calibri"/>
-              </a:rPr>
-              <a:t>COVID-</a:t>
-            </a:r>
-            <a:r>
-              <a:rPr lang="en-CA" sz="1400" spc="-25" dirty="0">
-                <a:solidFill>
-                  <a:srgbClr val="000000"/>
-                </a:solidFill>
-                <a:latin typeface="Helvetica" pitchFamily="2" charset="0"/>
-                <a:cs typeface="Calibri"/>
-              </a:rPr>
-              <a:t>19 </a:t>
-            </a:r>
-            <a:r>
-              <a:rPr lang="en-CA" sz="1400" spc="-10" dirty="0">
-                <a:solidFill>
-                  <a:srgbClr val="000000"/>
-                </a:solidFill>
-                <a:latin typeface="Helvetica" pitchFamily="2" charset="0"/>
-                <a:cs typeface="Calibri"/>
-              </a:rPr>
-              <a:t>pandemic</a:t>
-            </a:r>
-            <a:r>
-              <a:rPr lang="en-CA" sz="1400" spc="-20" dirty="0">
-                <a:solidFill>
-                  <a:srgbClr val="000000"/>
-                </a:solidFill>
-                <a:latin typeface="Helvetica" pitchFamily="2" charset="0"/>
-                <a:cs typeface="Calibri"/>
-              </a:rPr>
-              <a:t>.</a:t>
-            </a:r>
-            <a:endParaRPr lang="en-CA" sz="1400" dirty="0">
-              <a:latin typeface="Helvetica" pitchFamily="2" charset="0"/>
-              <a:cs typeface="Calibri"/>
-            </a:endParaRPr>
           </a:p>
         </p:txBody>
       </p:sp>
@@ -4553,6 +5596,10 @@
           </p:nvPr>
         </p:nvSpPr>
         <p:spPr>
+          <a:xfrm>
+            <a:off x="918527" y="631158"/>
+            <a:ext cx="9831070" cy="690574"/>
+          </a:xfrm>
           <a:prstGeom prst="rect">
             <a:avLst/>
           </a:prstGeom>
@@ -4575,13 +5622,13 @@
               </a:tabLst>
             </a:pPr>
             <a:r>
-              <a:rPr lang="en-US" dirty="0">
+              <a:rPr lang="en-US" spc="-10" dirty="0">
                 <a:solidFill>
                   <a:srgbClr val="226092"/>
                 </a:solidFill>
                 <a:latin typeface="Helvetica" pitchFamily="2" charset="0"/>
               </a:rPr>
-              <a:t>Time and Seasonality</a:t>
+              <a:t>Ticket Window Heatmap</a:t>
             </a:r>
             <a:endParaRPr spc="-10" dirty="0">
               <a:solidFill>
@@ -4592,12 +5639,72 @@
           </a:p>
         </p:txBody>
       </p:sp>
+      <p:pic>
+        <p:nvPicPr>
+          <p:cNvPr id="3" name="Picture 2">
+            <a:extLst>
+              <a:ext uri="{FF2B5EF4-FFF2-40B4-BE49-F238E27FC236}">
+                <a16:creationId xmlns:a16="http://schemas.microsoft.com/office/drawing/2014/main" id="{243FA5F3-8BDD-448F-1A1C-2C70EC3EAADD}"/>
+              </a:ext>
+            </a:extLst>
+          </p:cNvPr>
+          <p:cNvPicPr>
+            <a:picLocks noChangeAspect="1"/>
+          </p:cNvPicPr>
+          <p:nvPr/>
+        </p:nvPicPr>
+        <p:blipFill>
+          <a:blip r:embed="rId2"/>
+          <a:stretch>
+            <a:fillRect/>
+          </a:stretch>
+        </p:blipFill>
+        <p:spPr>
+          <a:xfrm>
+            <a:off x="457200" y="1981200"/>
+            <a:ext cx="5946507" cy="2590800"/>
+          </a:xfrm>
+          <a:prstGeom prst="rect">
+            <a:avLst/>
+          </a:prstGeom>
+        </p:spPr>
+      </p:pic>
+      <p:pic>
+        <p:nvPicPr>
+          <p:cNvPr id="4" name="Picture 3">
+            <a:extLst>
+              <a:ext uri="{FF2B5EF4-FFF2-40B4-BE49-F238E27FC236}">
+                <a16:creationId xmlns:a16="http://schemas.microsoft.com/office/drawing/2014/main" id="{2C0284B7-2AAE-0965-80CF-45B1CA5299B1}"/>
+              </a:ext>
+            </a:extLst>
+          </p:cNvPr>
+          <p:cNvPicPr>
+            <a:picLocks noChangeAspect="1"/>
+          </p:cNvPicPr>
+          <p:nvPr/>
+        </p:nvPicPr>
+        <p:blipFill>
+          <a:blip r:embed="rId3"/>
+          <a:stretch>
+            <a:fillRect/>
+          </a:stretch>
+        </p:blipFill>
+        <p:spPr>
+          <a:xfrm>
+            <a:off x="6403707" y="1981200"/>
+            <a:ext cx="5635224" cy="2590800"/>
+          </a:xfrm>
+          <a:prstGeom prst="rect">
+            <a:avLst/>
+          </a:prstGeom>
+        </p:spPr>
+      </p:pic>
       <p:sp>
         <p:nvSpPr>
-          <p:cNvPr id="8" name="object 6">
+          <p:cNvPr id="5" name="object 6">
             <a:extLst>
               <a:ext uri="{FF2B5EF4-FFF2-40B4-BE49-F238E27FC236}">
-                <a16:creationId xmlns:a16="http://schemas.microsoft.com/office/drawing/2014/main" id="{95B1318A-E166-18C3-8A13-23E926490B3B}"/>
+                <a16:creationId xmlns:a16="http://schemas.microsoft.com/office/drawing/2014/main" id="{567C638D-B468-4B0B-DA78-6A9DD67C5F98}"/>
               </a:ext>
             </a:extLst>
           </p:cNvPr>
@@ -4608,8 +5715,8 @@
         </p:nvSpPr>
         <p:spPr>
           <a:xfrm>
-            <a:off x="6934200" y="4776880"/>
-            <a:ext cx="4972684" cy="553998"/>
+            <a:off x="609600" y="4605391"/>
+            <a:ext cx="11201400" cy="1541448"/>
           </a:xfrm>
           <a:prstGeom prst="rect">
             <a:avLst/>
@@ -4691,171 +5798,13 @@
               </a:spcBef>
             </a:pPr>
             <a:r>
-              <a:rPr lang="en-CA" sz="2200" dirty="0" err="1">
+              <a:rPr lang="en-CA" dirty="0">
                 <a:latin typeface="Helvetica" pitchFamily="2" charset="0"/>
                 <a:cs typeface="Calibri"/>
               </a:rPr>
-              <a:t>fghghg</a:t>
+              <a:t>Ticket counts are highest during weekdays, with peak activity concentrated during business hours and early evenings</a:t>
             </a:r>
-            <a:endParaRPr lang="en-CA" sz="2200" dirty="0">
-              <a:latin typeface="Helvetica" pitchFamily="2" charset="0"/>
-              <a:cs typeface="Calibri"/>
-            </a:endParaRPr>
           </a:p>
-        </p:txBody>
-      </p:sp>
-      <p:pic>
-        <p:nvPicPr>
-          <p:cNvPr id="3" name="Picture 2">
-            <a:extLst>
-              <a:ext uri="{FF2B5EF4-FFF2-40B4-BE49-F238E27FC236}">
-                <a16:creationId xmlns:a16="http://schemas.microsoft.com/office/drawing/2014/main" id="{243FA5F3-8BDD-448F-1A1C-2C70EC3EAADD}"/>
-              </a:ext>
-            </a:extLst>
-          </p:cNvPr>
-          <p:cNvPicPr>
-            <a:picLocks noChangeAspect="1"/>
-          </p:cNvPicPr>
-          <p:nvPr/>
-        </p:nvPicPr>
-        <p:blipFill>
-          <a:blip r:embed="rId2"/>
-          <a:stretch>
-            <a:fillRect/>
-          </a:stretch>
-        </p:blipFill>
-        <p:spPr>
-          <a:xfrm>
-            <a:off x="457200" y="1981200"/>
-            <a:ext cx="5946507" cy="2590800"/>
-          </a:xfrm>
-          <a:prstGeom prst="rect">
-            <a:avLst/>
-          </a:prstGeom>
-        </p:spPr>
-      </p:pic>
-      <p:pic>
-        <p:nvPicPr>
-          <p:cNvPr id="4" name="Picture 3">
-            <a:extLst>
-              <a:ext uri="{FF2B5EF4-FFF2-40B4-BE49-F238E27FC236}">
-                <a16:creationId xmlns:a16="http://schemas.microsoft.com/office/drawing/2014/main" id="{2C0284B7-2AAE-0965-80CF-45B1CA5299B1}"/>
-              </a:ext>
-            </a:extLst>
-          </p:cNvPr>
-          <p:cNvPicPr>
-            <a:picLocks noChangeAspect="1"/>
-          </p:cNvPicPr>
-          <p:nvPr/>
-        </p:nvPicPr>
-        <p:blipFill>
-          <a:blip r:embed="rId3"/>
-          <a:stretch>
-            <a:fillRect/>
-          </a:stretch>
-        </p:blipFill>
-        <p:spPr>
-          <a:xfrm>
-            <a:off x="6403707" y="1981200"/>
-            <a:ext cx="5635224" cy="2590800"/>
-          </a:xfrm>
-          <a:prstGeom prst="rect">
-            <a:avLst/>
-          </a:prstGeom>
-        </p:spPr>
-      </p:pic>
-      <p:sp>
-        <p:nvSpPr>
-          <p:cNvPr id="5" name="object 6">
-            <a:extLst>
-              <a:ext uri="{FF2B5EF4-FFF2-40B4-BE49-F238E27FC236}">
-                <a16:creationId xmlns:a16="http://schemas.microsoft.com/office/drawing/2014/main" id="{567C638D-B468-4B0B-DA78-6A9DD67C5F98}"/>
-              </a:ext>
-            </a:extLst>
-          </p:cNvPr>
-          <p:cNvSpPr txBox="1">
-            <a:spLocks/>
-          </p:cNvSpPr>
-          <p:nvPr/>
-        </p:nvSpPr>
-        <p:spPr>
-          <a:xfrm>
-            <a:off x="609600" y="4776880"/>
-            <a:ext cx="4972684" cy="553998"/>
-          </a:xfrm>
-          <a:prstGeom prst="rect">
-            <a:avLst/>
-          </a:prstGeom>
-        </p:spPr>
-        <p:txBody>
-          <a:bodyPr vert="horz" wrap="square" lIns="0" tIns="213360" rIns="0" bIns="0" rtlCol="0">
-            <a:spAutoFit/>
-          </a:bodyPr>
-          <a:lstStyle>
-            <a:lvl1pPr marL="0">
-              <a:defRPr>
-                <a:latin typeface="+mn-lt"/>
-                <a:ea typeface="+mn-ea"/>
-                <a:cs typeface="+mn-cs"/>
-              </a:defRPr>
-            </a:lvl1pPr>
-            <a:lvl2pPr marL="457200">
-              <a:defRPr>
-                <a:latin typeface="+mn-lt"/>
-                <a:ea typeface="+mn-ea"/>
-                <a:cs typeface="+mn-cs"/>
-              </a:defRPr>
-            </a:lvl2pPr>
-            <a:lvl3pPr marL="914400">
-              <a:defRPr>
-                <a:latin typeface="+mn-lt"/>
-                <a:ea typeface="+mn-ea"/>
-                <a:cs typeface="+mn-cs"/>
-              </a:defRPr>
-            </a:lvl3pPr>
-            <a:lvl4pPr marL="1371600">
-              <a:defRPr>
-                <a:latin typeface="+mn-lt"/>
-                <a:ea typeface="+mn-ea"/>
-                <a:cs typeface="+mn-cs"/>
-              </a:defRPr>
-            </a:lvl4pPr>
-            <a:lvl5pPr marL="1828800">
-              <a:defRPr>
-                <a:latin typeface="+mn-lt"/>
-                <a:ea typeface="+mn-ea"/>
-                <a:cs typeface="+mn-cs"/>
-              </a:defRPr>
-            </a:lvl5pPr>
-            <a:lvl6pPr marL="2286000">
-              <a:defRPr>
-                <a:latin typeface="+mn-lt"/>
-                <a:ea typeface="+mn-ea"/>
-                <a:cs typeface="+mn-cs"/>
-              </a:defRPr>
-            </a:lvl6pPr>
-            <a:lvl7pPr marL="2743200">
-              <a:defRPr>
-                <a:latin typeface="+mn-lt"/>
-                <a:ea typeface="+mn-ea"/>
-                <a:cs typeface="+mn-cs"/>
-              </a:defRPr>
-            </a:lvl7pPr>
-            <a:lvl8pPr marL="3200400">
-              <a:defRPr>
-                <a:latin typeface="+mn-lt"/>
-                <a:ea typeface="+mn-ea"/>
-                <a:cs typeface="+mn-cs"/>
-              </a:defRPr>
-            </a:lvl8pPr>
-            <a:lvl9pPr marL="3657600">
-              <a:defRPr>
-                <a:latin typeface="+mn-lt"/>
-                <a:ea typeface="+mn-ea"/>
-                <a:cs typeface="+mn-cs"/>
-              </a:defRPr>
-            </a:lvl9pPr>
-          </a:lstStyle>
           <a:p>
             <a:pPr marL="12700">
               <a:spcBef>
@@ -4863,16 +5812,12 @@
               </a:spcBef>
             </a:pPr>
             <a:r>
-              <a:rPr lang="en-CA" sz="2200" dirty="0" err="1">
+              <a:rPr lang="en-CA" dirty="0">
                 <a:latin typeface="Helvetica" pitchFamily="2" charset="0"/>
                 <a:cs typeface="Calibri"/>
               </a:rPr>
-              <a:t>fghghg</a:t>
+              <a:t>Similar to ticket counts, the highest fine amounts are generated during weekday business and early evening hours</a:t>
             </a:r>
-            <a:endParaRPr lang="en-CA" sz="2200" dirty="0">
-              <a:latin typeface="Helvetica" pitchFamily="2" charset="0"/>
-              <a:cs typeface="Calibri"/>
-            </a:endParaRPr>
           </a:p>
         </p:txBody>
       </p:sp>
@@ -4949,7 +5894,7 @@
                 </a:solidFill>
                 <a:latin typeface="Helvetica" pitchFamily="2" charset="0"/>
               </a:rPr>
-              <a:t>Infractions</a:t>
+              <a:t>Key Infractions</a:t>
             </a:r>
             <a:endParaRPr spc="-45" dirty="0">
               <a:solidFill>
@@ -4972,8 +5917,8 @@
         </p:nvSpPr>
         <p:spPr>
           <a:xfrm>
-            <a:off x="6705600" y="5105400"/>
-            <a:ext cx="4972684" cy="553998"/>
+            <a:off x="6125110" y="4519492"/>
+            <a:ext cx="5609690" cy="1323439"/>
           </a:xfrm>
           <a:prstGeom prst="rect">
             <a:avLst/>
@@ -4994,16 +5939,15 @@
               </a:spcBef>
             </a:pPr>
             <a:r>
-              <a:rPr lang="en-US" sz="2200" b="0" dirty="0" err="1">
+              <a:rPr lang="en-US" sz="1800" b="0" dirty="0">
+                <a:solidFill>
+                  <a:schemeClr val="tx1"/>
+                </a:solidFill>
                 <a:latin typeface="Helvetica" pitchFamily="2" charset="0"/>
                 <a:cs typeface="Calibri"/>
               </a:rPr>
-              <a:t>dfgfdgdfgf</a:t>
+              <a:t>Identifies infractions that generate the higher ticket amounts, often overlapping with high-count infractions, but also potentially revealing less frequent but higher-value violations.</a:t>
             </a:r>
-            <a:endParaRPr sz="2200" b="0" dirty="0">
-              <a:latin typeface="Helvetica" pitchFamily="2" charset="0"/>
-              <a:cs typeface="Calibri"/>
-            </a:endParaRPr>
           </a:p>
         </p:txBody>
       </p:sp>
@@ -5029,8 +5973,8 @@
         </p:blipFill>
         <p:spPr>
           <a:xfrm>
-            <a:off x="381000" y="1846472"/>
-            <a:ext cx="5806321" cy="2573128"/>
+            <a:off x="228600" y="1809964"/>
+            <a:ext cx="5469853" cy="2533436"/>
           </a:xfrm>
           <a:prstGeom prst="rect">
             <a:avLst/>
@@ -5059,8 +6003,8 @@
         </p:blipFill>
         <p:spPr>
           <a:xfrm>
-            <a:off x="5791200" y="1809964"/>
-            <a:ext cx="6400800" cy="2762036"/>
+            <a:off x="6096000" y="1809964"/>
+            <a:ext cx="6096000" cy="2692405"/>
           </a:xfrm>
           <a:prstGeom prst="rect">
             <a:avLst/>
@@ -5083,8 +6027,8 @@
         </p:nvSpPr>
         <p:spPr>
           <a:xfrm>
-            <a:off x="369870" y="5102831"/>
-            <a:ext cx="4972684" cy="553998"/>
+            <a:off x="304800" y="4502369"/>
+            <a:ext cx="4972684" cy="1046440"/>
           </a:xfrm>
           <a:prstGeom prst="rect">
             <a:avLst/>
@@ -5169,16 +6113,15 @@
               </a:spcBef>
             </a:pPr>
             <a:r>
-              <a:rPr lang="en-US" sz="2200" b="0">
+              <a:rPr lang="en-US" sz="1800" b="0" dirty="0">
+                <a:solidFill>
+                  <a:schemeClr val="tx1"/>
+                </a:solidFill>
                 <a:latin typeface="Helvetica" pitchFamily="2" charset="0"/>
                 <a:cs typeface="Calibri"/>
               </a:rPr>
-              <a:t>dfgfdgdfgf</a:t>
+              <a:t>Identifies the most frequently occurring infractions, highlighting common areas of non-compliance</a:t>
             </a:r>
-            <a:endParaRPr lang="en-US" sz="2200" b="0" dirty="0">
-              <a:latin typeface="Helvetica" pitchFamily="2" charset="0"/>
-              <a:cs typeface="Calibri"/>
-            </a:endParaRPr>
           </a:p>
         </p:txBody>
       </p:sp>
@@ -5220,7 +6163,7 @@
         <p:spPr>
           <a:xfrm>
             <a:off x="918527" y="631158"/>
-            <a:ext cx="7130415" cy="696595"/>
+            <a:ext cx="10816273" cy="690574"/>
           </a:xfrm>
           <a:prstGeom prst="rect">
             <a:avLst/>
@@ -5244,66 +6187,19 @@
               </a:tabLst>
             </a:pPr>
             <a:r>
-              <a:rPr lang="en-US" dirty="0">
+              <a:rPr lang="en-US" spc="-45" dirty="0">
                 <a:solidFill>
                   <a:srgbClr val="226092"/>
                 </a:solidFill>
                 <a:latin typeface="Helvetica" pitchFamily="2" charset="0"/>
               </a:rPr>
-              <a:t>Location</a:t>
+              <a:t>Geographical Hotspots – Province/States</a:t>
             </a:r>
             <a:endParaRPr spc="-45" dirty="0">
               <a:solidFill>
                 <a:srgbClr val="226092"/>
               </a:solidFill>
               <a:latin typeface="Helvetica" pitchFamily="2" charset="0"/>
-            </a:endParaRPr>
-          </a:p>
-        </p:txBody>
-      </p:sp>
-      <p:sp>
-        <p:nvSpPr>
-          <p:cNvPr id="6" name="object 6"/>
-          <p:cNvSpPr txBox="1">
-            <a:spLocks noGrp="1"/>
-          </p:cNvSpPr>
-          <p:nvPr>
-            <p:ph sz="half" idx="3"/>
-          </p:nvPr>
-        </p:nvSpPr>
-        <p:spPr>
-          <a:xfrm>
-            <a:off x="6705600" y="5189035"/>
-            <a:ext cx="4972684" cy="553998"/>
-          </a:xfrm>
-          <a:prstGeom prst="rect">
-            <a:avLst/>
-          </a:prstGeom>
-        </p:spPr>
-        <p:txBody>
-          <a:bodyPr vert="horz" wrap="square" lIns="0" tIns="213360" rIns="0" bIns="0" rtlCol="0">
-            <a:spAutoFit/>
-          </a:bodyPr>
-          <a:lstStyle/>
-          <a:p>
-            <a:pPr marL="12700">
-              <a:lnSpc>
-                <a:spcPct val="100000"/>
-              </a:lnSpc>
-              <a:spcBef>
-                <a:spcPts val="1680"/>
-              </a:spcBef>
-            </a:pPr>
-            <a:r>
-              <a:rPr lang="en-US" sz="2200" dirty="0" err="1">
-                <a:latin typeface="Helvetica" pitchFamily="2" charset="0"/>
-                <a:cs typeface="Calibri"/>
-              </a:rPr>
-              <a:t>dfd</a:t>
-            </a:r>
-            <a:endParaRPr sz="2200" dirty="0">
-              <a:latin typeface="Helvetica" pitchFamily="2" charset="0"/>
-              <a:cs typeface="Calibri"/>
             </a:endParaRPr>
           </a:p>
         </p:txBody>
@@ -5384,8 +6280,8 @@
         </p:nvSpPr>
         <p:spPr>
           <a:xfrm>
-            <a:off x="685800" y="5177048"/>
-            <a:ext cx="4972684" cy="553998"/>
+            <a:off x="835920" y="4953000"/>
+            <a:ext cx="7213022" cy="492443"/>
           </a:xfrm>
           <a:prstGeom prst="rect">
             <a:avLst/>
@@ -5470,16 +6366,15 @@
               </a:spcBef>
             </a:pPr>
             <a:r>
-              <a:rPr lang="en-US" sz="2200">
+              <a:rPr lang="en-US" sz="1800" b="0" dirty="0">
+                <a:solidFill>
+                  <a:schemeClr val="tx1"/>
+                </a:solidFill>
                 <a:latin typeface="Helvetica" pitchFamily="2" charset="0"/>
                 <a:cs typeface="Calibri"/>
               </a:rPr>
-              <a:t>dfd</a:t>
+              <a:t>For both ticket amount and count, Ontario was the leading source</a:t>
             </a:r>
-            <a:endParaRPr lang="en-US" sz="2200" dirty="0">
-              <a:latin typeface="Helvetica" pitchFamily="2" charset="0"/>
-              <a:cs typeface="Calibri"/>
-            </a:endParaRPr>
           </a:p>
         </p:txBody>
       </p:sp>
@@ -5526,7 +6421,7 @@
         <p:spPr>
           <a:xfrm>
             <a:off x="918527" y="631158"/>
-            <a:ext cx="7130415" cy="696595"/>
+            <a:ext cx="8835073" cy="690574"/>
           </a:xfrm>
           <a:prstGeom prst="rect">
             <a:avLst/>
@@ -5556,60 +6451,13 @@
                 </a:solidFill>
                 <a:latin typeface="Helvetica" pitchFamily="2" charset="0"/>
               </a:rPr>
-              <a:t>Location</a:t>
+              <a:t>Geographical Hotspot - Streets</a:t>
             </a:r>
             <a:endParaRPr spc="-45" dirty="0">
               <a:solidFill>
                 <a:srgbClr val="226092"/>
               </a:solidFill>
               <a:latin typeface="Helvetica" pitchFamily="2" charset="0"/>
-            </a:endParaRPr>
-          </a:p>
-        </p:txBody>
-      </p:sp>
-      <p:sp>
-        <p:nvSpPr>
-          <p:cNvPr id="6" name="object 6"/>
-          <p:cNvSpPr txBox="1">
-            <a:spLocks noGrp="1"/>
-          </p:cNvSpPr>
-          <p:nvPr>
-            <p:ph sz="half" idx="3"/>
-          </p:nvPr>
-        </p:nvSpPr>
-        <p:spPr>
-          <a:xfrm>
-            <a:off x="6705600" y="5189035"/>
-            <a:ext cx="4972684" cy="553998"/>
-          </a:xfrm>
-          <a:prstGeom prst="rect">
-            <a:avLst/>
-          </a:prstGeom>
-        </p:spPr>
-        <p:txBody>
-          <a:bodyPr vert="horz" wrap="square" lIns="0" tIns="213360" rIns="0" bIns="0" rtlCol="0">
-            <a:spAutoFit/>
-          </a:bodyPr>
-          <a:lstStyle/>
-          <a:p>
-            <a:pPr marL="12700">
-              <a:lnSpc>
-                <a:spcPct val="100000"/>
-              </a:lnSpc>
-              <a:spcBef>
-                <a:spcPts val="1680"/>
-              </a:spcBef>
-            </a:pPr>
-            <a:r>
-              <a:rPr lang="en-US" sz="2200" dirty="0" err="1">
-                <a:latin typeface="Helvetica" pitchFamily="2" charset="0"/>
-                <a:cs typeface="Calibri"/>
-              </a:rPr>
-              <a:t>dfd</a:t>
-            </a:r>
-            <a:endParaRPr sz="2200" dirty="0">
-              <a:latin typeface="Helvetica" pitchFamily="2" charset="0"/>
-              <a:cs typeface="Calibri"/>
             </a:endParaRPr>
           </a:p>
         </p:txBody>
@@ -5630,8 +6478,8 @@
         </p:nvSpPr>
         <p:spPr>
           <a:xfrm>
-            <a:off x="685800" y="5177048"/>
-            <a:ext cx="4972684" cy="553998"/>
+            <a:off x="609600" y="4566715"/>
+            <a:ext cx="11049000" cy="769441"/>
           </a:xfrm>
           <a:prstGeom prst="rect">
             <a:avLst/>
@@ -5716,16 +6564,15 @@
               </a:spcBef>
             </a:pPr>
             <a:r>
-              <a:rPr lang="en-US" sz="2200">
+              <a:rPr lang="en-US" sz="1800" b="0" dirty="0">
+                <a:solidFill>
+                  <a:schemeClr val="tx1"/>
+                </a:solidFill>
                 <a:latin typeface="Helvetica" pitchFamily="2" charset="0"/>
                 <a:cs typeface="Calibri"/>
               </a:rPr>
-              <a:t>dfd</a:t>
+              <a:t>The charts pinpoint specific streets that are major geographical hotspots for both high volumes of tickets and ticket amounts</a:t>
             </a:r>
-            <a:endParaRPr lang="en-US" sz="2200" dirty="0">
-              <a:latin typeface="Helvetica" pitchFamily="2" charset="0"/>
-              <a:cs typeface="Calibri"/>
-            </a:endParaRPr>
           </a:p>
         </p:txBody>
       </p:sp>
@@ -5874,7 +6721,7 @@
                 </a:solidFill>
                 <a:latin typeface="Helvetica" pitchFamily="2" charset="0"/>
               </a:rPr>
-              <a:t>Ticket Amount Forecasting</a:t>
+              <a:t>2021 Ticket Amount Forecasting</a:t>
             </a:r>
             <a:endParaRPr spc="-45" dirty="0">
               <a:solidFill>
@@ -5897,8 +6744,8 @@
         </p:nvSpPr>
         <p:spPr>
           <a:xfrm>
-            <a:off x="380999" y="5106868"/>
-            <a:ext cx="4972684" cy="553998"/>
+            <a:off x="380998" y="5106868"/>
+            <a:ext cx="11201401" cy="769441"/>
           </a:xfrm>
           <a:prstGeom prst="rect">
             <a:avLst/>
@@ -5919,13 +6766,19 @@
               </a:spcBef>
             </a:pPr>
             <a:r>
-              <a:rPr lang="en-US" sz="2200" dirty="0" err="1">
+              <a:rPr lang="en-US" sz="1800" b="0" dirty="0">
+                <a:solidFill>
+                  <a:schemeClr val="tx1"/>
+                </a:solidFill>
                 <a:latin typeface="Helvetica" pitchFamily="2" charset="0"/>
                 <a:cs typeface="Calibri"/>
               </a:rPr>
-              <a:t>dgdfgf</a:t>
+              <a:t>The forecast (based on pre-2020 trends) provides a 'normal’ ticket amount projection. The significant gap between this forecast and actual 2020 revenue quantifies the financial impact of the pandemic.</a:t>
             </a:r>
-            <a:endParaRPr sz="2200" dirty="0">
+            <a:endParaRPr sz="1800" b="0" dirty="0">
+              <a:solidFill>
+                <a:schemeClr val="tx1"/>
+              </a:solidFill>
               <a:latin typeface="Helvetica" pitchFamily="2" charset="0"/>
               <a:cs typeface="Calibri"/>
             </a:endParaRPr>
@@ -5992,121 +6845,45 @@
           </a:prstGeom>
         </p:spPr>
       </p:pic>
-      <p:sp>
-        <p:nvSpPr>
-          <p:cNvPr id="5" name="object 6">
+      <p:cxnSp>
+        <p:nvCxnSpPr>
+          <p:cNvPr id="8" name="Straight Arrow Connector 7">
             <a:extLst>
               <a:ext uri="{FF2B5EF4-FFF2-40B4-BE49-F238E27FC236}">
-                <a16:creationId xmlns:a16="http://schemas.microsoft.com/office/drawing/2014/main" id="{A4E42384-A878-31E3-D8B1-917AD5DCF10E}"/>
+                <a16:creationId xmlns:a16="http://schemas.microsoft.com/office/drawing/2014/main" id="{5EC8717A-DA27-BD6D-63D8-FCAE73D5E85D}"/>
               </a:ext>
             </a:extLst>
           </p:cNvPr>
-          <p:cNvSpPr txBox="1">
-            <a:spLocks/>
-          </p:cNvSpPr>
+          <p:cNvCxnSpPr/>
           <p:nvPr/>
-        </p:nvSpPr>
+        </p:nvCxnSpPr>
         <p:spPr>
-          <a:xfrm>
-            <a:off x="6976585" y="5046323"/>
-            <a:ext cx="4972684" cy="553998"/>
+          <a:xfrm flipV="1">
+            <a:off x="5867400" y="3200400"/>
+            <a:ext cx="1752600" cy="381000"/>
           </a:xfrm>
-          <a:prstGeom prst="rect">
+          <a:prstGeom prst="straightConnector1">
             <a:avLst/>
           </a:prstGeom>
+          <a:ln>
+            <a:tailEnd type="triangle"/>
+          </a:ln>
         </p:spPr>
-        <p:txBody>
-          <a:bodyPr vert="horz" wrap="square" lIns="0" tIns="213360" rIns="0" bIns="0" rtlCol="0">
-            <a:spAutoFit/>
-          </a:bodyPr>
-          <a:lstStyle>
-            <a:lvl1pPr marL="0">
-              <a:defRPr sz="2400" b="1" i="0">
-                <a:solidFill>
-                  <a:srgbClr val="226092"/>
-                </a:solidFill>
-                <a:latin typeface="Arial"/>
-                <a:ea typeface="+mn-ea"/>
-                <a:cs typeface="Arial"/>
-              </a:defRPr>
-            </a:lvl1pPr>
-            <a:lvl2pPr marL="457200">
-              <a:defRPr>
-                <a:latin typeface="+mn-lt"/>
-                <a:ea typeface="+mn-ea"/>
-                <a:cs typeface="+mn-cs"/>
-              </a:defRPr>
-            </a:lvl2pPr>
-            <a:lvl3pPr marL="914400">
-              <a:defRPr>
-                <a:latin typeface="+mn-lt"/>
-                <a:ea typeface="+mn-ea"/>
-                <a:cs typeface="+mn-cs"/>
-              </a:defRPr>
-            </a:lvl3pPr>
-            <a:lvl4pPr marL="1371600">
-              <a:defRPr>
-                <a:latin typeface="+mn-lt"/>
-                <a:ea typeface="+mn-ea"/>
-                <a:cs typeface="+mn-cs"/>
-              </a:defRPr>
-            </a:lvl4pPr>
-            <a:lvl5pPr marL="1828800">
-              <a:defRPr>
-                <a:latin typeface="+mn-lt"/>
-                <a:ea typeface="+mn-ea"/>
-                <a:cs typeface="+mn-cs"/>
-              </a:defRPr>
-            </a:lvl5pPr>
-            <a:lvl6pPr marL="2286000">
-              <a:defRPr>
-                <a:latin typeface="+mn-lt"/>
-                <a:ea typeface="+mn-ea"/>
-                <a:cs typeface="+mn-cs"/>
-              </a:defRPr>
-            </a:lvl6pPr>
-            <a:lvl7pPr marL="2743200">
-              <a:defRPr>
-                <a:latin typeface="+mn-lt"/>
-                <a:ea typeface="+mn-ea"/>
-                <a:cs typeface="+mn-cs"/>
-              </a:defRPr>
-            </a:lvl7pPr>
-            <a:lvl8pPr marL="3200400">
-              <a:defRPr>
-                <a:latin typeface="+mn-lt"/>
-                <a:ea typeface="+mn-ea"/>
-                <a:cs typeface="+mn-cs"/>
-              </a:defRPr>
-            </a:lvl8pPr>
-            <a:lvl9pPr marL="3657600">
-              <a:defRPr>
-                <a:latin typeface="+mn-lt"/>
-                <a:ea typeface="+mn-ea"/>
-                <a:cs typeface="+mn-cs"/>
-              </a:defRPr>
-            </a:lvl9pPr>
-          </a:lstStyle>
-          <a:p>
-            <a:pPr marL="12700">
-              <a:spcBef>
-                <a:spcPts val="1680"/>
-              </a:spcBef>
-            </a:pPr>
-            <a:r>
-              <a:rPr lang="en-US" sz="2200">
-                <a:latin typeface="Helvetica" pitchFamily="2" charset="0"/>
-                <a:cs typeface="Calibri"/>
-              </a:rPr>
-              <a:t>dgdfgf</a:t>
-            </a:r>
-            <a:endParaRPr lang="en-US" sz="2200" dirty="0">
-              <a:latin typeface="Helvetica" pitchFamily="2" charset="0"/>
-              <a:cs typeface="Calibri"/>
-            </a:endParaRPr>
-          </a:p>
-        </p:txBody>
-      </p:sp>
+        <p:style>
+          <a:lnRef idx="1">
+            <a:schemeClr val="accent1"/>
+          </a:lnRef>
+          <a:fillRef idx="0">
+            <a:schemeClr val="accent1"/>
+          </a:fillRef>
+          <a:effectRef idx="0">
+            <a:schemeClr val="accent1"/>
+          </a:effectRef>
+          <a:fontRef idx="minor">
+            <a:schemeClr val="tx1"/>
+          </a:fontRef>
+        </p:style>
+      </p:cxnSp>
     </p:spTree>
     <p:extLst>
       <p:ext uri="{BB962C8B-B14F-4D97-AF65-F5344CB8AC3E}">
@@ -6198,7 +6975,7 @@
         </p:nvSpPr>
         <p:spPr>
           <a:xfrm>
-            <a:off x="1780352" y="1524248"/>
+            <a:off x="1969605" y="1447802"/>
             <a:ext cx="2647950" cy="338554"/>
           </a:xfrm>
           <a:prstGeom prst="rect">
@@ -6237,7 +7014,7 @@
         </p:nvSpPr>
         <p:spPr>
           <a:xfrm>
-            <a:off x="1780352" y="1814072"/>
+            <a:off x="1969605" y="1737626"/>
             <a:ext cx="2647950" cy="882421"/>
           </a:xfrm>
           <a:prstGeom prst="rect">
@@ -6281,7 +7058,7 @@
         </p:nvSpPr>
         <p:spPr>
           <a:xfrm>
-            <a:off x="5595220" y="1524248"/>
+            <a:off x="5784473" y="1447802"/>
             <a:ext cx="2672089" cy="584775"/>
           </a:xfrm>
           <a:prstGeom prst="rect">
@@ -6320,7 +7097,7 @@
         </p:nvSpPr>
         <p:spPr>
           <a:xfrm>
-            <a:off x="5619360" y="2083716"/>
+            <a:off x="5808613" y="2007270"/>
             <a:ext cx="2647950" cy="1151726"/>
           </a:xfrm>
           <a:prstGeom prst="rect">
@@ -6364,7 +7141,7 @@
         </p:nvSpPr>
         <p:spPr>
           <a:xfrm>
-            <a:off x="9407190" y="1524248"/>
+            <a:off x="9596443" y="1447802"/>
             <a:ext cx="2647950" cy="338554"/>
           </a:xfrm>
           <a:prstGeom prst="rect">
@@ -6403,7 +7180,7 @@
         </p:nvSpPr>
         <p:spPr>
           <a:xfrm>
-            <a:off x="9407190" y="1814072"/>
+            <a:off x="9596443" y="1737626"/>
             <a:ext cx="2647950" cy="1421030"/>
           </a:xfrm>
           <a:prstGeom prst="rect">
@@ -6435,89 +7212,6 @@
       </p:sp>
       <p:sp>
         <p:nvSpPr>
-          <p:cNvPr id="12" name="TextBox 11">
-            <a:extLst>
-              <a:ext uri="{FF2B5EF4-FFF2-40B4-BE49-F238E27FC236}">
-                <a16:creationId xmlns:a16="http://schemas.microsoft.com/office/drawing/2014/main" id="{5161C506-2A39-F846-3904-67754096C82C}"/>
-              </a:ext>
-            </a:extLst>
-          </p:cNvPr>
-          <p:cNvSpPr txBox="1"/>
-          <p:nvPr/>
-        </p:nvSpPr>
-        <p:spPr>
-          <a:xfrm>
-            <a:off x="1733649" y="3655363"/>
-            <a:ext cx="2784822" cy="584775"/>
-          </a:xfrm>
-          <a:prstGeom prst="rect">
-            <a:avLst/>
-          </a:prstGeom>
-          <a:noFill/>
-        </p:spPr>
-        <p:txBody>
-          <a:bodyPr wrap="square" rtlCol="0">
-            <a:spAutoFit/>
-          </a:bodyPr>
-          <a:lstStyle/>
-          <a:p>
-            <a:r>
-              <a:rPr lang="en-US" sz="1600" b="1" dirty="0">
-                <a:latin typeface="Helvetica" pitchFamily="2" charset="0"/>
-                <a:ea typeface="Arial" panose="020B0706030804020204" pitchFamily="34" charset="0"/>
-                <a:cs typeface="Arial" panose="020B0706030804020204" pitchFamily="34" charset="0"/>
-              </a:rPr>
-              <a:t>Address Out-of-Province Compliance</a:t>
-            </a:r>
-          </a:p>
-        </p:txBody>
-      </p:sp>
-      <p:sp>
-        <p:nvSpPr>
-          <p:cNvPr id="13" name="TextBox 12">
-            <a:extLst>
-              <a:ext uri="{FF2B5EF4-FFF2-40B4-BE49-F238E27FC236}">
-                <a16:creationId xmlns:a16="http://schemas.microsoft.com/office/drawing/2014/main" id="{2D44A48A-07E8-A73B-DAD5-EC50AE5C9F8E}"/>
-              </a:ext>
-            </a:extLst>
-          </p:cNvPr>
-          <p:cNvSpPr txBox="1"/>
-          <p:nvPr/>
-        </p:nvSpPr>
-        <p:spPr>
-          <a:xfrm>
-            <a:off x="1733649" y="4170819"/>
-            <a:ext cx="2647950" cy="882421"/>
-          </a:xfrm>
-          <a:prstGeom prst="rect">
-            <a:avLst/>
-          </a:prstGeom>
-          <a:noFill/>
-        </p:spPr>
-        <p:txBody>
-          <a:bodyPr wrap="square" rtlCol="0">
-            <a:spAutoFit/>
-          </a:bodyPr>
-          <a:lstStyle/>
-          <a:p>
-            <a:pPr>
-              <a:lnSpc>
-                <a:spcPct val="125000"/>
-              </a:lnSpc>
-            </a:pPr>
-            <a:r>
-              <a:rPr lang="en-US" sz="1400" dirty="0">
-                <a:latin typeface="Helvetica" pitchFamily="2" charset="0"/>
-                <a:ea typeface="Arial" panose="020B0706030804020204" pitchFamily="34" charset="0"/>
-                <a:cs typeface="Arial" panose="020B0706030804020204" pitchFamily="34" charset="0"/>
-              </a:rPr>
-              <a:t>Evaluate the effectiveness of current collection mechanisms for out-of-province infractions</a:t>
-            </a:r>
-          </a:p>
-        </p:txBody>
-      </p:sp>
-      <p:sp>
-        <p:nvSpPr>
           <p:cNvPr id="14" name="TextBox 13">
             <a:extLst>
               <a:ext uri="{FF2B5EF4-FFF2-40B4-BE49-F238E27FC236}">
@@ -6530,7 +7224,7 @@
         </p:nvSpPr>
         <p:spPr>
           <a:xfrm>
-            <a:off x="5548518" y="3655363"/>
+            <a:off x="3448050" y="3699005"/>
             <a:ext cx="2647950" cy="584775"/>
           </a:xfrm>
           <a:prstGeom prst="rect">
@@ -6569,7 +7263,7 @@
         </p:nvSpPr>
         <p:spPr>
           <a:xfrm>
-            <a:off x="5548518" y="4171929"/>
+            <a:off x="3448050" y="4215571"/>
             <a:ext cx="2647950" cy="882421"/>
           </a:xfrm>
           <a:prstGeom prst="rect">
@@ -6613,7 +7307,7 @@
         </p:nvSpPr>
         <p:spPr>
           <a:xfrm>
-            <a:off x="9360487" y="3655363"/>
+            <a:off x="7260019" y="3699005"/>
             <a:ext cx="2647950" cy="338554"/>
           </a:xfrm>
           <a:prstGeom prst="rect">
@@ -6652,7 +7346,7 @@
         </p:nvSpPr>
         <p:spPr>
           <a:xfrm>
-            <a:off x="9360487" y="3945187"/>
+            <a:off x="7260019" y="3988829"/>
             <a:ext cx="2647950" cy="1151726"/>
           </a:xfrm>
           <a:prstGeom prst="rect">
@@ -6698,7 +7392,7 @@
         </p:nvGrpSpPr>
         <p:grpSpPr>
           <a:xfrm>
-            <a:off x="4691834" y="1588962"/>
+            <a:off x="4881087" y="1512516"/>
             <a:ext cx="752469" cy="752469"/>
             <a:chOff x="4443224" y="1662093"/>
             <a:chExt cx="1118711" cy="1118711"/>
@@ -7519,7 +8213,7 @@
         </p:nvGrpSpPr>
         <p:grpSpPr>
           <a:xfrm>
-            <a:off x="8457009" y="3655363"/>
+            <a:off x="6356541" y="3699005"/>
             <a:ext cx="769506" cy="769506"/>
             <a:chOff x="7264129" y="1598241"/>
             <a:chExt cx="1144040" cy="1144040"/>
@@ -8647,7 +9341,7 @@
         </p:nvGrpSpPr>
         <p:grpSpPr>
           <a:xfrm>
-            <a:off x="8534768" y="1561338"/>
+            <a:off x="8724021" y="1484892"/>
             <a:ext cx="780094" cy="780094"/>
             <a:chOff x="1579656" y="4745176"/>
             <a:chExt cx="947338" cy="947338"/>
@@ -9349,7 +10043,7 @@
         </p:nvGrpSpPr>
         <p:grpSpPr>
           <a:xfrm>
-            <a:off x="4606961" y="3737516"/>
+            <a:off x="2506493" y="3781158"/>
             <a:ext cx="752469" cy="752469"/>
             <a:chOff x="6301014" y="4510563"/>
             <a:chExt cx="1034380" cy="1034380"/>
@@ -10082,7 +10776,7 @@
         </p:nvGrpSpPr>
         <p:grpSpPr>
           <a:xfrm>
-            <a:off x="743946" y="1524246"/>
+            <a:off x="933199" y="1447800"/>
             <a:ext cx="817183" cy="817183"/>
             <a:chOff x="633737" y="3087805"/>
             <a:chExt cx="1116625" cy="1116625"/>
@@ -11710,663 +12404,6 @@
             <a:ln>
               <a:noFill/>
             </a:ln>
-          </p:spPr>
-          <p:txBody>
-            <a:bodyPr vert="horz" wrap="square" lIns="91440" tIns="45720" rIns="91440" bIns="45720" numCol="1" anchor="t" anchorCtr="0" compatLnSpc="1">
-              <a:prstTxWarp prst="textNoShape">
-                <a:avLst/>
-              </a:prstTxWarp>
-            </a:bodyPr>
-            <a:lstStyle/>
-            <a:p>
-              <a:endParaRPr lang="en-US"/>
-            </a:p>
-          </p:txBody>
-        </p:sp>
-      </p:grpSp>
-      <p:grpSp>
-        <p:nvGrpSpPr>
-          <p:cNvPr id="62" name="Group 61">
-            <a:extLst>
-              <a:ext uri="{FF2B5EF4-FFF2-40B4-BE49-F238E27FC236}">
-                <a16:creationId xmlns:a16="http://schemas.microsoft.com/office/drawing/2014/main" id="{E87741E1-1A69-CD81-44D3-220861495EC9}"/>
-              </a:ext>
-            </a:extLst>
-          </p:cNvPr>
-          <p:cNvGrpSpPr>
-            <a:grpSpLocks noChangeAspect="1"/>
-          </p:cNvGrpSpPr>
-          <p:nvPr/>
-        </p:nvGrpSpPr>
-        <p:grpSpPr>
-          <a:xfrm>
-            <a:off x="703589" y="3714406"/>
-            <a:ext cx="789597" cy="789597"/>
-            <a:chOff x="4172868" y="2949635"/>
-            <a:chExt cx="1093745" cy="1093745"/>
-          </a:xfrm>
-        </p:grpSpPr>
-        <p:sp>
-          <p:nvSpPr>
-            <p:cNvPr id="63" name="Rectangle 62">
-              <a:extLst>
-                <a:ext uri="{FF2B5EF4-FFF2-40B4-BE49-F238E27FC236}">
-                  <a16:creationId xmlns:a16="http://schemas.microsoft.com/office/drawing/2014/main" id="{D492E01F-8512-7164-B3A4-7D83DCC3B344}"/>
-                </a:ext>
-              </a:extLst>
-            </p:cNvPr>
-            <p:cNvSpPr>
-              <a:spLocks noChangeAspect="1"/>
-            </p:cNvSpPr>
-            <p:nvPr/>
-          </p:nvSpPr>
-          <p:spPr>
-            <a:xfrm>
-              <a:off x="4172868" y="2949635"/>
-              <a:ext cx="1093745" cy="1093745"/>
-            </a:xfrm>
-            <a:prstGeom prst="rect">
-              <a:avLst/>
-            </a:prstGeom>
-            <a:ln>
-              <a:noFill/>
-            </a:ln>
-          </p:spPr>
-          <p:style>
-            <a:lnRef idx="2">
-              <a:schemeClr val="accent1">
-                <a:shade val="50000"/>
-              </a:schemeClr>
-            </a:lnRef>
-            <a:fillRef idx="1">
-              <a:schemeClr val="accent1"/>
-            </a:fillRef>
-            <a:effectRef idx="0">
-              <a:schemeClr val="accent1"/>
-            </a:effectRef>
-            <a:fontRef idx="minor">
-              <a:schemeClr val="lt1"/>
-            </a:fontRef>
-          </p:style>
-          <p:txBody>
-            <a:bodyPr rtlCol="0" anchor="ctr"/>
-            <a:lstStyle/>
-            <a:p>
-              <a:pPr algn="ctr"/>
-              <a:endParaRPr lang="en-US"/>
-            </a:p>
-          </p:txBody>
-        </p:sp>
-        <p:sp>
-          <p:nvSpPr>
-            <p:cNvPr id="64" name="Freeform 15">
-              <a:extLst>
-                <a:ext uri="{FF2B5EF4-FFF2-40B4-BE49-F238E27FC236}">
-                  <a16:creationId xmlns:a16="http://schemas.microsoft.com/office/drawing/2014/main" id="{F143B010-BCD5-EB44-A879-50A9424A472B}"/>
-                </a:ext>
-              </a:extLst>
-            </p:cNvPr>
-            <p:cNvSpPr>
-              <a:spLocks noChangeAspect="1" noEditPoints="1"/>
-            </p:cNvSpPr>
-            <p:nvPr/>
-          </p:nvSpPr>
-          <p:spPr bwMode="auto">
-            <a:xfrm>
-              <a:off x="4446470" y="3136053"/>
-              <a:ext cx="401315" cy="574502"/>
-            </a:xfrm>
-            <a:custGeom>
-              <a:avLst/>
-              <a:gdLst>
-                <a:gd name="T0" fmla="*/ 168 w 252"/>
-                <a:gd name="T1" fmla="*/ 133 h 361"/>
-                <a:gd name="T2" fmla="*/ 80 w 252"/>
-                <a:gd name="T3" fmla="*/ 134 h 361"/>
-                <a:gd name="T4" fmla="*/ 126 w 252"/>
-                <a:gd name="T5" fmla="*/ 361 h 361"/>
-                <a:gd name="T6" fmla="*/ 172 w 252"/>
-                <a:gd name="T7" fmla="*/ 134 h 361"/>
-                <a:gd name="T8" fmla="*/ 12 w 252"/>
-                <a:gd name="T9" fmla="*/ 265 h 361"/>
-                <a:gd name="T10" fmla="*/ 166 w 252"/>
-                <a:gd name="T11" fmla="*/ 145 h 361"/>
-                <a:gd name="T12" fmla="*/ 126 w 252"/>
-                <a:gd name="T13" fmla="*/ 349 h 361"/>
-                <a:gd name="T14" fmla="*/ 78 w 252"/>
-                <a:gd name="T15" fmla="*/ 115 h 361"/>
-                <a:gd name="T16" fmla="*/ 168 w 252"/>
-                <a:gd name="T17" fmla="*/ 121 h 361"/>
-                <a:gd name="T18" fmla="*/ 168 w 252"/>
-                <a:gd name="T19" fmla="*/ 109 h 361"/>
-                <a:gd name="T20" fmla="*/ 84 w 252"/>
-                <a:gd name="T21" fmla="*/ 91 h 361"/>
-                <a:gd name="T22" fmla="*/ 162 w 252"/>
-                <a:gd name="T23" fmla="*/ 97 h 361"/>
-                <a:gd name="T24" fmla="*/ 197 w 252"/>
-                <a:gd name="T25" fmla="*/ 28 h 361"/>
-                <a:gd name="T26" fmla="*/ 190 w 252"/>
-                <a:gd name="T27" fmla="*/ 19 h 361"/>
-                <a:gd name="T28" fmla="*/ 131 w 252"/>
-                <a:gd name="T29" fmla="*/ 4 h 361"/>
-                <a:gd name="T30" fmla="*/ 105 w 252"/>
-                <a:gd name="T31" fmla="*/ 35 h 361"/>
-                <a:gd name="T32" fmla="*/ 55 w 252"/>
-                <a:gd name="T33" fmla="*/ 21 h 361"/>
-                <a:gd name="T34" fmla="*/ 84 w 252"/>
-                <a:gd name="T35" fmla="*/ 91 h 361"/>
-                <a:gd name="T36" fmla="*/ 113 w 252"/>
-                <a:gd name="T37" fmla="*/ 45 h 361"/>
-                <a:gd name="T38" fmla="*/ 139 w 252"/>
-                <a:gd name="T39" fmla="*/ 45 h 361"/>
-                <a:gd name="T40" fmla="*/ 176 w 252"/>
-                <a:gd name="T41" fmla="*/ 37 h 361"/>
-                <a:gd name="T42" fmla="*/ 96 w 252"/>
-                <a:gd name="T43" fmla="*/ 85 h 361"/>
-                <a:gd name="T44" fmla="*/ 106 w 252"/>
-                <a:gd name="T45" fmla="*/ 48 h 361"/>
-                <a:gd name="T46" fmla="*/ 144 w 252"/>
-                <a:gd name="T47" fmla="*/ 229 h 361"/>
-                <a:gd name="T48" fmla="*/ 156 w 252"/>
-                <a:gd name="T49" fmla="*/ 229 h 361"/>
-                <a:gd name="T50" fmla="*/ 132 w 252"/>
-                <a:gd name="T51" fmla="*/ 193 h 361"/>
-                <a:gd name="T52" fmla="*/ 120 w 252"/>
-                <a:gd name="T53" fmla="*/ 193 h 361"/>
-                <a:gd name="T54" fmla="*/ 96 w 252"/>
-                <a:gd name="T55" fmla="*/ 229 h 361"/>
-                <a:gd name="T56" fmla="*/ 144 w 252"/>
-                <a:gd name="T57" fmla="*/ 277 h 361"/>
-                <a:gd name="T58" fmla="*/ 108 w 252"/>
-                <a:gd name="T59" fmla="*/ 277 h 361"/>
-                <a:gd name="T60" fmla="*/ 96 w 252"/>
-                <a:gd name="T61" fmla="*/ 277 h 361"/>
-                <a:gd name="T62" fmla="*/ 120 w 252"/>
-                <a:gd name="T63" fmla="*/ 313 h 361"/>
-                <a:gd name="T64" fmla="*/ 132 w 252"/>
-                <a:gd name="T65" fmla="*/ 313 h 361"/>
-                <a:gd name="T66" fmla="*/ 156 w 252"/>
-                <a:gd name="T67" fmla="*/ 277 h 361"/>
-                <a:gd name="T68" fmla="*/ 108 w 252"/>
-                <a:gd name="T69" fmla="*/ 229 h 361"/>
-              </a:gdLst>
-              <a:ahLst/>
-              <a:cxnLst>
-                <a:cxn ang="0">
-                  <a:pos x="T0" y="T1"/>
-                </a:cxn>
-                <a:cxn ang="0">
-                  <a:pos x="T2" y="T3"/>
-                </a:cxn>
-                <a:cxn ang="0">
-                  <a:pos x="T4" y="T5"/>
-                </a:cxn>
-                <a:cxn ang="0">
-                  <a:pos x="T6" y="T7"/>
-                </a:cxn>
-                <a:cxn ang="0">
-                  <a:pos x="T8" y="T9"/>
-                </a:cxn>
-                <a:cxn ang="0">
-                  <a:pos x="T10" y="T11"/>
-                </a:cxn>
-                <a:cxn ang="0">
-                  <a:pos x="T12" y="T13"/>
-                </a:cxn>
-                <a:cxn ang="0">
-                  <a:pos x="T14" y="T15"/>
-                </a:cxn>
-                <a:cxn ang="0">
-                  <a:pos x="T16" y="T17"/>
-                </a:cxn>
-                <a:cxn ang="0">
-                  <a:pos x="T18" y="T19"/>
-                </a:cxn>
-                <a:cxn ang="0">
-                  <a:pos x="T20" y="T21"/>
-                </a:cxn>
-                <a:cxn ang="0">
-                  <a:pos x="T22" y="T23"/>
-                </a:cxn>
-                <a:cxn ang="0">
-                  <a:pos x="T24" y="T25"/>
-                </a:cxn>
-                <a:cxn ang="0">
-                  <a:pos x="T26" y="T27"/>
-                </a:cxn>
-                <a:cxn ang="0">
-                  <a:pos x="T28" y="T29"/>
-                </a:cxn>
-                <a:cxn ang="0">
-                  <a:pos x="T30" y="T31"/>
-                </a:cxn>
-                <a:cxn ang="0">
-                  <a:pos x="T32" y="T33"/>
-                </a:cxn>
-                <a:cxn ang="0">
-                  <a:pos x="T34" y="T35"/>
-                </a:cxn>
-                <a:cxn ang="0">
-                  <a:pos x="T36" y="T37"/>
-                </a:cxn>
-                <a:cxn ang="0">
-                  <a:pos x="T38" y="T39"/>
-                </a:cxn>
-                <a:cxn ang="0">
-                  <a:pos x="T40" y="T41"/>
-                </a:cxn>
-                <a:cxn ang="0">
-                  <a:pos x="T42" y="T43"/>
-                </a:cxn>
-                <a:cxn ang="0">
-                  <a:pos x="T44" y="T45"/>
-                </a:cxn>
-                <a:cxn ang="0">
-                  <a:pos x="T46" y="T47"/>
-                </a:cxn>
-                <a:cxn ang="0">
-                  <a:pos x="T48" y="T49"/>
-                </a:cxn>
-                <a:cxn ang="0">
-                  <a:pos x="T50" y="T51"/>
-                </a:cxn>
-                <a:cxn ang="0">
-                  <a:pos x="T52" y="T53"/>
-                </a:cxn>
-                <a:cxn ang="0">
-                  <a:pos x="T54" y="T55"/>
-                </a:cxn>
-                <a:cxn ang="0">
-                  <a:pos x="T56" y="T57"/>
-                </a:cxn>
-                <a:cxn ang="0">
-                  <a:pos x="T58" y="T59"/>
-                </a:cxn>
-                <a:cxn ang="0">
-                  <a:pos x="T60" y="T61"/>
-                </a:cxn>
-                <a:cxn ang="0">
-                  <a:pos x="T62" y="T63"/>
-                </a:cxn>
-                <a:cxn ang="0">
-                  <a:pos x="T64" y="T65"/>
-                </a:cxn>
-                <a:cxn ang="0">
-                  <a:pos x="T66" y="T67"/>
-                </a:cxn>
-                <a:cxn ang="0">
-                  <a:pos x="T68" y="T69"/>
-                </a:cxn>
-              </a:cxnLst>
-              <a:rect l="0" t="0" r="r" b="b"/>
-              <a:pathLst>
-                <a:path w="252" h="361">
-                  <a:moveTo>
-                    <a:pt x="172" y="134"/>
-                  </a:moveTo>
-                  <a:cubicBezTo>
-                    <a:pt x="171" y="133"/>
-                    <a:pt x="169" y="133"/>
-                    <a:pt x="168" y="133"/>
-                  </a:cubicBezTo>
-                  <a:cubicBezTo>
-                    <a:pt x="84" y="133"/>
-                    <a:pt x="84" y="133"/>
-                    <a:pt x="84" y="133"/>
-                  </a:cubicBezTo>
-                  <a:cubicBezTo>
-                    <a:pt x="83" y="133"/>
-                    <a:pt x="81" y="133"/>
-                    <a:pt x="80" y="134"/>
-                  </a:cubicBezTo>
-                  <a:cubicBezTo>
-                    <a:pt x="48" y="157"/>
-                    <a:pt x="0" y="221"/>
-                    <a:pt x="0" y="265"/>
-                  </a:cubicBezTo>
-                  <a:cubicBezTo>
-                    <a:pt x="0" y="301"/>
-                    <a:pt x="16" y="361"/>
-                    <a:pt x="126" y="361"/>
-                  </a:cubicBezTo>
-                  <a:cubicBezTo>
-                    <a:pt x="236" y="361"/>
-                    <a:pt x="252" y="301"/>
-                    <a:pt x="252" y="265"/>
-                  </a:cubicBezTo>
-                  <a:cubicBezTo>
-                    <a:pt x="252" y="221"/>
-                    <a:pt x="204" y="157"/>
-                    <a:pt x="172" y="134"/>
-                  </a:cubicBezTo>
-                  <a:close/>
-                  <a:moveTo>
-                    <a:pt x="126" y="349"/>
-                  </a:moveTo>
-                  <a:cubicBezTo>
-                    <a:pt x="51" y="349"/>
-                    <a:pt x="12" y="320"/>
-                    <a:pt x="12" y="265"/>
-                  </a:cubicBezTo>
-                  <a:cubicBezTo>
-                    <a:pt x="12" y="229"/>
-                    <a:pt x="52" y="170"/>
-                    <a:pt x="86" y="145"/>
-                  </a:cubicBezTo>
-                  <a:cubicBezTo>
-                    <a:pt x="166" y="145"/>
-                    <a:pt x="166" y="145"/>
-                    <a:pt x="166" y="145"/>
-                  </a:cubicBezTo>
-                  <a:cubicBezTo>
-                    <a:pt x="200" y="170"/>
-                    <a:pt x="240" y="229"/>
-                    <a:pt x="240" y="265"/>
-                  </a:cubicBezTo>
-                  <a:cubicBezTo>
-                    <a:pt x="240" y="320"/>
-                    <a:pt x="201" y="349"/>
-                    <a:pt x="126" y="349"/>
-                  </a:cubicBezTo>
-                  <a:close/>
-                  <a:moveTo>
-                    <a:pt x="84" y="109"/>
-                  </a:moveTo>
-                  <a:cubicBezTo>
-                    <a:pt x="81" y="109"/>
-                    <a:pt x="78" y="111"/>
-                    <a:pt x="78" y="115"/>
-                  </a:cubicBezTo>
-                  <a:cubicBezTo>
-                    <a:pt x="78" y="118"/>
-                    <a:pt x="81" y="121"/>
-                    <a:pt x="84" y="121"/>
-                  </a:cubicBezTo>
-                  <a:cubicBezTo>
-                    <a:pt x="168" y="121"/>
-                    <a:pt x="168" y="121"/>
-                    <a:pt x="168" y="121"/>
-                  </a:cubicBezTo>
-                  <a:cubicBezTo>
-                    <a:pt x="171" y="121"/>
-                    <a:pt x="174" y="118"/>
-                    <a:pt x="174" y="115"/>
-                  </a:cubicBezTo>
-                  <a:cubicBezTo>
-                    <a:pt x="174" y="111"/>
-                    <a:pt x="171" y="109"/>
-                    <a:pt x="168" y="109"/>
-                  </a:cubicBezTo>
-                  <a:lnTo>
-                    <a:pt x="84" y="109"/>
-                  </a:lnTo>
-                  <a:close/>
-                  <a:moveTo>
-                    <a:pt x="84" y="91"/>
-                  </a:moveTo>
-                  <a:cubicBezTo>
-                    <a:pt x="84" y="94"/>
-                    <a:pt x="87" y="97"/>
-                    <a:pt x="90" y="97"/>
-                  </a:cubicBezTo>
-                  <a:cubicBezTo>
-                    <a:pt x="162" y="97"/>
-                    <a:pt x="162" y="97"/>
-                    <a:pt x="162" y="97"/>
-                  </a:cubicBezTo>
-                  <a:cubicBezTo>
-                    <a:pt x="165" y="97"/>
-                    <a:pt x="168" y="94"/>
-                    <a:pt x="168" y="91"/>
-                  </a:cubicBezTo>
-                  <a:cubicBezTo>
-                    <a:pt x="168" y="63"/>
-                    <a:pt x="196" y="29"/>
-                    <a:pt x="197" y="28"/>
-                  </a:cubicBezTo>
-                  <a:cubicBezTo>
-                    <a:pt x="198" y="26"/>
-                    <a:pt x="199" y="23"/>
-                    <a:pt x="197" y="21"/>
-                  </a:cubicBezTo>
-                  <a:cubicBezTo>
-                    <a:pt x="195" y="19"/>
-                    <a:pt x="193" y="18"/>
-                    <a:pt x="190" y="19"/>
-                  </a:cubicBezTo>
-                  <a:cubicBezTo>
-                    <a:pt x="147" y="35"/>
-                    <a:pt x="147" y="35"/>
-                    <a:pt x="147" y="35"/>
-                  </a:cubicBezTo>
-                  <a:cubicBezTo>
-                    <a:pt x="131" y="4"/>
-                    <a:pt x="131" y="4"/>
-                    <a:pt x="131" y="4"/>
-                  </a:cubicBezTo>
-                  <a:cubicBezTo>
-                    <a:pt x="129" y="0"/>
-                    <a:pt x="123" y="0"/>
-                    <a:pt x="121" y="4"/>
-                  </a:cubicBezTo>
-                  <a:cubicBezTo>
-                    <a:pt x="105" y="35"/>
-                    <a:pt x="105" y="35"/>
-                    <a:pt x="105" y="35"/>
-                  </a:cubicBezTo>
-                  <a:cubicBezTo>
-                    <a:pt x="62" y="19"/>
-                    <a:pt x="62" y="19"/>
-                    <a:pt x="62" y="19"/>
-                  </a:cubicBezTo>
-                  <a:cubicBezTo>
-                    <a:pt x="60" y="18"/>
-                    <a:pt x="57" y="19"/>
-                    <a:pt x="55" y="21"/>
-                  </a:cubicBezTo>
-                  <a:cubicBezTo>
-                    <a:pt x="53" y="23"/>
-                    <a:pt x="54" y="26"/>
-                    <a:pt x="55" y="28"/>
-                  </a:cubicBezTo>
-                  <a:cubicBezTo>
-                    <a:pt x="56" y="29"/>
-                    <a:pt x="84" y="63"/>
-                    <a:pt x="84" y="91"/>
-                  </a:cubicBezTo>
-                  <a:close/>
-                  <a:moveTo>
-                    <a:pt x="106" y="48"/>
-                  </a:moveTo>
-                  <a:cubicBezTo>
-                    <a:pt x="109" y="49"/>
-                    <a:pt x="112" y="48"/>
-                    <a:pt x="113" y="45"/>
-                  </a:cubicBezTo>
-                  <a:cubicBezTo>
-                    <a:pt x="126" y="20"/>
-                    <a:pt x="126" y="20"/>
-                    <a:pt x="126" y="20"/>
-                  </a:cubicBezTo>
-                  <a:cubicBezTo>
-                    <a:pt x="139" y="45"/>
-                    <a:pt x="139" y="45"/>
-                    <a:pt x="139" y="45"/>
-                  </a:cubicBezTo>
-                  <a:cubicBezTo>
-                    <a:pt x="140" y="48"/>
-                    <a:pt x="143" y="49"/>
-                    <a:pt x="146" y="48"/>
-                  </a:cubicBezTo>
-                  <a:cubicBezTo>
-                    <a:pt x="176" y="37"/>
-                    <a:pt x="176" y="37"/>
-                    <a:pt x="176" y="37"/>
-                  </a:cubicBezTo>
-                  <a:cubicBezTo>
-                    <a:pt x="168" y="50"/>
-                    <a:pt x="158" y="67"/>
-                    <a:pt x="156" y="85"/>
-                  </a:cubicBezTo>
-                  <a:cubicBezTo>
-                    <a:pt x="96" y="85"/>
-                    <a:pt x="96" y="85"/>
-                    <a:pt x="96" y="85"/>
-                  </a:cubicBezTo>
-                  <a:cubicBezTo>
-                    <a:pt x="94" y="67"/>
-                    <a:pt x="84" y="50"/>
-                    <a:pt x="76" y="37"/>
-                  </a:cubicBezTo>
-                  <a:lnTo>
-                    <a:pt x="106" y="48"/>
-                  </a:lnTo>
-                  <a:close/>
-                  <a:moveTo>
-                    <a:pt x="126" y="211"/>
-                  </a:moveTo>
-                  <a:cubicBezTo>
-                    <a:pt x="136" y="211"/>
-                    <a:pt x="144" y="219"/>
-                    <a:pt x="144" y="229"/>
-                  </a:cubicBezTo>
-                  <a:cubicBezTo>
-                    <a:pt x="144" y="232"/>
-                    <a:pt x="147" y="235"/>
-                    <a:pt x="150" y="235"/>
-                  </a:cubicBezTo>
-                  <a:cubicBezTo>
-                    <a:pt x="153" y="235"/>
-                    <a:pt x="156" y="232"/>
-                    <a:pt x="156" y="229"/>
-                  </a:cubicBezTo>
-                  <a:cubicBezTo>
-                    <a:pt x="156" y="214"/>
-                    <a:pt x="146" y="202"/>
-                    <a:pt x="132" y="199"/>
-                  </a:cubicBezTo>
-                  <a:cubicBezTo>
-                    <a:pt x="132" y="193"/>
-                    <a:pt x="132" y="193"/>
-                    <a:pt x="132" y="193"/>
-                  </a:cubicBezTo>
-                  <a:cubicBezTo>
-                    <a:pt x="132" y="189"/>
-                    <a:pt x="129" y="187"/>
-                    <a:pt x="126" y="187"/>
-                  </a:cubicBezTo>
-                  <a:cubicBezTo>
-                    <a:pt x="123" y="187"/>
-                    <a:pt x="120" y="189"/>
-                    <a:pt x="120" y="193"/>
-                  </a:cubicBezTo>
-                  <a:cubicBezTo>
-                    <a:pt x="120" y="199"/>
-                    <a:pt x="120" y="199"/>
-                    <a:pt x="120" y="199"/>
-                  </a:cubicBezTo>
-                  <a:cubicBezTo>
-                    <a:pt x="106" y="202"/>
-                    <a:pt x="96" y="214"/>
-                    <a:pt x="96" y="229"/>
-                  </a:cubicBezTo>
-                  <a:cubicBezTo>
-                    <a:pt x="96" y="245"/>
-                    <a:pt x="109" y="259"/>
-                    <a:pt x="126" y="259"/>
-                  </a:cubicBezTo>
-                  <a:cubicBezTo>
-                    <a:pt x="136" y="259"/>
-                    <a:pt x="144" y="267"/>
-                    <a:pt x="144" y="277"/>
-                  </a:cubicBezTo>
-                  <a:cubicBezTo>
-                    <a:pt x="144" y="287"/>
-                    <a:pt x="136" y="295"/>
-                    <a:pt x="126" y="295"/>
-                  </a:cubicBezTo>
-                  <a:cubicBezTo>
-                    <a:pt x="116" y="295"/>
-                    <a:pt x="108" y="287"/>
-                    <a:pt x="108" y="277"/>
-                  </a:cubicBezTo>
-                  <a:cubicBezTo>
-                    <a:pt x="108" y="273"/>
-                    <a:pt x="105" y="271"/>
-                    <a:pt x="102" y="271"/>
-                  </a:cubicBezTo>
-                  <a:cubicBezTo>
-                    <a:pt x="99" y="271"/>
-                    <a:pt x="96" y="273"/>
-                    <a:pt x="96" y="277"/>
-                  </a:cubicBezTo>
-                  <a:cubicBezTo>
-                    <a:pt x="96" y="291"/>
-                    <a:pt x="106" y="303"/>
-                    <a:pt x="120" y="306"/>
-                  </a:cubicBezTo>
-                  <a:cubicBezTo>
-                    <a:pt x="120" y="313"/>
-                    <a:pt x="120" y="313"/>
-                    <a:pt x="120" y="313"/>
-                  </a:cubicBezTo>
-                  <a:cubicBezTo>
-                    <a:pt x="120" y="316"/>
-                    <a:pt x="123" y="319"/>
-                    <a:pt x="126" y="319"/>
-                  </a:cubicBezTo>
-                  <a:cubicBezTo>
-                    <a:pt x="129" y="319"/>
-                    <a:pt x="132" y="316"/>
-                    <a:pt x="132" y="313"/>
-                  </a:cubicBezTo>
-                  <a:cubicBezTo>
-                    <a:pt x="132" y="306"/>
-                    <a:pt x="132" y="306"/>
-                    <a:pt x="132" y="306"/>
-                  </a:cubicBezTo>
-                  <a:cubicBezTo>
-                    <a:pt x="146" y="303"/>
-                    <a:pt x="156" y="291"/>
-                    <a:pt x="156" y="277"/>
-                  </a:cubicBezTo>
-                  <a:cubicBezTo>
-                    <a:pt x="156" y="260"/>
-                    <a:pt x="143" y="247"/>
-                    <a:pt x="126" y="247"/>
-                  </a:cubicBezTo>
-                  <a:cubicBezTo>
-                    <a:pt x="116" y="247"/>
-                    <a:pt x="108" y="239"/>
-                    <a:pt x="108" y="229"/>
-                  </a:cubicBezTo>
-                  <a:cubicBezTo>
-                    <a:pt x="108" y="219"/>
-                    <a:pt x="116" y="211"/>
-                    <a:pt x="126" y="211"/>
-                  </a:cubicBezTo>
-                  <a:close/>
-                </a:path>
-              </a:pathLst>
-            </a:custGeom>
-            <a:solidFill>
-              <a:srgbClr val="FFFFFF"/>
-            </a:solidFill>
-            <a:ln>
-              <a:noFill/>
-            </a:ln>
-            <a:extLst>
-              <a:ext uri="{91240B29-F687-4F45-9708-019B960494DF}">
-                <a14:hiddenLine xmlns:a14="http://schemas.microsoft.com/office/drawing/2010/main" w="9525">
-                  <a:solidFill>
-                    <a:srgbClr val="000000"/>
-                  </a:solidFill>
-                  <a:round/>
-                  <a:headEnd/>
-                  <a:tailEnd/>
-                </a14:hiddenLine>
-              </a:ext>
-            </a:extLst>
           </p:spPr>
           <p:txBody>
             <a:bodyPr vert="horz" wrap="square" lIns="91440" tIns="45720" rIns="91440" bIns="45720" numCol="1" anchor="t" anchorCtr="0" compatLnSpc="1">
